--- a/_SNS_DeepNeuralNework with TensorFlow_lezione.pptx
+++ b/_SNS_DeepNeuralNework with TensorFlow_lezione.pptx
@@ -14,8 +14,8 @@
     <p:sldId id="286" r:id="rId2"/>
     <p:sldId id="285" r:id="rId3"/>
     <p:sldId id="275" r:id="rId4"/>
-    <p:sldId id="287" r:id="rId5"/>
-    <p:sldId id="288" r:id="rId6"/>
+    <p:sldId id="288" r:id="rId5"/>
+    <p:sldId id="287" r:id="rId6"/>
     <p:sldId id="258" r:id="rId7"/>
     <p:sldId id="256" r:id="rId8"/>
     <p:sldId id="257" r:id="rId9"/>
@@ -166,6 +166,20 @@
       <pc:docMk/>
       <pc:sldMk cId="2165335604" sldId="286"/>
     </pc:sldMkLst>
+    <p188:replyLst>
+      <p188:reply id="{20EE2DDF-85ED-41A4-B072-A88398DF681A}" authorId="{15C06C61-55CC-1598-4B95-99902AB01CCD}" created="2026-05-03T15:59:43.686">
+        <p188:txBody>
+          <a:bodyPr/>
+          <a:lstStyle/>
+          <a:p>
+            <a:r>
+              <a:rPr lang="it-IT"/>
+              <a:t>We focus on different architectures, we will explain and build a fully connected network and also a convolutional network</a:t>
+            </a:r>
+          </a:p>
+        </p188:txBody>
+      </p188:reply>
+    </p188:replyLst>
     <p188:txBody>
       <a:bodyPr/>
       <a:lstStyle/>
@@ -174,6 +188,22 @@
           <a:rPr lang="it-IT"/>
           <a:t>We are going to face classification problems
 And we are using Deep learning frameworks, libraries. In particular we will use TensorFlow and Keras</a:t>
+        </a:r>
+      </a:p>
+    </p188:txBody>
+  </p188:cm>
+  <p188:cm id="{698AB4DE-781E-4A8F-952B-F4C0A20EC3D1}" authorId="{15C06C61-55CC-1598-4B95-99902AB01CCD}" created="2026-05-03T15:57:58.636">
+    <pc:sldMkLst xmlns:pc="http://schemas.microsoft.com/office/powerpoint/2013/main/command">
+      <pc:docMk/>
+      <pc:sldMk cId="2165335604" sldId="286"/>
+    </pc:sldMkLst>
+    <p188:txBody>
+      <a:bodyPr/>
+      <a:lstStyle/>
+      <a:p>
+        <a:r>
+          <a:rPr lang="it-IT"/>
+          <a:t>With this presentation we are going to see some theory, introduce some conepts, then we will have a practical session, an hands-on session, where we are going to do some coding, solve some problems</a:t>
         </a:r>
       </a:p>
     </p188:txBody>
@@ -2107,7 +2137,7 @@
         </p:blipFill>
         <p:spPr>
           <a:xfrm>
-            <a:off x="8242773" y="1951240"/>
+            <a:off x="7467520" y="1951240"/>
             <a:ext cx="3742147" cy="4166966"/>
           </a:xfrm>
           <a:prstGeom prst="rect">
@@ -2203,7 +2233,7 @@
         </p:nvSpPr>
         <p:spPr>
           <a:xfrm>
-            <a:off x="8209280" y="1836327"/>
+            <a:off x="7434027" y="1836327"/>
             <a:ext cx="3826440" cy="2075273"/>
           </a:xfrm>
           <a:prstGeom prst="rect">
@@ -2241,12 +2271,253 @@
           </a:p>
         </p:txBody>
       </p:sp>
+      <p:sp>
+        <p:nvSpPr>
+          <p:cNvPr id="46" name="CasellaDiTesto 45">
+            <a:extLst>
+              <a:ext uri="{FF2B5EF4-FFF2-40B4-BE49-F238E27FC236}">
+                <a16:creationId xmlns:a16="http://schemas.microsoft.com/office/drawing/2014/main" id="{AEBBD56D-F7CF-11DC-D17F-EDFAE99EE230}"/>
+              </a:ext>
+            </a:extLst>
+          </p:cNvPr>
+          <p:cNvSpPr txBox="1"/>
+          <p:nvPr/>
+        </p:nvSpPr>
+        <p:spPr>
+          <a:xfrm>
+            <a:off x="6096000" y="939340"/>
+            <a:ext cx="6096000" cy="400110"/>
+          </a:xfrm>
+          <a:prstGeom prst="rect">
+            <a:avLst/>
+          </a:prstGeom>
+          <a:noFill/>
+        </p:spPr>
+        <p:txBody>
+          <a:bodyPr wrap="square">
+            <a:spAutoFit/>
+          </a:bodyPr>
+          <a:lstStyle/>
+          <a:p>
+            <a:pPr algn="ctr"/>
+            <a:r>
+              <a:rPr lang="it-IT" sz="2000" b="1" dirty="0">
+                <a:latin typeface="Georgia" panose="02040502050405020303" pitchFamily="18" charset="0"/>
+              </a:rPr>
+              <a:t>Deep Learning frameworks (libraries)</a:t>
+            </a:r>
+          </a:p>
+        </p:txBody>
+      </p:sp>
+      <p:sp>
+        <p:nvSpPr>
+          <p:cNvPr id="47" name="CasellaDiTesto 46">
+            <a:extLst>
+              <a:ext uri="{FF2B5EF4-FFF2-40B4-BE49-F238E27FC236}">
+                <a16:creationId xmlns:a16="http://schemas.microsoft.com/office/drawing/2014/main" id="{190B2BB0-90E4-8AB2-2F90-7AF12D0A2E98}"/>
+              </a:ext>
+            </a:extLst>
+          </p:cNvPr>
+          <p:cNvSpPr txBox="1"/>
+          <p:nvPr/>
+        </p:nvSpPr>
+        <p:spPr>
+          <a:xfrm>
+            <a:off x="6265226" y="2152361"/>
+            <a:ext cx="1164062" cy="646331"/>
+          </a:xfrm>
+          <a:prstGeom prst="rect">
+            <a:avLst/>
+          </a:prstGeom>
+          <a:noFill/>
+          <a:ln w="28575">
+            <a:noFill/>
+          </a:ln>
+        </p:spPr>
+        <p:txBody>
+          <a:bodyPr wrap="square" rtlCol="0">
+            <a:spAutoFit/>
+          </a:bodyPr>
+          <a:lstStyle/>
+          <a:p>
+            <a:pPr algn="ctr"/>
+            <a:r>
+              <a:rPr lang="it-IT" b="1" dirty="0" err="1">
+                <a:latin typeface="Georgia" panose="02040502050405020303" pitchFamily="18" charset="0"/>
+              </a:rPr>
+              <a:t>We</a:t>
+            </a:r>
+            <a:r>
+              <a:rPr lang="it-IT" b="1" dirty="0">
+                <a:latin typeface="Georgia" panose="02040502050405020303" pitchFamily="18" charset="0"/>
+              </a:rPr>
+              <a:t> use </a:t>
+            </a:r>
+            <a:r>
+              <a:rPr lang="it-IT" b="1" dirty="0" err="1">
+                <a:latin typeface="Georgia" panose="02040502050405020303" pitchFamily="18" charset="0"/>
+              </a:rPr>
+              <a:t>these</a:t>
+            </a:r>
+            <a:endParaRPr lang="it-IT" b="1" dirty="0">
+              <a:latin typeface="Georgia" panose="02040502050405020303" pitchFamily="18" charset="0"/>
+            </a:endParaRPr>
+          </a:p>
+        </p:txBody>
+      </p:sp>
+      <p:cxnSp>
+        <p:nvCxnSpPr>
+          <p:cNvPr id="49" name="Connettore 2 48">
+            <a:extLst>
+              <a:ext uri="{FF2B5EF4-FFF2-40B4-BE49-F238E27FC236}">
+                <a16:creationId xmlns:a16="http://schemas.microsoft.com/office/drawing/2014/main" id="{C57A360C-4E53-D839-0963-27C1DD5D8F71}"/>
+              </a:ext>
+            </a:extLst>
+          </p:cNvPr>
+          <p:cNvCxnSpPr>
+            <a:cxnSpLocks/>
+          </p:cNvCxnSpPr>
+          <p:nvPr/>
+        </p:nvCxnSpPr>
+        <p:spPr>
+          <a:xfrm>
+            <a:off x="6415405" y="2890781"/>
+            <a:ext cx="904554" cy="0"/>
+          </a:xfrm>
+          <a:prstGeom prst="straightConnector1">
+            <a:avLst/>
+          </a:prstGeom>
+          <a:ln w="28575">
+            <a:solidFill>
+              <a:srgbClr val="9933FF"/>
+            </a:solidFill>
+            <a:tailEnd type="arrow"/>
+          </a:ln>
+        </p:spPr>
+        <p:style>
+          <a:lnRef idx="1">
+            <a:schemeClr val="accent1"/>
+          </a:lnRef>
+          <a:fillRef idx="0">
+            <a:schemeClr val="accent1"/>
+          </a:fillRef>
+          <a:effectRef idx="0">
+            <a:schemeClr val="accent1"/>
+          </a:effectRef>
+          <a:fontRef idx="minor">
+            <a:schemeClr val="tx1"/>
+          </a:fontRef>
+        </p:style>
+      </p:cxnSp>
+      <p:cxnSp>
+        <p:nvCxnSpPr>
+          <p:cNvPr id="4" name="Connettore 2 3">
+            <a:extLst>
+              <a:ext uri="{FF2B5EF4-FFF2-40B4-BE49-F238E27FC236}">
+                <a16:creationId xmlns:a16="http://schemas.microsoft.com/office/drawing/2014/main" id="{0CF3AE69-AB9B-E096-FFD3-3CADE40BD4D8}"/>
+              </a:ext>
+            </a:extLst>
+          </p:cNvPr>
+          <p:cNvCxnSpPr>
+            <a:cxnSpLocks/>
+          </p:cNvCxnSpPr>
+          <p:nvPr/>
+        </p:nvCxnSpPr>
+        <p:spPr>
+          <a:xfrm flipH="1">
+            <a:off x="4453276" y="3400184"/>
+            <a:ext cx="1218025" cy="0"/>
+          </a:xfrm>
+          <a:prstGeom prst="straightConnector1">
+            <a:avLst/>
+          </a:prstGeom>
+          <a:ln w="28575">
+            <a:solidFill>
+              <a:srgbClr val="9933FF"/>
+            </a:solidFill>
+            <a:tailEnd type="arrow"/>
+          </a:ln>
+        </p:spPr>
+        <p:style>
+          <a:lnRef idx="1">
+            <a:schemeClr val="accent1"/>
+          </a:lnRef>
+          <a:fillRef idx="0">
+            <a:schemeClr val="accent1"/>
+          </a:fillRef>
+          <a:effectRef idx="0">
+            <a:schemeClr val="accent1"/>
+          </a:effectRef>
+          <a:fontRef idx="minor">
+            <a:schemeClr val="tx1"/>
+          </a:fontRef>
+        </p:style>
+      </p:cxnSp>
+      <p:sp>
+        <p:nvSpPr>
+          <p:cNvPr id="11" name="CasellaDiTesto 10">
+            <a:extLst>
+              <a:ext uri="{FF2B5EF4-FFF2-40B4-BE49-F238E27FC236}">
+                <a16:creationId xmlns:a16="http://schemas.microsoft.com/office/drawing/2014/main" id="{CBC35293-DFA5-4892-7C39-AA09F562459F}"/>
+              </a:ext>
+            </a:extLst>
+          </p:cNvPr>
+          <p:cNvSpPr txBox="1"/>
+          <p:nvPr/>
+        </p:nvSpPr>
+        <p:spPr>
+          <a:xfrm>
+            <a:off x="4271576" y="3499221"/>
+            <a:ext cx="1581427" cy="646331"/>
+          </a:xfrm>
+          <a:prstGeom prst="rect">
+            <a:avLst/>
+          </a:prstGeom>
+          <a:noFill/>
+          <a:ln w="28575">
+            <a:noFill/>
+          </a:ln>
+        </p:spPr>
+        <p:txBody>
+          <a:bodyPr wrap="square" rtlCol="0">
+            <a:spAutoFit/>
+          </a:bodyPr>
+          <a:lstStyle/>
+          <a:p>
+            <a:pPr algn="ctr"/>
+            <a:r>
+              <a:rPr lang="it-IT" b="1" dirty="0" err="1">
+                <a:latin typeface="Georgia" panose="02040502050405020303" pitchFamily="18" charset="0"/>
+              </a:rPr>
+              <a:t>We</a:t>
+            </a:r>
+            <a:r>
+              <a:rPr lang="it-IT" b="1" dirty="0">
+                <a:latin typeface="Georgia" panose="02040502050405020303" pitchFamily="18" charset="0"/>
+              </a:rPr>
+              <a:t> focus on </a:t>
+            </a:r>
+            <a:r>
+              <a:rPr lang="it-IT" b="1" dirty="0" err="1">
+                <a:latin typeface="Georgia" panose="02040502050405020303" pitchFamily="18" charset="0"/>
+              </a:rPr>
+              <a:t>this</a:t>
+            </a:r>
+            <a:r>
+              <a:rPr lang="it-IT" b="1" dirty="0">
+                <a:latin typeface="Georgia" panose="02040502050405020303" pitchFamily="18" charset="0"/>
+              </a:rPr>
+              <a:t> part</a:t>
+            </a:r>
+          </a:p>
+        </p:txBody>
+      </p:sp>
       <p:grpSp>
         <p:nvGrpSpPr>
-          <p:cNvPr id="5" name="Gruppo 4">
+          <p:cNvPr id="14" name="Gruppo 13">
             <a:extLst>
               <a:ext uri="{FF2B5EF4-FFF2-40B4-BE49-F238E27FC236}">
-                <a16:creationId xmlns:a16="http://schemas.microsoft.com/office/drawing/2014/main" id="{2D94747B-6640-2115-0E58-13FD31A2CE46}"/>
+                <a16:creationId xmlns:a16="http://schemas.microsoft.com/office/drawing/2014/main" id="{81F7792E-5C8C-8C95-D7F7-103AB339690A}"/>
               </a:ext>
             </a:extLst>
           </p:cNvPr>
@@ -2263,10 +2534,10 @@
         </p:grpSpPr>
         <p:sp>
           <p:nvSpPr>
-            <p:cNvPr id="6" name="CasellaDiTesto 5">
+            <p:cNvPr id="15" name="CasellaDiTesto 14">
               <a:extLst>
                 <a:ext uri="{FF2B5EF4-FFF2-40B4-BE49-F238E27FC236}">
-                  <a16:creationId xmlns:a16="http://schemas.microsoft.com/office/drawing/2014/main" id="{E4280FB3-69A0-B35F-942A-3D09C928CE92}"/>
+                  <a16:creationId xmlns:a16="http://schemas.microsoft.com/office/drawing/2014/main" id="{D6878D32-B521-A046-A11A-698CDE7B5A62}"/>
                 </a:ext>
               </a:extLst>
             </p:cNvPr>
@@ -2316,10 +2587,10 @@
         </p:sp>
         <p:grpSp>
           <p:nvGrpSpPr>
-            <p:cNvPr id="7" name="Gruppo 6">
+            <p:cNvPr id="16" name="Gruppo 15">
               <a:extLst>
                 <a:ext uri="{FF2B5EF4-FFF2-40B4-BE49-F238E27FC236}">
-                  <a16:creationId xmlns:a16="http://schemas.microsoft.com/office/drawing/2014/main" id="{59B9B270-A837-C1F5-12C3-0DF2D8A0BFF4}"/>
+                  <a16:creationId xmlns:a16="http://schemas.microsoft.com/office/drawing/2014/main" id="{722A421B-2CF4-CDFE-43B8-F09612E86575}"/>
                 </a:ext>
               </a:extLst>
             </p:cNvPr>
@@ -2328,18 +2599,57 @@
           </p:nvGrpSpPr>
           <p:grpSpPr>
             <a:xfrm>
-              <a:off x="265385" y="1327599"/>
-              <a:ext cx="4499764" cy="1017511"/>
-              <a:chOff x="7634679" y="1303727"/>
-              <a:chExt cx="4499764" cy="1017511"/>
+              <a:off x="265385" y="1310221"/>
+              <a:ext cx="4499764" cy="1035066"/>
+              <a:chOff x="7634679" y="1286349"/>
+              <a:chExt cx="4499764" cy="1035066"/>
             </a:xfrm>
           </p:grpSpPr>
+          <p:cxnSp>
+            <p:nvCxnSpPr>
+              <p:cNvPr id="25" name="Connettore diritto 24">
+                <a:extLst>
+                  <a:ext uri="{FF2B5EF4-FFF2-40B4-BE49-F238E27FC236}">
+                    <a16:creationId xmlns:a16="http://schemas.microsoft.com/office/drawing/2014/main" id="{2C764700-49CF-9DC3-CC1E-A17FCFA6315E}"/>
+                  </a:ext>
+                </a:extLst>
+              </p:cNvPr>
+              <p:cNvCxnSpPr>
+                <a:cxnSpLocks/>
+                <a:stCxn id="26" idx="3"/>
+              </p:cNvCxnSpPr>
+              <p:nvPr/>
+            </p:nvCxnSpPr>
+            <p:spPr>
+              <a:xfrm>
+                <a:off x="8368104" y="1487153"/>
+                <a:ext cx="470304" cy="0"/>
+              </a:xfrm>
+              <a:prstGeom prst="line">
+                <a:avLst/>
+              </a:prstGeom>
+            </p:spPr>
+            <p:style>
+              <a:lnRef idx="3">
+                <a:schemeClr val="dk1"/>
+              </a:lnRef>
+              <a:fillRef idx="0">
+                <a:schemeClr val="dk1"/>
+              </a:fillRef>
+              <a:effectRef idx="2">
+                <a:schemeClr val="dk1"/>
+              </a:effectRef>
+              <a:fontRef idx="minor">
+                <a:schemeClr val="tx1"/>
+              </a:fontRef>
+            </p:style>
+          </p:cxnSp>
           <p:sp>
             <p:nvSpPr>
-              <p:cNvPr id="36" name="CasellaDiTesto 35">
+              <p:cNvPr id="26" name="CasellaDiTesto 25">
                 <a:extLst>
                   <a:ext uri="{FF2B5EF4-FFF2-40B4-BE49-F238E27FC236}">
-                    <a16:creationId xmlns:a16="http://schemas.microsoft.com/office/drawing/2014/main" id="{BFCD269B-8CB2-2ABC-8161-192957F3D919}"/>
+                    <a16:creationId xmlns:a16="http://schemas.microsoft.com/office/drawing/2014/main" id="{196C91DD-D34B-C4DE-931F-088555DAA235}"/>
                   </a:ext>
                 </a:extLst>
               </p:cNvPr>
@@ -2348,8 +2658,8 @@
             </p:nvSpPr>
             <p:spPr>
               <a:xfrm>
-                <a:off x="7634679" y="1307064"/>
-                <a:ext cx="733425" cy="369332"/>
+                <a:off x="7634679" y="1286349"/>
+                <a:ext cx="733425" cy="401607"/>
               </a:xfrm>
               <a:prstGeom prst="rect">
                 <a:avLst/>
@@ -2384,17 +2694,17 @@
                 <a:pPr algn="ctr"/>
                 <a:r>
                   <a:rPr lang="it-IT" dirty="0"/>
-                  <a:t>Dati</a:t>
+                  <a:t>Data</a:t>
                 </a:r>
               </a:p>
             </p:txBody>
           </p:sp>
           <p:sp>
             <p:nvSpPr>
-              <p:cNvPr id="37" name="CasellaDiTesto 36">
+              <p:cNvPr id="27" name="CasellaDiTesto 26">
                 <a:extLst>
                   <a:ext uri="{FF2B5EF4-FFF2-40B4-BE49-F238E27FC236}">
-                    <a16:creationId xmlns:a16="http://schemas.microsoft.com/office/drawing/2014/main" id="{9C123B4E-7DD9-5F3E-3D39-21BBD017B2F3}"/>
+                    <a16:creationId xmlns:a16="http://schemas.microsoft.com/office/drawing/2014/main" id="{60EDF4AB-715A-A67D-FCA1-F8A84AA749FD}"/>
                   </a:ext>
                 </a:extLst>
               </p:cNvPr>
@@ -2403,8 +2713,110 @@
             </p:nvSpPr>
             <p:spPr>
               <a:xfrm>
-                <a:off x="8334164" y="1935946"/>
-                <a:ext cx="1110265" cy="369332"/>
+                <a:off x="8884935" y="1287591"/>
+                <a:ext cx="1386174" cy="401606"/>
+              </a:xfrm>
+              <a:prstGeom prst="rect">
+                <a:avLst/>
+              </a:prstGeom>
+              <a:noFill/>
+              <a:ln w="28575">
+                <a:solidFill>
+                  <a:srgbClr val="00B050"/>
+                </a:solidFill>
+              </a:ln>
+            </p:spPr>
+            <p:style>
+              <a:lnRef idx="2">
+                <a:schemeClr val="accent6"/>
+              </a:lnRef>
+              <a:fillRef idx="1">
+                <a:schemeClr val="lt1"/>
+              </a:fillRef>
+              <a:effectRef idx="0">
+                <a:schemeClr val="accent6"/>
+              </a:effectRef>
+              <a:fontRef idx="minor">
+                <a:schemeClr val="dk1"/>
+              </a:fontRef>
+            </p:style>
+            <p:txBody>
+              <a:bodyPr wrap="square" anchor="ctr">
+                <a:spAutoFit/>
+              </a:bodyPr>
+              <a:lstStyle/>
+              <a:p>
+                <a:pPr algn="ctr"/>
+                <a:r>
+                  <a:rPr lang="it-IT" dirty="0" err="1"/>
+                  <a:t>Predctions</a:t>
+                </a:r>
+                <a:endParaRPr lang="it-IT" sz="300" dirty="0"/>
+              </a:p>
+            </p:txBody>
+          </p:sp>
+          <p:cxnSp>
+            <p:nvCxnSpPr>
+              <p:cNvPr id="48" name="Connettore a gomito 47">
+                <a:extLst>
+                  <a:ext uri="{FF2B5EF4-FFF2-40B4-BE49-F238E27FC236}">
+                    <a16:creationId xmlns:a16="http://schemas.microsoft.com/office/drawing/2014/main" id="{7F77AA4D-E78C-A8D9-CED1-A7A665A5C1EB}"/>
+                  </a:ext>
+                </a:extLst>
+              </p:cNvPr>
+              <p:cNvCxnSpPr>
+                <a:cxnSpLocks/>
+                <a:stCxn id="52" idx="0"/>
+                <a:endCxn id="27" idx="1"/>
+              </p:cNvCxnSpPr>
+              <p:nvPr/>
+            </p:nvCxnSpPr>
+            <p:spPr>
+              <a:xfrm rot="16200000" flipV="1">
+                <a:off x="8671409" y="1701922"/>
+                <a:ext cx="431415" cy="4361"/>
+              </a:xfrm>
+              <a:prstGeom prst="bentConnector4">
+                <a:avLst>
+                  <a:gd name="adj1" fmla="val 26727"/>
+                  <a:gd name="adj2" fmla="val 7158574"/>
+                </a:avLst>
+              </a:prstGeom>
+              <a:ln>
+                <a:tailEnd type="triangle"/>
+              </a:ln>
+            </p:spPr>
+            <p:style>
+              <a:lnRef idx="3">
+                <a:schemeClr val="dk1"/>
+              </a:lnRef>
+              <a:fillRef idx="0">
+                <a:schemeClr val="dk1"/>
+              </a:fillRef>
+              <a:effectRef idx="2">
+                <a:schemeClr val="dk1"/>
+              </a:effectRef>
+              <a:fontRef idx="minor">
+                <a:schemeClr val="tx1"/>
+              </a:fontRef>
+            </p:style>
+          </p:cxnSp>
+          <p:sp>
+            <p:nvSpPr>
+              <p:cNvPr id="52" name="CasellaDiTesto 51">
+                <a:extLst>
+                  <a:ext uri="{FF2B5EF4-FFF2-40B4-BE49-F238E27FC236}">
+                    <a16:creationId xmlns:a16="http://schemas.microsoft.com/office/drawing/2014/main" id="{983E45FF-5A99-5ACB-CBF6-F6A770CBDF43}"/>
+                  </a:ext>
+                </a:extLst>
+              </p:cNvPr>
+              <p:cNvSpPr txBox="1"/>
+              <p:nvPr/>
+            </p:nvSpPr>
+            <p:spPr>
+              <a:xfrm>
+                <a:off x="8334164" y="1919809"/>
+                <a:ext cx="1110265" cy="401606"/>
               </a:xfrm>
               <a:prstGeom prst="rect">
                 <a:avLst/>
@@ -2439,18 +2851,160 @@
                 <a:pPr algn="ctr"/>
                 <a:r>
                   <a:rPr lang="it-IT" dirty="0"/>
-                  <a:t>Modello</a:t>
+                  <a:t>Model</a:t>
                 </a:r>
                 <a:endParaRPr lang="it-IT" sz="300" dirty="0"/>
               </a:p>
             </p:txBody>
           </p:sp>
+          <p:cxnSp>
+            <p:nvCxnSpPr>
+              <p:cNvPr id="53" name="Connettore 2 52">
+                <a:extLst>
+                  <a:ext uri="{FF2B5EF4-FFF2-40B4-BE49-F238E27FC236}">
+                    <a16:creationId xmlns:a16="http://schemas.microsoft.com/office/drawing/2014/main" id="{069C9089-38E6-1003-EC9E-AD8742A75876}"/>
+                  </a:ext>
+                </a:extLst>
+              </p:cNvPr>
+              <p:cNvCxnSpPr>
+                <a:cxnSpLocks/>
+                <a:stCxn id="54" idx="1"/>
+                <a:endCxn id="52" idx="3"/>
+              </p:cNvCxnSpPr>
+              <p:nvPr/>
+            </p:nvCxnSpPr>
+            <p:spPr>
+              <a:xfrm flipH="1">
+                <a:off x="9444429" y="2120436"/>
+                <a:ext cx="652233" cy="177"/>
+              </a:xfrm>
+              <a:prstGeom prst="straightConnector1">
+                <a:avLst/>
+              </a:prstGeom>
+              <a:ln>
+                <a:tailEnd type="triangle"/>
+              </a:ln>
+            </p:spPr>
+            <p:style>
+              <a:lnRef idx="3">
+                <a:schemeClr val="dk1"/>
+              </a:lnRef>
+              <a:fillRef idx="0">
+                <a:schemeClr val="dk1"/>
+              </a:fillRef>
+              <a:effectRef idx="2">
+                <a:schemeClr val="dk1"/>
+              </a:effectRef>
+              <a:fontRef idx="minor">
+                <a:schemeClr val="tx1"/>
+              </a:fontRef>
+            </p:style>
+          </p:cxnSp>
           <p:sp>
             <p:nvSpPr>
-              <p:cNvPr id="38" name="CasellaDiTesto 37">
+              <p:cNvPr id="54" name="CasellaDiTesto 53">
                 <a:extLst>
                   <a:ext uri="{FF2B5EF4-FFF2-40B4-BE49-F238E27FC236}">
-                    <a16:creationId xmlns:a16="http://schemas.microsoft.com/office/drawing/2014/main" id="{EEBB529B-B938-5E5F-A6EF-9ED53FB2EBFC}"/>
+                    <a16:creationId xmlns:a16="http://schemas.microsoft.com/office/drawing/2014/main" id="{FA7072D1-618A-2817-8EF9-3129CD702646}"/>
+                  </a:ext>
+                </a:extLst>
+              </p:cNvPr>
+              <p:cNvSpPr txBox="1"/>
+              <p:nvPr/>
+            </p:nvSpPr>
+            <p:spPr>
+              <a:xfrm>
+                <a:off x="10096662" y="1919632"/>
+                <a:ext cx="2037781" cy="401606"/>
+              </a:xfrm>
+              <a:prstGeom prst="rect">
+                <a:avLst/>
+              </a:prstGeom>
+              <a:noFill/>
+              <a:ln w="28575">
+                <a:solidFill>
+                  <a:srgbClr val="00B050"/>
+                </a:solidFill>
+              </a:ln>
+            </p:spPr>
+            <p:style>
+              <a:lnRef idx="2">
+                <a:schemeClr val="accent6"/>
+              </a:lnRef>
+              <a:fillRef idx="1">
+                <a:schemeClr val="lt1"/>
+              </a:fillRef>
+              <a:effectRef idx="0">
+                <a:schemeClr val="accent6"/>
+              </a:effectRef>
+              <a:fontRef idx="minor">
+                <a:schemeClr val="dk1"/>
+              </a:fontRef>
+            </p:style>
+            <p:txBody>
+              <a:bodyPr wrap="square" anchor="ctr">
+                <a:spAutoFit/>
+              </a:bodyPr>
+              <a:lstStyle/>
+              <a:p>
+                <a:pPr algn="ctr"/>
+                <a:r>
+                  <a:rPr lang="it-IT" dirty="0"/>
+                  <a:t>Weight update</a:t>
+                </a:r>
+                <a:endParaRPr lang="it-IT" sz="300" dirty="0"/>
+              </a:p>
+            </p:txBody>
+          </p:sp>
+          <p:cxnSp>
+            <p:nvCxnSpPr>
+              <p:cNvPr id="55" name="Connettore 2 54">
+                <a:extLst>
+                  <a:ext uri="{FF2B5EF4-FFF2-40B4-BE49-F238E27FC236}">
+                    <a16:creationId xmlns:a16="http://schemas.microsoft.com/office/drawing/2014/main" id="{4175B508-C705-8BC3-CF5E-F39EBFB48263}"/>
+                  </a:ext>
+                </a:extLst>
+              </p:cNvPr>
+              <p:cNvCxnSpPr>
+                <a:cxnSpLocks/>
+                <a:stCxn id="56" idx="2"/>
+                <a:endCxn id="54" idx="0"/>
+              </p:cNvCxnSpPr>
+              <p:nvPr/>
+            </p:nvCxnSpPr>
+            <p:spPr>
+              <a:xfrm>
+                <a:off x="11110247" y="1676396"/>
+                <a:ext cx="5305" cy="243236"/>
+              </a:xfrm>
+              <a:prstGeom prst="straightConnector1">
+                <a:avLst/>
+              </a:prstGeom>
+              <a:ln>
+                <a:tailEnd type="triangle"/>
+              </a:ln>
+            </p:spPr>
+            <p:style>
+              <a:lnRef idx="3">
+                <a:schemeClr val="dk1"/>
+              </a:lnRef>
+              <a:fillRef idx="0">
+                <a:schemeClr val="dk1"/>
+              </a:fillRef>
+              <a:effectRef idx="2">
+                <a:schemeClr val="dk1"/>
+              </a:effectRef>
+              <a:fontRef idx="minor">
+                <a:schemeClr val="tx1"/>
+              </a:fontRef>
+            </p:style>
+          </p:cxnSp>
+          <p:sp>
+            <p:nvSpPr>
+              <p:cNvPr id="56" name="CasellaDiTesto 55">
+                <a:extLst>
+                  <a:ext uri="{FF2B5EF4-FFF2-40B4-BE49-F238E27FC236}">
+                    <a16:creationId xmlns:a16="http://schemas.microsoft.com/office/drawing/2014/main" id="{F7729044-6870-9698-6136-25D2A33F635C}"/>
                   </a:ext>
                 </a:extLst>
               </p:cNvPr>
@@ -2501,310 +3055,24 @@
               </a:p>
             </p:txBody>
           </p:sp>
-          <p:sp>
-            <p:nvSpPr>
-              <p:cNvPr id="39" name="CasellaDiTesto 38">
+          <p:cxnSp>
+            <p:nvCxnSpPr>
+              <p:cNvPr id="57" name="Connettore 2 56">
                 <a:extLst>
                   <a:ext uri="{FF2B5EF4-FFF2-40B4-BE49-F238E27FC236}">
-                    <a16:creationId xmlns:a16="http://schemas.microsoft.com/office/drawing/2014/main" id="{1486895C-8456-437B-7EEF-D15787EC78BC}"/>
-                  </a:ext>
-                </a:extLst>
-              </p:cNvPr>
-              <p:cNvSpPr txBox="1"/>
-              <p:nvPr/>
-            </p:nvSpPr>
-            <p:spPr>
-              <a:xfrm>
-                <a:off x="10096662" y="1919632"/>
-                <a:ext cx="2037781" cy="401606"/>
-              </a:xfrm>
-              <a:prstGeom prst="rect">
-                <a:avLst/>
-              </a:prstGeom>
-              <a:noFill/>
-              <a:ln w="28575">
-                <a:solidFill>
-                  <a:srgbClr val="00B050"/>
-                </a:solidFill>
-              </a:ln>
-            </p:spPr>
-            <p:style>
-              <a:lnRef idx="2">
-                <a:schemeClr val="accent6"/>
-              </a:lnRef>
-              <a:fillRef idx="1">
-                <a:schemeClr val="lt1"/>
-              </a:fillRef>
-              <a:effectRef idx="0">
-                <a:schemeClr val="accent6"/>
-              </a:effectRef>
-              <a:fontRef idx="minor">
-                <a:schemeClr val="dk1"/>
-              </a:fontRef>
-            </p:style>
-            <p:txBody>
-              <a:bodyPr wrap="square" anchor="ctr">
-                <a:spAutoFit/>
-              </a:bodyPr>
-              <a:lstStyle/>
-              <a:p>
-                <a:pPr algn="ctr"/>
-                <a:r>
-                  <a:rPr lang="it-IT" dirty="0"/>
-                  <a:t>Aggiornamento</a:t>
-                </a:r>
-                <a:endParaRPr lang="it-IT" sz="300" dirty="0"/>
-              </a:p>
-            </p:txBody>
-          </p:sp>
-          <p:cxnSp>
-            <p:nvCxnSpPr>
-              <p:cNvPr id="40" name="Connettore 2 39">
-                <a:extLst>
-                  <a:ext uri="{FF2B5EF4-FFF2-40B4-BE49-F238E27FC236}">
-                    <a16:creationId xmlns:a16="http://schemas.microsoft.com/office/drawing/2014/main" id="{1904E83F-60B2-20B6-10EF-ECFFD1CE8ED2}"/>
+                    <a16:creationId xmlns:a16="http://schemas.microsoft.com/office/drawing/2014/main" id="{6AA6F820-ECD1-312B-BD78-4A59D9424CBB}"/>
                   </a:ext>
                 </a:extLst>
               </p:cNvPr>
               <p:cNvCxnSpPr>
                 <a:cxnSpLocks/>
-                <a:stCxn id="38" idx="2"/>
-                <a:endCxn id="39" idx="0"/>
-              </p:cNvCxnSpPr>
-              <p:nvPr/>
-            </p:nvCxnSpPr>
-            <p:spPr>
-              <a:xfrm>
-                <a:off x="11110247" y="1676396"/>
-                <a:ext cx="5305" cy="243236"/>
-              </a:xfrm>
-              <a:prstGeom prst="straightConnector1">
-                <a:avLst/>
-              </a:prstGeom>
-              <a:ln>
-                <a:tailEnd type="triangle"/>
-              </a:ln>
-            </p:spPr>
-            <p:style>
-              <a:lnRef idx="3">
-                <a:schemeClr val="dk1"/>
-              </a:lnRef>
-              <a:fillRef idx="0">
-                <a:schemeClr val="dk1"/>
-              </a:fillRef>
-              <a:effectRef idx="2">
-                <a:schemeClr val="dk1"/>
-              </a:effectRef>
-              <a:fontRef idx="minor">
-                <a:schemeClr val="tx1"/>
-              </a:fontRef>
-            </p:style>
-          </p:cxnSp>
-          <p:cxnSp>
-            <p:nvCxnSpPr>
-              <p:cNvPr id="41" name="Connettore 2 40">
-                <a:extLst>
-                  <a:ext uri="{FF2B5EF4-FFF2-40B4-BE49-F238E27FC236}">
-                    <a16:creationId xmlns:a16="http://schemas.microsoft.com/office/drawing/2014/main" id="{013E045F-DBED-11A6-5251-A84D4EBA111F}"/>
-                  </a:ext>
-                </a:extLst>
-              </p:cNvPr>
-              <p:cNvCxnSpPr>
-                <a:cxnSpLocks/>
-                <a:stCxn id="39" idx="1"/>
-                <a:endCxn id="37" idx="3"/>
-              </p:cNvCxnSpPr>
-              <p:nvPr/>
-            </p:nvCxnSpPr>
-            <p:spPr>
-              <a:xfrm flipH="1">
-                <a:off x="9444429" y="2120436"/>
-                <a:ext cx="652233" cy="177"/>
-              </a:xfrm>
-              <a:prstGeom prst="straightConnector1">
-                <a:avLst/>
-              </a:prstGeom>
-              <a:ln>
-                <a:tailEnd type="triangle"/>
-              </a:ln>
-            </p:spPr>
-            <p:style>
-              <a:lnRef idx="3">
-                <a:schemeClr val="dk1"/>
-              </a:lnRef>
-              <a:fillRef idx="0">
-                <a:schemeClr val="dk1"/>
-              </a:fillRef>
-              <a:effectRef idx="2">
-                <a:schemeClr val="dk1"/>
-              </a:effectRef>
-              <a:fontRef idx="minor">
-                <a:schemeClr val="tx1"/>
-              </a:fontRef>
-            </p:style>
-          </p:cxnSp>
-          <p:cxnSp>
-            <p:nvCxnSpPr>
-              <p:cNvPr id="42" name="Connettore diritto 41">
-                <a:extLst>
-                  <a:ext uri="{FF2B5EF4-FFF2-40B4-BE49-F238E27FC236}">
-                    <a16:creationId xmlns:a16="http://schemas.microsoft.com/office/drawing/2014/main" id="{9DE3042A-2F24-4CF9-E016-8053E0ECFF97}"/>
-                  </a:ext>
-                </a:extLst>
-              </p:cNvPr>
-              <p:cNvCxnSpPr>
-                <a:cxnSpLocks/>
-                <a:stCxn id="36" idx="3"/>
-                <a:endCxn id="44" idx="1"/>
               </p:cNvCxnSpPr>
               <p:nvPr/>
             </p:nvCxnSpPr>
             <p:spPr>
               <a:xfrm flipV="1">
-                <a:off x="8368104" y="1488393"/>
-                <a:ext cx="516832" cy="3337"/>
-              </a:xfrm>
-              <a:prstGeom prst="line">
-                <a:avLst/>
-              </a:prstGeom>
-            </p:spPr>
-            <p:style>
-              <a:lnRef idx="3">
-                <a:schemeClr val="dk1"/>
-              </a:lnRef>
-              <a:fillRef idx="0">
-                <a:schemeClr val="dk1"/>
-              </a:fillRef>
-              <a:effectRef idx="2">
-                <a:schemeClr val="dk1"/>
-              </a:effectRef>
-              <a:fontRef idx="minor">
-                <a:schemeClr val="tx1"/>
-              </a:fontRef>
-            </p:style>
-          </p:cxnSp>
-          <p:cxnSp>
-            <p:nvCxnSpPr>
-              <p:cNvPr id="43" name="Connettore a gomito 42">
-                <a:extLst>
-                  <a:ext uri="{FF2B5EF4-FFF2-40B4-BE49-F238E27FC236}">
-                    <a16:creationId xmlns:a16="http://schemas.microsoft.com/office/drawing/2014/main" id="{DD586595-5E23-1E45-0717-1758DA727FE1}"/>
-                  </a:ext>
-                </a:extLst>
-              </p:cNvPr>
-              <p:cNvCxnSpPr>
-                <a:cxnSpLocks/>
-                <a:stCxn id="37" idx="0"/>
-                <a:endCxn id="44" idx="1"/>
-              </p:cNvCxnSpPr>
-              <p:nvPr/>
-            </p:nvCxnSpPr>
-            <p:spPr>
-              <a:xfrm rot="16200000" flipV="1">
-                <a:off x="8663341" y="1709989"/>
-                <a:ext cx="447553" cy="4361"/>
-              </a:xfrm>
-              <a:prstGeom prst="bentConnector4">
-                <a:avLst>
-                  <a:gd name="adj1" fmla="val 29369"/>
-                  <a:gd name="adj2" fmla="val 8545563"/>
-                </a:avLst>
-              </a:prstGeom>
-              <a:ln>
-                <a:tailEnd type="triangle"/>
-              </a:ln>
-            </p:spPr>
-            <p:style>
-              <a:lnRef idx="3">
-                <a:schemeClr val="dk1"/>
-              </a:lnRef>
-              <a:fillRef idx="0">
-                <a:schemeClr val="dk1"/>
-              </a:fillRef>
-              <a:effectRef idx="2">
-                <a:schemeClr val="dk1"/>
-              </a:effectRef>
-              <a:fontRef idx="minor">
-                <a:schemeClr val="tx1"/>
-              </a:fontRef>
-            </p:style>
-          </p:cxnSp>
-          <p:sp>
-            <p:nvSpPr>
-              <p:cNvPr id="44" name="CasellaDiTesto 43">
-                <a:extLst>
-                  <a:ext uri="{FF2B5EF4-FFF2-40B4-BE49-F238E27FC236}">
-                    <a16:creationId xmlns:a16="http://schemas.microsoft.com/office/drawing/2014/main" id="{059A6175-E18F-41AB-9EEF-5DE673FF3597}"/>
-                  </a:ext>
-                </a:extLst>
-              </p:cNvPr>
-              <p:cNvSpPr txBox="1"/>
-              <p:nvPr/>
-            </p:nvSpPr>
-            <p:spPr>
-              <a:xfrm>
-                <a:off x="8884936" y="1303727"/>
-                <a:ext cx="1316208" cy="369332"/>
-              </a:xfrm>
-              <a:prstGeom prst="rect">
-                <a:avLst/>
-              </a:prstGeom>
-              <a:noFill/>
-              <a:ln w="28575">
-                <a:solidFill>
-                  <a:srgbClr val="00B050"/>
-                </a:solidFill>
-              </a:ln>
-            </p:spPr>
-            <p:style>
-              <a:lnRef idx="2">
-                <a:schemeClr val="accent6"/>
-              </a:lnRef>
-              <a:fillRef idx="1">
-                <a:schemeClr val="lt1"/>
-              </a:fillRef>
-              <a:effectRef idx="0">
-                <a:schemeClr val="accent6"/>
-              </a:effectRef>
-              <a:fontRef idx="minor">
-                <a:schemeClr val="dk1"/>
-              </a:fontRef>
-            </p:style>
-            <p:txBody>
-              <a:bodyPr wrap="square" anchor="ctr">
-                <a:spAutoFit/>
-              </a:bodyPr>
-              <a:lstStyle/>
-              <a:p>
-                <a:pPr algn="ctr"/>
-                <a:r>
-                  <a:rPr lang="it-IT" dirty="0"/>
-                  <a:t>Predizioni</a:t>
-                </a:r>
-                <a:endParaRPr lang="it-IT" sz="300" dirty="0"/>
-              </a:p>
-            </p:txBody>
-          </p:sp>
-          <p:cxnSp>
-            <p:nvCxnSpPr>
-              <p:cNvPr id="45" name="Connettore 2 44">
-                <a:extLst>
-                  <a:ext uri="{FF2B5EF4-FFF2-40B4-BE49-F238E27FC236}">
-                    <a16:creationId xmlns:a16="http://schemas.microsoft.com/office/drawing/2014/main" id="{D8E39E23-4FED-5073-6695-D6F4A21C67CD}"/>
-                  </a:ext>
-                </a:extLst>
-              </p:cNvPr>
-              <p:cNvCxnSpPr>
-                <a:cxnSpLocks/>
-                <a:stCxn id="44" idx="3"/>
-                <a:endCxn id="38" idx="1"/>
-              </p:cNvCxnSpPr>
-              <p:nvPr/>
-            </p:nvCxnSpPr>
-            <p:spPr>
-              <a:xfrm>
-                <a:off x="10201143" y="1488393"/>
-                <a:ext cx="353972" cy="3337"/>
+                <a:off x="10288953" y="1491730"/>
+                <a:ext cx="251667" cy="1929"/>
               </a:xfrm>
               <a:prstGeom prst="straightConnector1">
                 <a:avLst/>
@@ -2831,10 +3099,10 @@
         </p:grpSp>
         <p:grpSp>
           <p:nvGrpSpPr>
-            <p:cNvPr id="28" name="Gruppo 27">
+            <p:cNvPr id="17" name="Gruppo 16">
               <a:extLst>
                 <a:ext uri="{FF2B5EF4-FFF2-40B4-BE49-F238E27FC236}">
-                  <a16:creationId xmlns:a16="http://schemas.microsoft.com/office/drawing/2014/main" id="{574449F0-3D68-77D3-4181-7E57B2F1C255}"/>
+                  <a16:creationId xmlns:a16="http://schemas.microsoft.com/office/drawing/2014/main" id="{609A88BE-2562-478B-D5AE-5370A352AEAF}"/>
                 </a:ext>
               </a:extLst>
             </p:cNvPr>
@@ -2851,10 +3119,10 @@
           </p:grpSpPr>
           <p:pic>
             <p:nvPicPr>
-              <p:cNvPr id="34" name="Immagine 33">
+              <p:cNvPr id="23" name="Immagine 22">
                 <a:extLst>
                   <a:ext uri="{FF2B5EF4-FFF2-40B4-BE49-F238E27FC236}">
-                    <a16:creationId xmlns:a16="http://schemas.microsoft.com/office/drawing/2014/main" id="{10A4E741-3038-7956-3E8C-60627A671019}"/>
+                    <a16:creationId xmlns:a16="http://schemas.microsoft.com/office/drawing/2014/main" id="{4E027B16-819D-4CA6-893F-9507C2D3C790}"/>
                   </a:ext>
                 </a:extLst>
               </p:cNvPr>
@@ -2887,10 +3155,10 @@
           </p:pic>
           <p:sp>
             <p:nvSpPr>
-              <p:cNvPr id="35" name="CasellaDiTesto 34">
+              <p:cNvPr id="24" name="CasellaDiTesto 23">
                 <a:extLst>
                   <a:ext uri="{FF2B5EF4-FFF2-40B4-BE49-F238E27FC236}">
-                    <a16:creationId xmlns:a16="http://schemas.microsoft.com/office/drawing/2014/main" id="{60C55C76-9DAD-777D-A1F2-61F0919ED3B5}"/>
+                    <a16:creationId xmlns:a16="http://schemas.microsoft.com/office/drawing/2014/main" id="{D0C99C2D-5F8E-2553-D864-66F3BD6B126B}"/>
                   </a:ext>
                 </a:extLst>
               </p:cNvPr>
@@ -3043,10 +3311,10 @@
         </p:grpSp>
         <p:sp>
           <p:nvSpPr>
-            <p:cNvPr id="29" name="CasellaDiTesto 28">
+            <p:cNvPr id="18" name="CasellaDiTesto 17">
               <a:extLst>
                 <a:ext uri="{FF2B5EF4-FFF2-40B4-BE49-F238E27FC236}">
-                  <a16:creationId xmlns:a16="http://schemas.microsoft.com/office/drawing/2014/main" id="{E9B0C13C-0629-1EC0-4FD1-5200F3B7CE33}"/>
+                  <a16:creationId xmlns:a16="http://schemas.microsoft.com/office/drawing/2014/main" id="{E29FBA39-E0C9-60F1-111F-BB0E5CB62406}"/>
                 </a:ext>
               </a:extLst>
             </p:cNvPr>
@@ -3187,10 +3455,10 @@
         </p:sp>
         <p:sp>
           <p:nvSpPr>
-            <p:cNvPr id="30" name="CasellaDiTesto 29">
+            <p:cNvPr id="19" name="CasellaDiTesto 18">
               <a:extLst>
                 <a:ext uri="{FF2B5EF4-FFF2-40B4-BE49-F238E27FC236}">
-                  <a16:creationId xmlns:a16="http://schemas.microsoft.com/office/drawing/2014/main" id="{19CB3574-FBA0-2BCC-914E-AF13360644BF}"/>
+                  <a16:creationId xmlns:a16="http://schemas.microsoft.com/office/drawing/2014/main" id="{E7A8AB72-3453-661D-6F2C-1BF7C4F97DDD}"/>
                 </a:ext>
               </a:extLst>
             </p:cNvPr>
@@ -3271,10 +3539,10 @@
         </p:sp>
         <p:sp>
           <p:nvSpPr>
-            <p:cNvPr id="31" name="Connettore 30">
+            <p:cNvPr id="20" name="Connettore 19">
               <a:extLst>
                 <a:ext uri="{FF2B5EF4-FFF2-40B4-BE49-F238E27FC236}">
-                  <a16:creationId xmlns:a16="http://schemas.microsoft.com/office/drawing/2014/main" id="{81B0DF71-594C-7083-223B-9CDE28B1086A}"/>
+                  <a16:creationId xmlns:a16="http://schemas.microsoft.com/office/drawing/2014/main" id="{32FF715E-3A00-042E-FF41-9EB7AEDDC814}"/>
                 </a:ext>
               </a:extLst>
             </p:cNvPr>
@@ -3320,10 +3588,10 @@
         </p:sp>
         <p:sp>
           <p:nvSpPr>
-            <p:cNvPr id="32" name="Connettore 31">
+            <p:cNvPr id="21" name="Connettore 20">
               <a:extLst>
                 <a:ext uri="{FF2B5EF4-FFF2-40B4-BE49-F238E27FC236}">
-                  <a16:creationId xmlns:a16="http://schemas.microsoft.com/office/drawing/2014/main" id="{E7D81DBE-A10D-086C-14A3-FCB7D94AF991}"/>
+                  <a16:creationId xmlns:a16="http://schemas.microsoft.com/office/drawing/2014/main" id="{BF61D03C-47F9-5E8B-4E7F-A40AB165DF9F}"/>
                 </a:ext>
               </a:extLst>
             </p:cNvPr>
@@ -3369,10 +3637,10 @@
         </p:sp>
         <p:sp>
           <p:nvSpPr>
-            <p:cNvPr id="33" name="Connettore 32">
+            <p:cNvPr id="22" name="Connettore 21">
               <a:extLst>
                 <a:ext uri="{FF2B5EF4-FFF2-40B4-BE49-F238E27FC236}">
-                  <a16:creationId xmlns:a16="http://schemas.microsoft.com/office/drawing/2014/main" id="{3D9CC150-EBDE-D50F-3FBF-150A371D34D6}"/>
+                  <a16:creationId xmlns:a16="http://schemas.microsoft.com/office/drawing/2014/main" id="{91EBC036-7BAA-7AE0-5016-C9A4072F4BE1}"/>
                 </a:ext>
               </a:extLst>
             </p:cNvPr>
@@ -3417,144 +3685,6 @@
           </p:txBody>
         </p:sp>
       </p:grpSp>
-      <p:sp>
-        <p:nvSpPr>
-          <p:cNvPr id="46" name="CasellaDiTesto 45">
-            <a:extLst>
-              <a:ext uri="{FF2B5EF4-FFF2-40B4-BE49-F238E27FC236}">
-                <a16:creationId xmlns:a16="http://schemas.microsoft.com/office/drawing/2014/main" id="{AEBBD56D-F7CF-11DC-D17F-EDFAE99EE230}"/>
-              </a:ext>
-            </a:extLst>
-          </p:cNvPr>
-          <p:cNvSpPr txBox="1"/>
-          <p:nvPr/>
-        </p:nvSpPr>
-        <p:spPr>
-          <a:xfrm>
-            <a:off x="6096000" y="939340"/>
-            <a:ext cx="6096000" cy="400110"/>
-          </a:xfrm>
-          <a:prstGeom prst="rect">
-            <a:avLst/>
-          </a:prstGeom>
-          <a:noFill/>
-        </p:spPr>
-        <p:txBody>
-          <a:bodyPr wrap="square">
-            <a:spAutoFit/>
-          </a:bodyPr>
-          <a:lstStyle/>
-          <a:p>
-            <a:pPr algn="ctr"/>
-            <a:r>
-              <a:rPr lang="it-IT" sz="2000" b="1" dirty="0">
-                <a:latin typeface="Georgia" panose="02040502050405020303" pitchFamily="18" charset="0"/>
-              </a:rPr>
-              <a:t>Deep Learning frameworks (libraries)</a:t>
-            </a:r>
-          </a:p>
-        </p:txBody>
-      </p:sp>
-      <p:sp>
-        <p:nvSpPr>
-          <p:cNvPr id="47" name="CasellaDiTesto 46">
-            <a:extLst>
-              <a:ext uri="{FF2B5EF4-FFF2-40B4-BE49-F238E27FC236}">
-                <a16:creationId xmlns:a16="http://schemas.microsoft.com/office/drawing/2014/main" id="{190B2BB0-90E4-8AB2-2F90-7AF12D0A2E98}"/>
-              </a:ext>
-            </a:extLst>
-          </p:cNvPr>
-          <p:cNvSpPr txBox="1"/>
-          <p:nvPr/>
-        </p:nvSpPr>
-        <p:spPr>
-          <a:xfrm>
-            <a:off x="6251505" y="2567616"/>
-            <a:ext cx="1164062" cy="646331"/>
-          </a:xfrm>
-          <a:prstGeom prst="rect">
-            <a:avLst/>
-          </a:prstGeom>
-          <a:noFill/>
-          <a:ln w="28575">
-            <a:noFill/>
-          </a:ln>
-        </p:spPr>
-        <p:txBody>
-          <a:bodyPr wrap="square" rtlCol="0">
-            <a:spAutoFit/>
-          </a:bodyPr>
-          <a:lstStyle/>
-          <a:p>
-            <a:pPr algn="ctr"/>
-            <a:r>
-              <a:rPr lang="it-IT" b="1" dirty="0" err="1">
-                <a:latin typeface="Georgia" panose="02040502050405020303" pitchFamily="18" charset="0"/>
-              </a:rPr>
-              <a:t>We</a:t>
-            </a:r>
-            <a:r>
-              <a:rPr lang="it-IT" b="1" dirty="0">
-                <a:latin typeface="Georgia" panose="02040502050405020303" pitchFamily="18" charset="0"/>
-              </a:rPr>
-              <a:t> use </a:t>
-            </a:r>
-            <a:r>
-              <a:rPr lang="it-IT" b="1" dirty="0" err="1">
-                <a:latin typeface="Georgia" panose="02040502050405020303" pitchFamily="18" charset="0"/>
-              </a:rPr>
-              <a:t>these</a:t>
-            </a:r>
-            <a:endParaRPr lang="it-IT" b="1" dirty="0">
-              <a:latin typeface="Georgia" panose="02040502050405020303" pitchFamily="18" charset="0"/>
-            </a:endParaRPr>
-          </a:p>
-        </p:txBody>
-      </p:sp>
-      <p:cxnSp>
-        <p:nvCxnSpPr>
-          <p:cNvPr id="49" name="Connettore 2 48">
-            <a:extLst>
-              <a:ext uri="{FF2B5EF4-FFF2-40B4-BE49-F238E27FC236}">
-                <a16:creationId xmlns:a16="http://schemas.microsoft.com/office/drawing/2014/main" id="{C57A360C-4E53-D839-0963-27C1DD5D8F71}"/>
-              </a:ext>
-            </a:extLst>
-          </p:cNvPr>
-          <p:cNvCxnSpPr>
-            <a:cxnSpLocks/>
-          </p:cNvCxnSpPr>
-          <p:nvPr/>
-        </p:nvCxnSpPr>
-        <p:spPr>
-          <a:xfrm flipV="1">
-            <a:off x="7387859" y="2890781"/>
-            <a:ext cx="707353" cy="1"/>
-          </a:xfrm>
-          <a:prstGeom prst="straightConnector1">
-            <a:avLst/>
-          </a:prstGeom>
-          <a:ln w="28575">
-            <a:solidFill>
-              <a:srgbClr val="9933FF"/>
-            </a:solidFill>
-            <a:tailEnd type="arrow"/>
-          </a:ln>
-        </p:spPr>
-        <p:style>
-          <a:lnRef idx="1">
-            <a:schemeClr val="accent1"/>
-          </a:lnRef>
-          <a:fillRef idx="0">
-            <a:schemeClr val="accent1"/>
-          </a:fillRef>
-          <a:effectRef idx="0">
-            <a:schemeClr val="accent1"/>
-          </a:effectRef>
-          <a:fontRef idx="minor">
-            <a:schemeClr val="tx1"/>
-          </a:fontRef>
-        </p:style>
-      </p:cxnSp>
     </p:spTree>
     <p:extLst>
       <p:ext uri="{BB962C8B-B14F-4D97-AF65-F5344CB8AC3E}">
@@ -3586,7 +3716,7 @@
                             </p:stCondLst>
                             <p:childTnLst>
                               <p:par>
-                                <p:cTn id="5" presetID="10" presetClass="entr" presetSubtype="0" fill="hold" grpId="0" nodeType="clickEffect">
+                                <p:cTn id="5" presetID="10" presetClass="entr" presetSubtype="0" fill="hold" nodeType="clickEffect">
                                   <p:stCondLst>
                                     <p:cond delay="0"/>
                                   </p:stCondLst>
@@ -3599,7 +3729,7 @@
                                           </p:stCondLst>
                                         </p:cTn>
                                         <p:tgtEl>
-                                          <p:spTgt spid="51"/>
+                                          <p:spTgt spid="4"/>
                                         </p:tgtEl>
                                         <p:attrNameLst>
                                           <p:attrName>style.visibility</p:attrName>
@@ -3613,7 +3743,7 @@
                                       <p:cBhvr>
                                         <p:cTn id="7" dur="500"/>
                                         <p:tgtEl>
-                                          <p:spTgt spid="51"/>
+                                          <p:spTgt spid="4"/>
                                         </p:tgtEl>
                                       </p:cBhvr>
                                     </p:animEffect>
@@ -3634,7 +3764,7 @@
                                           </p:stCondLst>
                                         </p:cTn>
                                         <p:tgtEl>
-                                          <p:spTgt spid="47"/>
+                                          <p:spTgt spid="11"/>
                                         </p:tgtEl>
                                         <p:attrNameLst>
                                           <p:attrName>style.visibility</p:attrName>
@@ -3648,6 +3778,94 @@
                                       <p:cBhvr>
                                         <p:cTn id="10" dur="500"/>
                                         <p:tgtEl>
+                                          <p:spTgt spid="11"/>
+                                        </p:tgtEl>
+                                      </p:cBhvr>
+                                    </p:animEffect>
+                                  </p:childTnLst>
+                                </p:cTn>
+                              </p:par>
+                            </p:childTnLst>
+                          </p:cTn>
+                        </p:par>
+                      </p:childTnLst>
+                    </p:cTn>
+                  </p:par>
+                  <p:par>
+                    <p:cTn id="11" fill="hold">
+                      <p:stCondLst>
+                        <p:cond delay="indefinite"/>
+                      </p:stCondLst>
+                      <p:childTnLst>
+                        <p:par>
+                          <p:cTn id="12" fill="hold">
+                            <p:stCondLst>
+                              <p:cond delay="0"/>
+                            </p:stCondLst>
+                            <p:childTnLst>
+                              <p:par>
+                                <p:cTn id="13" presetID="10" presetClass="entr" presetSubtype="0" fill="hold" grpId="0" nodeType="clickEffect">
+                                  <p:stCondLst>
+                                    <p:cond delay="0"/>
+                                  </p:stCondLst>
+                                  <p:childTnLst>
+                                    <p:set>
+                                      <p:cBhvr>
+                                        <p:cTn id="14" dur="1" fill="hold">
+                                          <p:stCondLst>
+                                            <p:cond delay="0"/>
+                                          </p:stCondLst>
+                                        </p:cTn>
+                                        <p:tgtEl>
+                                          <p:spTgt spid="51"/>
+                                        </p:tgtEl>
+                                        <p:attrNameLst>
+                                          <p:attrName>style.visibility</p:attrName>
+                                        </p:attrNameLst>
+                                      </p:cBhvr>
+                                      <p:to>
+                                        <p:strVal val="visible"/>
+                                      </p:to>
+                                    </p:set>
+                                    <p:animEffect transition="in" filter="fade">
+                                      <p:cBhvr>
+                                        <p:cTn id="15" dur="500"/>
+                                        <p:tgtEl>
+                                          <p:spTgt spid="51"/>
+                                        </p:tgtEl>
+                                      </p:cBhvr>
+                                    </p:animEffect>
+                                  </p:childTnLst>
+                                </p:cTn>
+                              </p:par>
+                              <p:par>
+                                <p:cTn id="16" presetID="10" presetClass="entr" presetSubtype="0" fill="hold" grpId="0" nodeType="withEffect">
+                                  <p:stCondLst>
+                                    <p:cond delay="0"/>
+                                  </p:stCondLst>
+                                  <p:childTnLst>
+                                    <p:set>
+                                      <p:cBhvr>
+                                        <p:cTn id="17" dur="1" fill="hold">
+                                          <p:stCondLst>
+                                            <p:cond delay="0"/>
+                                          </p:stCondLst>
+                                        </p:cTn>
+                                        <p:tgtEl>
+                                          <p:spTgt spid="47"/>
+                                        </p:tgtEl>
+                                        <p:attrNameLst>
+                                          <p:attrName>style.visibility</p:attrName>
+                                        </p:attrNameLst>
+                                      </p:cBhvr>
+                                      <p:to>
+                                        <p:strVal val="visible"/>
+                                      </p:to>
+                                    </p:set>
+                                    <p:animEffect transition="in" filter="fade">
+                                      <p:cBhvr>
+                                        <p:cTn id="18" dur="500"/>
+                                        <p:tgtEl>
                                           <p:spTgt spid="47"/>
                                         </p:tgtEl>
                                       </p:cBhvr>
@@ -3656,14 +3874,14 @@
                                 </p:cTn>
                               </p:par>
                               <p:par>
-                                <p:cTn id="11" presetID="10" presetClass="entr" presetSubtype="0" fill="hold" nodeType="withEffect">
+                                <p:cTn id="19" presetID="10" presetClass="entr" presetSubtype="0" fill="hold" nodeType="withEffect">
                                   <p:stCondLst>
                                     <p:cond delay="0"/>
                                   </p:stCondLst>
                                   <p:childTnLst>
                                     <p:set>
                                       <p:cBhvr>
-                                        <p:cTn id="12" dur="1" fill="hold">
+                                        <p:cTn id="20" dur="1" fill="hold">
                                           <p:stCondLst>
                                             <p:cond delay="0"/>
                                           </p:stCondLst>
@@ -3681,7 +3899,7 @@
                                     </p:set>
                                     <p:animEffect transition="in" filter="fade">
                                       <p:cBhvr>
-                                        <p:cTn id="13" dur="500"/>
+                                        <p:cTn id="21" dur="500"/>
                                         <p:tgtEl>
                                           <p:spTgt spid="49"/>
                                         </p:tgtEl>
@@ -3720,6 +3938,7 @@
     <p:bldLst>
       <p:bldP spid="51" grpId="0" animBg="1"/>
       <p:bldP spid="47" grpId="0"/>
+      <p:bldP spid="11" grpId="0"/>
     </p:bldLst>
   </p:timing>
   <p:extLst>
@@ -3817,7 +4036,7 @@
         </p:blipFill>
         <p:spPr>
           <a:xfrm>
-            <a:off x="909479" y="392567"/>
+            <a:off x="889341" y="780495"/>
             <a:ext cx="3402749" cy="1283672"/>
           </a:xfrm>
           <a:prstGeom prst="rect">
@@ -4274,7 +4493,7 @@
               <a:pPr algn="ctr"/>
               <a:r>
                 <a:rPr lang="it-IT" sz="2000" b="1" dirty="0"/>
-                <a:t> Deep learning</a:t>
+                <a:t> Deep Network</a:t>
               </a:r>
               <a:endParaRPr lang="it-IT" b="1" dirty="0"/>
             </a:p>
@@ -4538,8 +4757,8 @@
               </p:sp>
             </mc:Fallback>
           </mc:AlternateContent>
-          <mc:AlternateContent xmlns:mc="http://schemas.openxmlformats.org/markup-compatibility/2006">
-            <mc:Choice xmlns:a14="http://schemas.microsoft.com/office/drawing/2010/main" Requires="a14">
+          <mc:AlternateContent xmlns:mc="http://schemas.openxmlformats.org/markup-compatibility/2006" xmlns:a14="http://schemas.microsoft.com/office/drawing/2010/main">
+            <mc:Choice Requires="a14">
               <p:sp>
                 <p:nvSpPr>
                   <p:cNvPr id="19" name="CasellaDiTesto 18">
@@ -4690,7 +4909,7 @@
                 </p:txBody>
               </p:sp>
             </mc:Choice>
-            <mc:Fallback>
+            <mc:Fallback xmlns="">
               <p:sp>
                 <p:nvSpPr>
                   <p:cNvPr id="19" name="CasellaDiTesto 18">
@@ -5248,8 +5467,8 @@
               </p:sp>
             </mc:Fallback>
           </mc:AlternateContent>
-          <mc:AlternateContent xmlns:mc="http://schemas.openxmlformats.org/markup-compatibility/2006">
-            <mc:Choice xmlns:a14="http://schemas.microsoft.com/office/drawing/2010/main" Requires="a14">
+          <mc:AlternateContent xmlns:mc="http://schemas.openxmlformats.org/markup-compatibility/2006" xmlns:a14="http://schemas.microsoft.com/office/drawing/2010/main">
+            <mc:Choice Requires="a14">
               <p:sp>
                 <p:nvSpPr>
                   <p:cNvPr id="44" name="CasellaDiTesto 43">
@@ -5341,7 +5560,7 @@
                 </p:txBody>
               </p:sp>
             </mc:Choice>
-            <mc:Fallback>
+            <mc:Fallback xmlns="">
               <p:sp>
                 <p:nvSpPr>
                   <p:cNvPr id="44" name="CasellaDiTesto 43">
@@ -5548,12 +5767,51 @@
           </p:nvGrpSpPr>
           <p:grpSpPr>
             <a:xfrm>
-              <a:off x="265385" y="1327599"/>
-              <a:ext cx="4499764" cy="1017511"/>
-              <a:chOff x="7634679" y="1303727"/>
-              <a:chExt cx="4499764" cy="1017511"/>
+              <a:off x="265385" y="1310221"/>
+              <a:ext cx="4499764" cy="1035066"/>
+              <a:chOff x="7634679" y="1286349"/>
+              <a:chExt cx="4499764" cy="1035066"/>
             </a:xfrm>
           </p:grpSpPr>
+          <p:cxnSp>
+            <p:nvCxnSpPr>
+              <p:cNvPr id="63" name="Connettore diritto 62">
+                <a:extLst>
+                  <a:ext uri="{FF2B5EF4-FFF2-40B4-BE49-F238E27FC236}">
+                    <a16:creationId xmlns:a16="http://schemas.microsoft.com/office/drawing/2014/main" id="{AA9EAFB7-0BBB-C9B6-85DA-42B9E3474EA9}"/>
+                  </a:ext>
+                </a:extLst>
+              </p:cNvPr>
+              <p:cNvCxnSpPr>
+                <a:cxnSpLocks/>
+                <a:stCxn id="57" idx="3"/>
+              </p:cNvCxnSpPr>
+              <p:nvPr/>
+            </p:nvCxnSpPr>
+            <p:spPr>
+              <a:xfrm>
+                <a:off x="8368104" y="1487153"/>
+                <a:ext cx="470304" cy="0"/>
+              </a:xfrm>
+              <a:prstGeom prst="line">
+                <a:avLst/>
+              </a:prstGeom>
+            </p:spPr>
+            <p:style>
+              <a:lnRef idx="3">
+                <a:schemeClr val="dk1"/>
+              </a:lnRef>
+              <a:fillRef idx="0">
+                <a:schemeClr val="dk1"/>
+              </a:fillRef>
+              <a:effectRef idx="2">
+                <a:schemeClr val="dk1"/>
+              </a:effectRef>
+              <a:fontRef idx="minor">
+                <a:schemeClr val="tx1"/>
+              </a:fontRef>
+            </p:style>
+          </p:cxnSp>
           <p:sp>
             <p:nvSpPr>
               <p:cNvPr id="57" name="CasellaDiTesto 56">
@@ -5568,8 +5826,8 @@
             </p:nvSpPr>
             <p:spPr>
               <a:xfrm>
-                <a:off x="7634679" y="1307064"/>
-                <a:ext cx="733425" cy="369332"/>
+                <a:off x="7634679" y="1286349"/>
+                <a:ext cx="733425" cy="401607"/>
               </a:xfrm>
               <a:prstGeom prst="rect">
                 <a:avLst/>
@@ -5604,11 +5862,113 @@
                 <a:pPr algn="ctr"/>
                 <a:r>
                   <a:rPr lang="it-IT" dirty="0"/>
-                  <a:t>Dati</a:t>
+                  <a:t>Data</a:t>
                 </a:r>
               </a:p>
             </p:txBody>
           </p:sp>
+          <p:sp>
+            <p:nvSpPr>
+              <p:cNvPr id="65" name="CasellaDiTesto 64">
+                <a:extLst>
+                  <a:ext uri="{FF2B5EF4-FFF2-40B4-BE49-F238E27FC236}">
+                    <a16:creationId xmlns:a16="http://schemas.microsoft.com/office/drawing/2014/main" id="{C8F6A963-CCA2-0DDA-F820-DFD2A30FA390}"/>
+                  </a:ext>
+                </a:extLst>
+              </p:cNvPr>
+              <p:cNvSpPr txBox="1"/>
+              <p:nvPr/>
+            </p:nvSpPr>
+            <p:spPr>
+              <a:xfrm>
+                <a:off x="8884935" y="1287591"/>
+                <a:ext cx="1386174" cy="401606"/>
+              </a:xfrm>
+              <a:prstGeom prst="rect">
+                <a:avLst/>
+              </a:prstGeom>
+              <a:noFill/>
+              <a:ln w="28575">
+                <a:solidFill>
+                  <a:srgbClr val="00B050"/>
+                </a:solidFill>
+              </a:ln>
+            </p:spPr>
+            <p:style>
+              <a:lnRef idx="2">
+                <a:schemeClr val="accent6"/>
+              </a:lnRef>
+              <a:fillRef idx="1">
+                <a:schemeClr val="lt1"/>
+              </a:fillRef>
+              <a:effectRef idx="0">
+                <a:schemeClr val="accent6"/>
+              </a:effectRef>
+              <a:fontRef idx="minor">
+                <a:schemeClr val="dk1"/>
+              </a:fontRef>
+            </p:style>
+            <p:txBody>
+              <a:bodyPr wrap="square" anchor="ctr">
+                <a:spAutoFit/>
+              </a:bodyPr>
+              <a:lstStyle/>
+              <a:p>
+                <a:pPr algn="ctr"/>
+                <a:r>
+                  <a:rPr lang="it-IT" dirty="0" err="1"/>
+                  <a:t>Predctions</a:t>
+                </a:r>
+                <a:endParaRPr lang="it-IT" sz="300" dirty="0"/>
+              </a:p>
+            </p:txBody>
+          </p:sp>
+          <p:cxnSp>
+            <p:nvCxnSpPr>
+              <p:cNvPr id="64" name="Connettore a gomito 63">
+                <a:extLst>
+                  <a:ext uri="{FF2B5EF4-FFF2-40B4-BE49-F238E27FC236}">
+                    <a16:creationId xmlns:a16="http://schemas.microsoft.com/office/drawing/2014/main" id="{290A9F94-ECCA-860C-0A9C-CA94E5612A82}"/>
+                  </a:ext>
+                </a:extLst>
+              </p:cNvPr>
+              <p:cNvCxnSpPr>
+                <a:cxnSpLocks/>
+                <a:stCxn id="58" idx="0"/>
+                <a:endCxn id="65" idx="1"/>
+              </p:cNvCxnSpPr>
+              <p:nvPr/>
+            </p:nvCxnSpPr>
+            <p:spPr>
+              <a:xfrm rot="16200000" flipV="1">
+                <a:off x="8671409" y="1701922"/>
+                <a:ext cx="431415" cy="4361"/>
+              </a:xfrm>
+              <a:prstGeom prst="bentConnector4">
+                <a:avLst>
+                  <a:gd name="adj1" fmla="val 26727"/>
+                  <a:gd name="adj2" fmla="val 7158574"/>
+                </a:avLst>
+              </a:prstGeom>
+              <a:ln>
+                <a:tailEnd type="triangle"/>
+              </a:ln>
+            </p:spPr>
+            <p:style>
+              <a:lnRef idx="3">
+                <a:schemeClr val="dk1"/>
+              </a:lnRef>
+              <a:fillRef idx="0">
+                <a:schemeClr val="dk1"/>
+              </a:fillRef>
+              <a:effectRef idx="2">
+                <a:schemeClr val="dk1"/>
+              </a:effectRef>
+              <a:fontRef idx="minor">
+                <a:schemeClr val="tx1"/>
+              </a:fontRef>
+            </p:style>
+          </p:cxnSp>
           <p:sp>
             <p:nvSpPr>
               <p:cNvPr id="58" name="CasellaDiTesto 57">
@@ -5623,8 +5983,8 @@
             </p:nvSpPr>
             <p:spPr>
               <a:xfrm>
-                <a:off x="8334164" y="1935946"/>
-                <a:ext cx="1110265" cy="369332"/>
+                <a:off x="8334164" y="1919809"/>
+                <a:ext cx="1110265" cy="401606"/>
               </a:xfrm>
               <a:prstGeom prst="rect">
                 <a:avLst/>
@@ -5659,12 +6019,154 @@
                 <a:pPr algn="ctr"/>
                 <a:r>
                   <a:rPr lang="it-IT" dirty="0"/>
-                  <a:t>Modello</a:t>
+                  <a:t>Model</a:t>
                 </a:r>
                 <a:endParaRPr lang="it-IT" sz="300" dirty="0"/>
               </a:p>
             </p:txBody>
           </p:sp>
+          <p:cxnSp>
+            <p:nvCxnSpPr>
+              <p:cNvPr id="62" name="Connettore 2 61">
+                <a:extLst>
+                  <a:ext uri="{FF2B5EF4-FFF2-40B4-BE49-F238E27FC236}">
+                    <a16:creationId xmlns:a16="http://schemas.microsoft.com/office/drawing/2014/main" id="{E97C7130-3397-008C-41AA-C34D3410F773}"/>
+                  </a:ext>
+                </a:extLst>
+              </p:cNvPr>
+              <p:cNvCxnSpPr>
+                <a:cxnSpLocks/>
+                <a:stCxn id="60" idx="1"/>
+                <a:endCxn id="58" idx="3"/>
+              </p:cNvCxnSpPr>
+              <p:nvPr/>
+            </p:nvCxnSpPr>
+            <p:spPr>
+              <a:xfrm flipH="1">
+                <a:off x="9444429" y="2120436"/>
+                <a:ext cx="652233" cy="177"/>
+              </a:xfrm>
+              <a:prstGeom prst="straightConnector1">
+                <a:avLst/>
+              </a:prstGeom>
+              <a:ln>
+                <a:tailEnd type="triangle"/>
+              </a:ln>
+            </p:spPr>
+            <p:style>
+              <a:lnRef idx="3">
+                <a:schemeClr val="dk1"/>
+              </a:lnRef>
+              <a:fillRef idx="0">
+                <a:schemeClr val="dk1"/>
+              </a:fillRef>
+              <a:effectRef idx="2">
+                <a:schemeClr val="dk1"/>
+              </a:effectRef>
+              <a:fontRef idx="minor">
+                <a:schemeClr val="tx1"/>
+              </a:fontRef>
+            </p:style>
+          </p:cxnSp>
+          <p:sp>
+            <p:nvSpPr>
+              <p:cNvPr id="60" name="CasellaDiTesto 59">
+                <a:extLst>
+                  <a:ext uri="{FF2B5EF4-FFF2-40B4-BE49-F238E27FC236}">
+                    <a16:creationId xmlns:a16="http://schemas.microsoft.com/office/drawing/2014/main" id="{500DA8AB-ACB6-B0FE-7EFB-70DAD0A94F70}"/>
+                  </a:ext>
+                </a:extLst>
+              </p:cNvPr>
+              <p:cNvSpPr txBox="1"/>
+              <p:nvPr/>
+            </p:nvSpPr>
+            <p:spPr>
+              <a:xfrm>
+                <a:off x="10096662" y="1919632"/>
+                <a:ext cx="2037781" cy="401606"/>
+              </a:xfrm>
+              <a:prstGeom prst="rect">
+                <a:avLst/>
+              </a:prstGeom>
+              <a:noFill/>
+              <a:ln w="28575">
+                <a:solidFill>
+                  <a:srgbClr val="00B050"/>
+                </a:solidFill>
+              </a:ln>
+            </p:spPr>
+            <p:style>
+              <a:lnRef idx="2">
+                <a:schemeClr val="accent6"/>
+              </a:lnRef>
+              <a:fillRef idx="1">
+                <a:schemeClr val="lt1"/>
+              </a:fillRef>
+              <a:effectRef idx="0">
+                <a:schemeClr val="accent6"/>
+              </a:effectRef>
+              <a:fontRef idx="minor">
+                <a:schemeClr val="dk1"/>
+              </a:fontRef>
+            </p:style>
+            <p:txBody>
+              <a:bodyPr wrap="square" anchor="ctr">
+                <a:spAutoFit/>
+              </a:bodyPr>
+              <a:lstStyle/>
+              <a:p>
+                <a:pPr algn="ctr"/>
+                <a:r>
+                  <a:rPr lang="it-IT" dirty="0"/>
+                  <a:t>Weight update</a:t>
+                </a:r>
+                <a:endParaRPr lang="it-IT" sz="300" dirty="0"/>
+              </a:p>
+            </p:txBody>
+          </p:sp>
+          <p:cxnSp>
+            <p:nvCxnSpPr>
+              <p:cNvPr id="61" name="Connettore 2 60">
+                <a:extLst>
+                  <a:ext uri="{FF2B5EF4-FFF2-40B4-BE49-F238E27FC236}">
+                    <a16:creationId xmlns:a16="http://schemas.microsoft.com/office/drawing/2014/main" id="{383354E9-4F99-DB84-658D-F2F7C93F3D42}"/>
+                  </a:ext>
+                </a:extLst>
+              </p:cNvPr>
+              <p:cNvCxnSpPr>
+                <a:cxnSpLocks/>
+                <a:stCxn id="59" idx="2"/>
+                <a:endCxn id="60" idx="0"/>
+              </p:cNvCxnSpPr>
+              <p:nvPr/>
+            </p:nvCxnSpPr>
+            <p:spPr>
+              <a:xfrm>
+                <a:off x="11110247" y="1676396"/>
+                <a:ext cx="5305" cy="243236"/>
+              </a:xfrm>
+              <a:prstGeom prst="straightConnector1">
+                <a:avLst/>
+              </a:prstGeom>
+              <a:ln>
+                <a:tailEnd type="triangle"/>
+              </a:ln>
+            </p:spPr>
+            <p:style>
+              <a:lnRef idx="3">
+                <a:schemeClr val="dk1"/>
+              </a:lnRef>
+              <a:fillRef idx="0">
+                <a:schemeClr val="dk1"/>
+              </a:fillRef>
+              <a:effectRef idx="2">
+                <a:schemeClr val="dk1"/>
+              </a:effectRef>
+              <a:fontRef idx="minor">
+                <a:schemeClr val="tx1"/>
+              </a:fontRef>
+            </p:style>
+          </p:cxnSp>
           <p:sp>
             <p:nvSpPr>
               <p:cNvPr id="59" name="CasellaDiTesto 58">
@@ -5721,290 +6223,6 @@
               </a:p>
             </p:txBody>
           </p:sp>
-          <p:sp>
-            <p:nvSpPr>
-              <p:cNvPr id="60" name="CasellaDiTesto 59">
-                <a:extLst>
-                  <a:ext uri="{FF2B5EF4-FFF2-40B4-BE49-F238E27FC236}">
-                    <a16:creationId xmlns:a16="http://schemas.microsoft.com/office/drawing/2014/main" id="{500DA8AB-ACB6-B0FE-7EFB-70DAD0A94F70}"/>
-                  </a:ext>
-                </a:extLst>
-              </p:cNvPr>
-              <p:cNvSpPr txBox="1"/>
-              <p:nvPr/>
-            </p:nvSpPr>
-            <p:spPr>
-              <a:xfrm>
-                <a:off x="10096662" y="1919632"/>
-                <a:ext cx="2037781" cy="401606"/>
-              </a:xfrm>
-              <a:prstGeom prst="rect">
-                <a:avLst/>
-              </a:prstGeom>
-              <a:noFill/>
-              <a:ln w="28575">
-                <a:solidFill>
-                  <a:srgbClr val="00B050"/>
-                </a:solidFill>
-              </a:ln>
-            </p:spPr>
-            <p:style>
-              <a:lnRef idx="2">
-                <a:schemeClr val="accent6"/>
-              </a:lnRef>
-              <a:fillRef idx="1">
-                <a:schemeClr val="lt1"/>
-              </a:fillRef>
-              <a:effectRef idx="0">
-                <a:schemeClr val="accent6"/>
-              </a:effectRef>
-              <a:fontRef idx="minor">
-                <a:schemeClr val="dk1"/>
-              </a:fontRef>
-            </p:style>
-            <p:txBody>
-              <a:bodyPr wrap="square" anchor="ctr">
-                <a:spAutoFit/>
-              </a:bodyPr>
-              <a:lstStyle/>
-              <a:p>
-                <a:pPr algn="ctr"/>
-                <a:r>
-                  <a:rPr lang="it-IT" dirty="0"/>
-                  <a:t>Aggiornamento</a:t>
-                </a:r>
-                <a:endParaRPr lang="it-IT" sz="300" dirty="0"/>
-              </a:p>
-            </p:txBody>
-          </p:sp>
-          <p:cxnSp>
-            <p:nvCxnSpPr>
-              <p:cNvPr id="61" name="Connettore 2 60">
-                <a:extLst>
-                  <a:ext uri="{FF2B5EF4-FFF2-40B4-BE49-F238E27FC236}">
-                    <a16:creationId xmlns:a16="http://schemas.microsoft.com/office/drawing/2014/main" id="{383354E9-4F99-DB84-658D-F2F7C93F3D42}"/>
-                  </a:ext>
-                </a:extLst>
-              </p:cNvPr>
-              <p:cNvCxnSpPr>
-                <a:cxnSpLocks/>
-                <a:stCxn id="59" idx="2"/>
-                <a:endCxn id="60" idx="0"/>
-              </p:cNvCxnSpPr>
-              <p:nvPr/>
-            </p:nvCxnSpPr>
-            <p:spPr>
-              <a:xfrm>
-                <a:off x="11110247" y="1676396"/>
-                <a:ext cx="5305" cy="243236"/>
-              </a:xfrm>
-              <a:prstGeom prst="straightConnector1">
-                <a:avLst/>
-              </a:prstGeom>
-              <a:ln>
-                <a:tailEnd type="triangle"/>
-              </a:ln>
-            </p:spPr>
-            <p:style>
-              <a:lnRef idx="3">
-                <a:schemeClr val="dk1"/>
-              </a:lnRef>
-              <a:fillRef idx="0">
-                <a:schemeClr val="dk1"/>
-              </a:fillRef>
-              <a:effectRef idx="2">
-                <a:schemeClr val="dk1"/>
-              </a:effectRef>
-              <a:fontRef idx="minor">
-                <a:schemeClr val="tx1"/>
-              </a:fontRef>
-            </p:style>
-          </p:cxnSp>
-          <p:cxnSp>
-            <p:nvCxnSpPr>
-              <p:cNvPr id="62" name="Connettore 2 61">
-                <a:extLst>
-                  <a:ext uri="{FF2B5EF4-FFF2-40B4-BE49-F238E27FC236}">
-                    <a16:creationId xmlns:a16="http://schemas.microsoft.com/office/drawing/2014/main" id="{E97C7130-3397-008C-41AA-C34D3410F773}"/>
-                  </a:ext>
-                </a:extLst>
-              </p:cNvPr>
-              <p:cNvCxnSpPr>
-                <a:cxnSpLocks/>
-                <a:stCxn id="60" idx="1"/>
-                <a:endCxn id="58" idx="3"/>
-              </p:cNvCxnSpPr>
-              <p:nvPr/>
-            </p:nvCxnSpPr>
-            <p:spPr>
-              <a:xfrm flipH="1">
-                <a:off x="9444429" y="2120436"/>
-                <a:ext cx="652233" cy="177"/>
-              </a:xfrm>
-              <a:prstGeom prst="straightConnector1">
-                <a:avLst/>
-              </a:prstGeom>
-              <a:ln>
-                <a:tailEnd type="triangle"/>
-              </a:ln>
-            </p:spPr>
-            <p:style>
-              <a:lnRef idx="3">
-                <a:schemeClr val="dk1"/>
-              </a:lnRef>
-              <a:fillRef idx="0">
-                <a:schemeClr val="dk1"/>
-              </a:fillRef>
-              <a:effectRef idx="2">
-                <a:schemeClr val="dk1"/>
-              </a:effectRef>
-              <a:fontRef idx="minor">
-                <a:schemeClr val="tx1"/>
-              </a:fontRef>
-            </p:style>
-          </p:cxnSp>
-          <p:cxnSp>
-            <p:nvCxnSpPr>
-              <p:cNvPr id="63" name="Connettore diritto 62">
-                <a:extLst>
-                  <a:ext uri="{FF2B5EF4-FFF2-40B4-BE49-F238E27FC236}">
-                    <a16:creationId xmlns:a16="http://schemas.microsoft.com/office/drawing/2014/main" id="{AA9EAFB7-0BBB-C9B6-85DA-42B9E3474EA9}"/>
-                  </a:ext>
-                </a:extLst>
-              </p:cNvPr>
-              <p:cNvCxnSpPr>
-                <a:cxnSpLocks/>
-                <a:stCxn id="57" idx="3"/>
-                <a:endCxn id="65" idx="1"/>
-              </p:cNvCxnSpPr>
-              <p:nvPr/>
-            </p:nvCxnSpPr>
-            <p:spPr>
-              <a:xfrm flipV="1">
-                <a:off x="8368104" y="1488393"/>
-                <a:ext cx="516832" cy="3337"/>
-              </a:xfrm>
-              <a:prstGeom prst="line">
-                <a:avLst/>
-              </a:prstGeom>
-            </p:spPr>
-            <p:style>
-              <a:lnRef idx="3">
-                <a:schemeClr val="dk1"/>
-              </a:lnRef>
-              <a:fillRef idx="0">
-                <a:schemeClr val="dk1"/>
-              </a:fillRef>
-              <a:effectRef idx="2">
-                <a:schemeClr val="dk1"/>
-              </a:effectRef>
-              <a:fontRef idx="minor">
-                <a:schemeClr val="tx1"/>
-              </a:fontRef>
-            </p:style>
-          </p:cxnSp>
-          <p:cxnSp>
-            <p:nvCxnSpPr>
-              <p:cNvPr id="64" name="Connettore a gomito 63">
-                <a:extLst>
-                  <a:ext uri="{FF2B5EF4-FFF2-40B4-BE49-F238E27FC236}">
-                    <a16:creationId xmlns:a16="http://schemas.microsoft.com/office/drawing/2014/main" id="{290A9F94-ECCA-860C-0A9C-CA94E5612A82}"/>
-                  </a:ext>
-                </a:extLst>
-              </p:cNvPr>
-              <p:cNvCxnSpPr>
-                <a:cxnSpLocks/>
-                <a:stCxn id="58" idx="0"/>
-                <a:endCxn id="65" idx="1"/>
-              </p:cNvCxnSpPr>
-              <p:nvPr/>
-            </p:nvCxnSpPr>
-            <p:spPr>
-              <a:xfrm rot="16200000" flipV="1">
-                <a:off x="8663341" y="1709989"/>
-                <a:ext cx="447553" cy="4361"/>
-              </a:xfrm>
-              <a:prstGeom prst="bentConnector4">
-                <a:avLst>
-                  <a:gd name="adj1" fmla="val 29369"/>
-                  <a:gd name="adj2" fmla="val 8545563"/>
-                </a:avLst>
-              </a:prstGeom>
-              <a:ln>
-                <a:tailEnd type="triangle"/>
-              </a:ln>
-            </p:spPr>
-            <p:style>
-              <a:lnRef idx="3">
-                <a:schemeClr val="dk1"/>
-              </a:lnRef>
-              <a:fillRef idx="0">
-                <a:schemeClr val="dk1"/>
-              </a:fillRef>
-              <a:effectRef idx="2">
-                <a:schemeClr val="dk1"/>
-              </a:effectRef>
-              <a:fontRef idx="minor">
-                <a:schemeClr val="tx1"/>
-              </a:fontRef>
-            </p:style>
-          </p:cxnSp>
-          <p:sp>
-            <p:nvSpPr>
-              <p:cNvPr id="65" name="CasellaDiTesto 64">
-                <a:extLst>
-                  <a:ext uri="{FF2B5EF4-FFF2-40B4-BE49-F238E27FC236}">
-                    <a16:creationId xmlns:a16="http://schemas.microsoft.com/office/drawing/2014/main" id="{C8F6A963-CCA2-0DDA-F820-DFD2A30FA390}"/>
-                  </a:ext>
-                </a:extLst>
-              </p:cNvPr>
-              <p:cNvSpPr txBox="1"/>
-              <p:nvPr/>
-            </p:nvSpPr>
-            <p:spPr>
-              <a:xfrm>
-                <a:off x="8884936" y="1303727"/>
-                <a:ext cx="1316208" cy="369332"/>
-              </a:xfrm>
-              <a:prstGeom prst="rect">
-                <a:avLst/>
-              </a:prstGeom>
-              <a:noFill/>
-              <a:ln w="28575">
-                <a:solidFill>
-                  <a:srgbClr val="00B050"/>
-                </a:solidFill>
-              </a:ln>
-            </p:spPr>
-            <p:style>
-              <a:lnRef idx="2">
-                <a:schemeClr val="accent6"/>
-              </a:lnRef>
-              <a:fillRef idx="1">
-                <a:schemeClr val="lt1"/>
-              </a:fillRef>
-              <a:effectRef idx="0">
-                <a:schemeClr val="accent6"/>
-              </a:effectRef>
-              <a:fontRef idx="minor">
-                <a:schemeClr val="dk1"/>
-              </a:fontRef>
-            </p:style>
-            <p:txBody>
-              <a:bodyPr wrap="square" anchor="ctr">
-                <a:spAutoFit/>
-              </a:bodyPr>
-              <a:lstStyle/>
-              <a:p>
-                <a:pPr algn="ctr"/>
-                <a:r>
-                  <a:rPr lang="it-IT" dirty="0"/>
-                  <a:t>Predizioni</a:t>
-                </a:r>
-                <a:endParaRPr lang="it-IT" sz="300" dirty="0"/>
-              </a:p>
-            </p:txBody>
-          </p:sp>
           <p:cxnSp>
             <p:nvCxnSpPr>
               <p:cNvPr id="66" name="Connettore 2 65">
@@ -6016,15 +6234,13 @@
               </p:cNvPr>
               <p:cNvCxnSpPr>
                 <a:cxnSpLocks/>
-                <a:stCxn id="65" idx="3"/>
-                <a:endCxn id="59" idx="1"/>
               </p:cNvCxnSpPr>
               <p:nvPr/>
             </p:nvCxnSpPr>
             <p:spPr>
-              <a:xfrm>
-                <a:off x="10201143" y="1488393"/>
-                <a:ext cx="353972" cy="3337"/>
+              <a:xfrm flipV="1">
+                <a:off x="10288953" y="1491730"/>
+                <a:ext cx="251667" cy="1929"/>
               </a:xfrm>
               <a:prstGeom prst="straightConnector1">
                 <a:avLst/>
@@ -6637,42 +6853,6 @@
           </p:txBody>
         </p:sp>
       </p:grpSp>
-      <p:sp>
-        <p:nvSpPr>
-          <p:cNvPr id="69" name="CasellaDiTesto 68">
-            <a:extLst>
-              <a:ext uri="{FF2B5EF4-FFF2-40B4-BE49-F238E27FC236}">
-                <a16:creationId xmlns:a16="http://schemas.microsoft.com/office/drawing/2014/main" id="{7A7A535D-8218-52ED-D83F-02EDDEB297BB}"/>
-              </a:ext>
-            </a:extLst>
-          </p:cNvPr>
-          <p:cNvSpPr txBox="1"/>
-          <p:nvPr/>
-        </p:nvSpPr>
-        <p:spPr>
-          <a:xfrm rot="5400000">
-            <a:off x="3335209" y="3423889"/>
-            <a:ext cx="5791060" cy="369332"/>
-          </a:xfrm>
-          <a:prstGeom prst="rect">
-            <a:avLst/>
-          </a:prstGeom>
-          <a:noFill/>
-        </p:spPr>
-        <p:txBody>
-          <a:bodyPr wrap="square">
-            <a:spAutoFit/>
-          </a:bodyPr>
-          <a:lstStyle/>
-          <a:p>
-            <a:pPr algn="ctr"/>
-            <a:r>
-              <a:rPr lang="it-IT" dirty="0"/>
-              <a:t>____________________________________________</a:t>
-            </a:r>
-          </a:p>
-        </p:txBody>
-      </p:sp>
       <p:cxnSp>
         <p:nvCxnSpPr>
           <p:cNvPr id="71" name="Connettore 2 70">
@@ -6846,6 +7026,1078 @@
           </a:p>
         </p:txBody>
       </p:sp>
+      <p:cxnSp>
+        <p:nvCxnSpPr>
+          <p:cNvPr id="21" name="Connettore 2 20">
+            <a:extLst>
+              <a:ext uri="{FF2B5EF4-FFF2-40B4-BE49-F238E27FC236}">
+                <a16:creationId xmlns:a16="http://schemas.microsoft.com/office/drawing/2014/main" id="{62DED563-755D-B8B6-8845-2D5DA47BE189}"/>
+              </a:ext>
+            </a:extLst>
+          </p:cNvPr>
+          <p:cNvCxnSpPr>
+            <a:cxnSpLocks/>
+          </p:cNvCxnSpPr>
+          <p:nvPr/>
+        </p:nvCxnSpPr>
+        <p:spPr>
+          <a:xfrm flipH="1">
+            <a:off x="4453276" y="3400184"/>
+            <a:ext cx="1642724" cy="0"/>
+          </a:xfrm>
+          <a:prstGeom prst="straightConnector1">
+            <a:avLst/>
+          </a:prstGeom>
+          <a:ln w="28575">
+            <a:solidFill>
+              <a:srgbClr val="9933FF"/>
+            </a:solidFill>
+            <a:tailEnd type="arrow"/>
+          </a:ln>
+        </p:spPr>
+        <p:style>
+          <a:lnRef idx="1">
+            <a:schemeClr val="accent1"/>
+          </a:lnRef>
+          <a:fillRef idx="0">
+            <a:schemeClr val="accent1"/>
+          </a:fillRef>
+          <a:effectRef idx="0">
+            <a:schemeClr val="accent1"/>
+          </a:effectRef>
+          <a:fontRef idx="minor">
+            <a:schemeClr val="tx1"/>
+          </a:fontRef>
+        </p:style>
+      </p:cxnSp>
+      <p:sp>
+        <p:nvSpPr>
+          <p:cNvPr id="26" name="CasellaDiTesto 25">
+            <a:extLst>
+              <a:ext uri="{FF2B5EF4-FFF2-40B4-BE49-F238E27FC236}">
+                <a16:creationId xmlns:a16="http://schemas.microsoft.com/office/drawing/2014/main" id="{3A874714-C004-1A2C-7760-0B85F8C5F79A}"/>
+              </a:ext>
+            </a:extLst>
+          </p:cNvPr>
+          <p:cNvSpPr txBox="1"/>
+          <p:nvPr/>
+        </p:nvSpPr>
+        <p:spPr>
+          <a:xfrm>
+            <a:off x="4271576" y="3499221"/>
+            <a:ext cx="1581427" cy="646331"/>
+          </a:xfrm>
+          <a:prstGeom prst="rect">
+            <a:avLst/>
+          </a:prstGeom>
+          <a:noFill/>
+          <a:ln w="28575">
+            <a:noFill/>
+          </a:ln>
+        </p:spPr>
+        <p:txBody>
+          <a:bodyPr wrap="square" rtlCol="0">
+            <a:spAutoFit/>
+          </a:bodyPr>
+          <a:lstStyle/>
+          <a:p>
+            <a:pPr algn="ctr"/>
+            <a:r>
+              <a:rPr lang="it-IT" b="1" dirty="0" err="1">
+                <a:latin typeface="Georgia" panose="02040502050405020303" pitchFamily="18" charset="0"/>
+              </a:rPr>
+              <a:t>We</a:t>
+            </a:r>
+            <a:r>
+              <a:rPr lang="it-IT" b="1" dirty="0">
+                <a:latin typeface="Georgia" panose="02040502050405020303" pitchFamily="18" charset="0"/>
+              </a:rPr>
+              <a:t> focus on </a:t>
+            </a:r>
+            <a:r>
+              <a:rPr lang="it-IT" b="1" dirty="0" err="1">
+                <a:latin typeface="Georgia" panose="02040502050405020303" pitchFamily="18" charset="0"/>
+              </a:rPr>
+              <a:t>this</a:t>
+            </a:r>
+            <a:r>
+              <a:rPr lang="it-IT" b="1" dirty="0">
+                <a:latin typeface="Georgia" panose="02040502050405020303" pitchFamily="18" charset="0"/>
+              </a:rPr>
+              <a:t> part</a:t>
+            </a:r>
+          </a:p>
+        </p:txBody>
+      </p:sp>
+      <p:sp>
+        <p:nvSpPr>
+          <p:cNvPr id="27" name="Parentesi quadra aperta 26">
+            <a:extLst>
+              <a:ext uri="{FF2B5EF4-FFF2-40B4-BE49-F238E27FC236}">
+                <a16:creationId xmlns:a16="http://schemas.microsoft.com/office/drawing/2014/main" id="{1692D5B8-4480-AE6F-2F07-07A1E7CE4355}"/>
+              </a:ext>
+            </a:extLst>
+          </p:cNvPr>
+          <p:cNvSpPr/>
+          <p:nvPr/>
+        </p:nvSpPr>
+        <p:spPr>
+          <a:xfrm>
+            <a:off x="6117012" y="227157"/>
+            <a:ext cx="712246" cy="6403688"/>
+          </a:xfrm>
+          <a:prstGeom prst="leftBracket">
+            <a:avLst>
+              <a:gd name="adj" fmla="val 75766"/>
+            </a:avLst>
+          </a:prstGeom>
+          <a:ln w="28575">
+            <a:solidFill>
+              <a:srgbClr val="9933FF"/>
+            </a:solidFill>
+          </a:ln>
+        </p:spPr>
+        <p:style>
+          <a:lnRef idx="1">
+            <a:schemeClr val="accent1"/>
+          </a:lnRef>
+          <a:fillRef idx="0">
+            <a:schemeClr val="accent1"/>
+          </a:fillRef>
+          <a:effectRef idx="0">
+            <a:schemeClr val="accent1"/>
+          </a:effectRef>
+          <a:fontRef idx="minor">
+            <a:schemeClr val="tx1"/>
+          </a:fontRef>
+        </p:style>
+        <p:txBody>
+          <a:bodyPr rtlCol="0" anchor="ctr"/>
+          <a:lstStyle/>
+          <a:p>
+            <a:pPr algn="ctr"/>
+            <a:endParaRPr lang="it-IT"/>
+          </a:p>
+        </p:txBody>
+      </p:sp>
+      <p:sp>
+        <p:nvSpPr>
+          <p:cNvPr id="29" name="Ovale 28">
+            <a:extLst>
+              <a:ext uri="{FF2B5EF4-FFF2-40B4-BE49-F238E27FC236}">
+                <a16:creationId xmlns:a16="http://schemas.microsoft.com/office/drawing/2014/main" id="{00C043FC-1519-4F92-39F1-FAE3094CA38F}"/>
+              </a:ext>
+            </a:extLst>
+          </p:cNvPr>
+          <p:cNvSpPr/>
+          <p:nvPr/>
+        </p:nvSpPr>
+        <p:spPr>
+          <a:xfrm>
+            <a:off x="7354168" y="4867275"/>
+            <a:ext cx="281072" cy="291111"/>
+          </a:xfrm>
+          <a:prstGeom prst="ellipse">
+            <a:avLst/>
+          </a:prstGeom>
+          <a:ln>
+            <a:solidFill>
+              <a:schemeClr val="tx1"/>
+            </a:solidFill>
+          </a:ln>
+        </p:spPr>
+        <p:style>
+          <a:lnRef idx="2">
+            <a:schemeClr val="accent1">
+              <a:shade val="15000"/>
+            </a:schemeClr>
+          </a:lnRef>
+          <a:fillRef idx="1">
+            <a:schemeClr val="accent1"/>
+          </a:fillRef>
+          <a:effectRef idx="0">
+            <a:schemeClr val="accent1"/>
+          </a:effectRef>
+          <a:fontRef idx="minor">
+            <a:schemeClr val="lt1"/>
+          </a:fontRef>
+        </p:style>
+        <p:txBody>
+          <a:bodyPr rtlCol="0" anchor="ctr"/>
+          <a:lstStyle/>
+          <a:p>
+            <a:pPr algn="ctr"/>
+            <a:endParaRPr lang="it-IT"/>
+          </a:p>
+        </p:txBody>
+      </p:sp>
+      <p:sp>
+        <p:nvSpPr>
+          <p:cNvPr id="31" name="Ovale 30">
+            <a:extLst>
+              <a:ext uri="{FF2B5EF4-FFF2-40B4-BE49-F238E27FC236}">
+                <a16:creationId xmlns:a16="http://schemas.microsoft.com/office/drawing/2014/main" id="{932F4F19-CBF4-B7DA-A8B3-D8A318FB542F}"/>
+              </a:ext>
+            </a:extLst>
+          </p:cNvPr>
+          <p:cNvSpPr/>
+          <p:nvPr/>
+        </p:nvSpPr>
+        <p:spPr>
+          <a:xfrm>
+            <a:off x="7352263" y="5262451"/>
+            <a:ext cx="281072" cy="291111"/>
+          </a:xfrm>
+          <a:prstGeom prst="ellipse">
+            <a:avLst/>
+          </a:prstGeom>
+          <a:ln>
+            <a:solidFill>
+              <a:schemeClr val="tx1"/>
+            </a:solidFill>
+          </a:ln>
+        </p:spPr>
+        <p:style>
+          <a:lnRef idx="2">
+            <a:schemeClr val="accent1">
+              <a:shade val="15000"/>
+            </a:schemeClr>
+          </a:lnRef>
+          <a:fillRef idx="1">
+            <a:schemeClr val="accent1"/>
+          </a:fillRef>
+          <a:effectRef idx="0">
+            <a:schemeClr val="accent1"/>
+          </a:effectRef>
+          <a:fontRef idx="minor">
+            <a:schemeClr val="lt1"/>
+          </a:fontRef>
+        </p:style>
+        <p:txBody>
+          <a:bodyPr rtlCol="0" anchor="ctr"/>
+          <a:lstStyle/>
+          <a:p>
+            <a:pPr algn="ctr"/>
+            <a:endParaRPr lang="it-IT"/>
+          </a:p>
+        </p:txBody>
+      </p:sp>
+      <p:sp>
+        <p:nvSpPr>
+          <p:cNvPr id="32" name="Ovale 31">
+            <a:extLst>
+              <a:ext uri="{FF2B5EF4-FFF2-40B4-BE49-F238E27FC236}">
+                <a16:creationId xmlns:a16="http://schemas.microsoft.com/office/drawing/2014/main" id="{2FD2A1DE-3746-0859-6679-D76C019F56DC}"/>
+              </a:ext>
+            </a:extLst>
+          </p:cNvPr>
+          <p:cNvSpPr/>
+          <p:nvPr/>
+        </p:nvSpPr>
+        <p:spPr>
+          <a:xfrm>
+            <a:off x="7350358" y="5629701"/>
+            <a:ext cx="281072" cy="291111"/>
+          </a:xfrm>
+          <a:prstGeom prst="ellipse">
+            <a:avLst/>
+          </a:prstGeom>
+          <a:ln>
+            <a:solidFill>
+              <a:schemeClr val="tx1"/>
+            </a:solidFill>
+          </a:ln>
+        </p:spPr>
+        <p:style>
+          <a:lnRef idx="2">
+            <a:schemeClr val="accent1">
+              <a:shade val="15000"/>
+            </a:schemeClr>
+          </a:lnRef>
+          <a:fillRef idx="1">
+            <a:schemeClr val="accent1"/>
+          </a:fillRef>
+          <a:effectRef idx="0">
+            <a:schemeClr val="accent1"/>
+          </a:effectRef>
+          <a:fontRef idx="minor">
+            <a:schemeClr val="lt1"/>
+          </a:fontRef>
+        </p:style>
+        <p:txBody>
+          <a:bodyPr rtlCol="0" anchor="ctr"/>
+          <a:lstStyle/>
+          <a:p>
+            <a:pPr algn="ctr"/>
+            <a:endParaRPr lang="it-IT"/>
+          </a:p>
+        </p:txBody>
+      </p:sp>
+      <p:sp>
+        <p:nvSpPr>
+          <p:cNvPr id="33" name="Ovale 32">
+            <a:extLst>
+              <a:ext uri="{FF2B5EF4-FFF2-40B4-BE49-F238E27FC236}">
+                <a16:creationId xmlns:a16="http://schemas.microsoft.com/office/drawing/2014/main" id="{FFD39CA4-9973-1E7F-1786-2B55DB9DDA0A}"/>
+              </a:ext>
+            </a:extLst>
+          </p:cNvPr>
+          <p:cNvSpPr/>
+          <p:nvPr/>
+        </p:nvSpPr>
+        <p:spPr>
+          <a:xfrm>
+            <a:off x="8754469" y="4865371"/>
+            <a:ext cx="281072" cy="291111"/>
+          </a:xfrm>
+          <a:prstGeom prst="ellipse">
+            <a:avLst/>
+          </a:prstGeom>
+          <a:ln>
+            <a:solidFill>
+              <a:schemeClr val="tx1"/>
+            </a:solidFill>
+          </a:ln>
+        </p:spPr>
+        <p:style>
+          <a:lnRef idx="2">
+            <a:schemeClr val="accent1">
+              <a:shade val="15000"/>
+            </a:schemeClr>
+          </a:lnRef>
+          <a:fillRef idx="1">
+            <a:schemeClr val="accent1"/>
+          </a:fillRef>
+          <a:effectRef idx="0">
+            <a:schemeClr val="accent1"/>
+          </a:effectRef>
+          <a:fontRef idx="minor">
+            <a:schemeClr val="lt1"/>
+          </a:fontRef>
+        </p:style>
+        <p:txBody>
+          <a:bodyPr rtlCol="0" anchor="ctr"/>
+          <a:lstStyle/>
+          <a:p>
+            <a:pPr algn="ctr"/>
+            <a:endParaRPr lang="it-IT"/>
+          </a:p>
+        </p:txBody>
+      </p:sp>
+      <p:sp>
+        <p:nvSpPr>
+          <p:cNvPr id="34" name="Ovale 33">
+            <a:extLst>
+              <a:ext uri="{FF2B5EF4-FFF2-40B4-BE49-F238E27FC236}">
+                <a16:creationId xmlns:a16="http://schemas.microsoft.com/office/drawing/2014/main" id="{10D9855A-74AF-DF01-A5E0-C3BDDE54F134}"/>
+              </a:ext>
+            </a:extLst>
+          </p:cNvPr>
+          <p:cNvSpPr/>
+          <p:nvPr/>
+        </p:nvSpPr>
+        <p:spPr>
+          <a:xfrm>
+            <a:off x="8750659" y="5264357"/>
+            <a:ext cx="281072" cy="291111"/>
+          </a:xfrm>
+          <a:prstGeom prst="ellipse">
+            <a:avLst/>
+          </a:prstGeom>
+          <a:ln>
+            <a:solidFill>
+              <a:schemeClr val="tx1"/>
+            </a:solidFill>
+          </a:ln>
+        </p:spPr>
+        <p:style>
+          <a:lnRef idx="2">
+            <a:schemeClr val="accent1">
+              <a:shade val="15000"/>
+            </a:schemeClr>
+          </a:lnRef>
+          <a:fillRef idx="1">
+            <a:schemeClr val="accent1"/>
+          </a:fillRef>
+          <a:effectRef idx="0">
+            <a:schemeClr val="accent1"/>
+          </a:effectRef>
+          <a:fontRef idx="minor">
+            <a:schemeClr val="lt1"/>
+          </a:fontRef>
+        </p:style>
+        <p:txBody>
+          <a:bodyPr rtlCol="0" anchor="ctr"/>
+          <a:lstStyle/>
+          <a:p>
+            <a:pPr algn="ctr"/>
+            <a:endParaRPr lang="it-IT"/>
+          </a:p>
+        </p:txBody>
+      </p:sp>
+      <p:sp>
+        <p:nvSpPr>
+          <p:cNvPr id="35" name="Ovale 34">
+            <a:extLst>
+              <a:ext uri="{FF2B5EF4-FFF2-40B4-BE49-F238E27FC236}">
+                <a16:creationId xmlns:a16="http://schemas.microsoft.com/office/drawing/2014/main" id="{01E0EFEF-E19C-792B-9882-28B8CA0AE58F}"/>
+              </a:ext>
+            </a:extLst>
+          </p:cNvPr>
+          <p:cNvSpPr/>
+          <p:nvPr/>
+        </p:nvSpPr>
+        <p:spPr>
+          <a:xfrm>
+            <a:off x="8750659" y="5622082"/>
+            <a:ext cx="281072" cy="291111"/>
+          </a:xfrm>
+          <a:prstGeom prst="ellipse">
+            <a:avLst/>
+          </a:prstGeom>
+          <a:ln>
+            <a:solidFill>
+              <a:schemeClr val="tx1"/>
+            </a:solidFill>
+          </a:ln>
+        </p:spPr>
+        <p:style>
+          <a:lnRef idx="2">
+            <a:schemeClr val="accent1">
+              <a:shade val="15000"/>
+            </a:schemeClr>
+          </a:lnRef>
+          <a:fillRef idx="1">
+            <a:schemeClr val="accent1"/>
+          </a:fillRef>
+          <a:effectRef idx="0">
+            <a:schemeClr val="accent1"/>
+          </a:effectRef>
+          <a:fontRef idx="minor">
+            <a:schemeClr val="lt1"/>
+          </a:fontRef>
+        </p:style>
+        <p:txBody>
+          <a:bodyPr rtlCol="0" anchor="ctr"/>
+          <a:lstStyle/>
+          <a:p>
+            <a:pPr algn="ctr"/>
+            <a:endParaRPr lang="it-IT"/>
+          </a:p>
+        </p:txBody>
+      </p:sp>
+      <p:sp>
+        <p:nvSpPr>
+          <p:cNvPr id="36" name="Ovale 35">
+            <a:extLst>
+              <a:ext uri="{FF2B5EF4-FFF2-40B4-BE49-F238E27FC236}">
+                <a16:creationId xmlns:a16="http://schemas.microsoft.com/office/drawing/2014/main" id="{1A5A68BF-BDB2-337F-4124-69CAE7C31D6D}"/>
+              </a:ext>
+            </a:extLst>
+          </p:cNvPr>
+          <p:cNvSpPr/>
+          <p:nvPr/>
+        </p:nvSpPr>
+        <p:spPr>
+          <a:xfrm>
+            <a:off x="10155155" y="4864297"/>
+            <a:ext cx="281072" cy="291111"/>
+          </a:xfrm>
+          <a:prstGeom prst="ellipse">
+            <a:avLst/>
+          </a:prstGeom>
+          <a:ln>
+            <a:solidFill>
+              <a:schemeClr val="tx1"/>
+            </a:solidFill>
+          </a:ln>
+        </p:spPr>
+        <p:style>
+          <a:lnRef idx="2">
+            <a:schemeClr val="accent1">
+              <a:shade val="15000"/>
+            </a:schemeClr>
+          </a:lnRef>
+          <a:fillRef idx="1">
+            <a:schemeClr val="accent1"/>
+          </a:fillRef>
+          <a:effectRef idx="0">
+            <a:schemeClr val="accent1"/>
+          </a:effectRef>
+          <a:fontRef idx="minor">
+            <a:schemeClr val="lt1"/>
+          </a:fontRef>
+        </p:style>
+        <p:txBody>
+          <a:bodyPr rtlCol="0" anchor="ctr"/>
+          <a:lstStyle/>
+          <a:p>
+            <a:pPr algn="ctr"/>
+            <a:endParaRPr lang="it-IT"/>
+          </a:p>
+        </p:txBody>
+      </p:sp>
+      <p:sp>
+        <p:nvSpPr>
+          <p:cNvPr id="37" name="Ovale 36">
+            <a:extLst>
+              <a:ext uri="{FF2B5EF4-FFF2-40B4-BE49-F238E27FC236}">
+                <a16:creationId xmlns:a16="http://schemas.microsoft.com/office/drawing/2014/main" id="{77A1877E-186B-E09C-8830-52C1ACF9DE5D}"/>
+              </a:ext>
+            </a:extLst>
+          </p:cNvPr>
+          <p:cNvSpPr/>
+          <p:nvPr/>
+        </p:nvSpPr>
+        <p:spPr>
+          <a:xfrm>
+            <a:off x="10151345" y="5272808"/>
+            <a:ext cx="281072" cy="291111"/>
+          </a:xfrm>
+          <a:prstGeom prst="ellipse">
+            <a:avLst/>
+          </a:prstGeom>
+          <a:ln>
+            <a:solidFill>
+              <a:schemeClr val="tx1"/>
+            </a:solidFill>
+          </a:ln>
+        </p:spPr>
+        <p:style>
+          <a:lnRef idx="2">
+            <a:schemeClr val="accent1">
+              <a:shade val="15000"/>
+            </a:schemeClr>
+          </a:lnRef>
+          <a:fillRef idx="1">
+            <a:schemeClr val="accent1"/>
+          </a:fillRef>
+          <a:effectRef idx="0">
+            <a:schemeClr val="accent1"/>
+          </a:effectRef>
+          <a:fontRef idx="minor">
+            <a:schemeClr val="lt1"/>
+          </a:fontRef>
+        </p:style>
+        <p:txBody>
+          <a:bodyPr rtlCol="0" anchor="ctr"/>
+          <a:lstStyle/>
+          <a:p>
+            <a:pPr algn="ctr"/>
+            <a:endParaRPr lang="it-IT"/>
+          </a:p>
+        </p:txBody>
+      </p:sp>
+      <p:sp>
+        <p:nvSpPr>
+          <p:cNvPr id="38" name="Ovale 37">
+            <a:extLst>
+              <a:ext uri="{FF2B5EF4-FFF2-40B4-BE49-F238E27FC236}">
+                <a16:creationId xmlns:a16="http://schemas.microsoft.com/office/drawing/2014/main" id="{8A9A6C10-1F7F-D761-D4E2-F5C4B2DED6D9}"/>
+              </a:ext>
+            </a:extLst>
+          </p:cNvPr>
+          <p:cNvSpPr/>
+          <p:nvPr/>
+        </p:nvSpPr>
+        <p:spPr>
+          <a:xfrm>
+            <a:off x="10153250" y="5622913"/>
+            <a:ext cx="281072" cy="291111"/>
+          </a:xfrm>
+          <a:prstGeom prst="ellipse">
+            <a:avLst/>
+          </a:prstGeom>
+          <a:ln>
+            <a:solidFill>
+              <a:schemeClr val="tx1"/>
+            </a:solidFill>
+          </a:ln>
+        </p:spPr>
+        <p:style>
+          <a:lnRef idx="2">
+            <a:schemeClr val="accent1">
+              <a:shade val="15000"/>
+            </a:schemeClr>
+          </a:lnRef>
+          <a:fillRef idx="1">
+            <a:schemeClr val="accent1"/>
+          </a:fillRef>
+          <a:effectRef idx="0">
+            <a:schemeClr val="accent1"/>
+          </a:effectRef>
+          <a:fontRef idx="minor">
+            <a:schemeClr val="lt1"/>
+          </a:fontRef>
+        </p:style>
+        <p:txBody>
+          <a:bodyPr rtlCol="0" anchor="ctr"/>
+          <a:lstStyle/>
+          <a:p>
+            <a:pPr algn="ctr"/>
+            <a:endParaRPr lang="it-IT"/>
+          </a:p>
+        </p:txBody>
+      </p:sp>
+      <p:sp>
+        <p:nvSpPr>
+          <p:cNvPr id="67" name="Ovale 66">
+            <a:extLst>
+              <a:ext uri="{FF2B5EF4-FFF2-40B4-BE49-F238E27FC236}">
+                <a16:creationId xmlns:a16="http://schemas.microsoft.com/office/drawing/2014/main" id="{DDF2EB38-3855-49B6-B18C-A836D2DAECB9}"/>
+              </a:ext>
+            </a:extLst>
+          </p:cNvPr>
+          <p:cNvSpPr/>
+          <p:nvPr/>
+        </p:nvSpPr>
+        <p:spPr>
+          <a:xfrm>
+            <a:off x="8123026" y="5074900"/>
+            <a:ext cx="281072" cy="291111"/>
+          </a:xfrm>
+          <a:prstGeom prst="ellipse">
+            <a:avLst/>
+          </a:prstGeom>
+          <a:ln>
+            <a:solidFill>
+              <a:schemeClr val="tx1"/>
+            </a:solidFill>
+          </a:ln>
+        </p:spPr>
+        <p:style>
+          <a:lnRef idx="2">
+            <a:schemeClr val="accent1">
+              <a:shade val="15000"/>
+            </a:schemeClr>
+          </a:lnRef>
+          <a:fillRef idx="1">
+            <a:schemeClr val="accent1"/>
+          </a:fillRef>
+          <a:effectRef idx="0">
+            <a:schemeClr val="accent1"/>
+          </a:effectRef>
+          <a:fontRef idx="minor">
+            <a:schemeClr val="lt1"/>
+          </a:fontRef>
+        </p:style>
+        <p:txBody>
+          <a:bodyPr rtlCol="0" anchor="ctr"/>
+          <a:lstStyle/>
+          <a:p>
+            <a:pPr algn="ctr"/>
+            <a:endParaRPr lang="it-IT"/>
+          </a:p>
+        </p:txBody>
+      </p:sp>
+      <p:sp>
+        <p:nvSpPr>
+          <p:cNvPr id="70" name="Ovale 69">
+            <a:extLst>
+              <a:ext uri="{FF2B5EF4-FFF2-40B4-BE49-F238E27FC236}">
+                <a16:creationId xmlns:a16="http://schemas.microsoft.com/office/drawing/2014/main" id="{8F26FA7C-0077-60D7-1748-A3AF006F8C8F}"/>
+              </a:ext>
+            </a:extLst>
+          </p:cNvPr>
+          <p:cNvSpPr/>
+          <p:nvPr/>
+        </p:nvSpPr>
+        <p:spPr>
+          <a:xfrm>
+            <a:off x="8128741" y="5451026"/>
+            <a:ext cx="281072" cy="291111"/>
+          </a:xfrm>
+          <a:prstGeom prst="ellipse">
+            <a:avLst/>
+          </a:prstGeom>
+          <a:ln>
+            <a:solidFill>
+              <a:schemeClr val="tx1"/>
+            </a:solidFill>
+          </a:ln>
+        </p:spPr>
+        <p:style>
+          <a:lnRef idx="2">
+            <a:schemeClr val="accent1">
+              <a:shade val="15000"/>
+            </a:schemeClr>
+          </a:lnRef>
+          <a:fillRef idx="1">
+            <a:schemeClr val="accent1"/>
+          </a:fillRef>
+          <a:effectRef idx="0">
+            <a:schemeClr val="accent1"/>
+          </a:effectRef>
+          <a:fontRef idx="minor">
+            <a:schemeClr val="lt1"/>
+          </a:fontRef>
+        </p:style>
+        <p:txBody>
+          <a:bodyPr rtlCol="0" anchor="ctr"/>
+          <a:lstStyle/>
+          <a:p>
+            <a:pPr algn="ctr"/>
+            <a:endParaRPr lang="it-IT"/>
+          </a:p>
+        </p:txBody>
+      </p:sp>
+      <p:sp>
+        <p:nvSpPr>
+          <p:cNvPr id="72" name="Ovale 71">
+            <a:extLst>
+              <a:ext uri="{FF2B5EF4-FFF2-40B4-BE49-F238E27FC236}">
+                <a16:creationId xmlns:a16="http://schemas.microsoft.com/office/drawing/2014/main" id="{300ED84F-1EF0-DEE3-8685-ACA5BA08E408}"/>
+              </a:ext>
+            </a:extLst>
+          </p:cNvPr>
+          <p:cNvSpPr/>
+          <p:nvPr/>
+        </p:nvSpPr>
+        <p:spPr>
+          <a:xfrm>
+            <a:off x="8124931" y="5812561"/>
+            <a:ext cx="281072" cy="291111"/>
+          </a:xfrm>
+          <a:prstGeom prst="ellipse">
+            <a:avLst/>
+          </a:prstGeom>
+          <a:ln>
+            <a:solidFill>
+              <a:schemeClr val="tx1"/>
+            </a:solidFill>
+          </a:ln>
+        </p:spPr>
+        <p:style>
+          <a:lnRef idx="2">
+            <a:schemeClr val="accent1">
+              <a:shade val="15000"/>
+            </a:schemeClr>
+          </a:lnRef>
+          <a:fillRef idx="1">
+            <a:schemeClr val="accent1"/>
+          </a:fillRef>
+          <a:effectRef idx="0">
+            <a:schemeClr val="accent1"/>
+          </a:effectRef>
+          <a:fontRef idx="minor">
+            <a:schemeClr val="lt1"/>
+          </a:fontRef>
+        </p:style>
+        <p:txBody>
+          <a:bodyPr rtlCol="0" anchor="ctr"/>
+          <a:lstStyle/>
+          <a:p>
+            <a:pPr algn="ctr"/>
+            <a:endParaRPr lang="it-IT"/>
+          </a:p>
+        </p:txBody>
+      </p:sp>
+      <p:sp>
+        <p:nvSpPr>
+          <p:cNvPr id="73" name="Ovale 72">
+            <a:extLst>
+              <a:ext uri="{FF2B5EF4-FFF2-40B4-BE49-F238E27FC236}">
+                <a16:creationId xmlns:a16="http://schemas.microsoft.com/office/drawing/2014/main" id="{269AD5DD-9349-BF08-9282-B7B2A120C75F}"/>
+              </a:ext>
+            </a:extLst>
+          </p:cNvPr>
+          <p:cNvSpPr/>
+          <p:nvPr/>
+        </p:nvSpPr>
+        <p:spPr>
+          <a:xfrm>
+            <a:off x="8123026" y="4695301"/>
+            <a:ext cx="281072" cy="291111"/>
+          </a:xfrm>
+          <a:prstGeom prst="ellipse">
+            <a:avLst/>
+          </a:prstGeom>
+          <a:ln>
+            <a:solidFill>
+              <a:schemeClr val="tx1"/>
+            </a:solidFill>
+          </a:ln>
+        </p:spPr>
+        <p:style>
+          <a:lnRef idx="2">
+            <a:schemeClr val="accent1">
+              <a:shade val="15000"/>
+            </a:schemeClr>
+          </a:lnRef>
+          <a:fillRef idx="1">
+            <a:schemeClr val="accent1"/>
+          </a:fillRef>
+          <a:effectRef idx="0">
+            <a:schemeClr val="accent1"/>
+          </a:effectRef>
+          <a:fontRef idx="minor">
+            <a:schemeClr val="lt1"/>
+          </a:fontRef>
+        </p:style>
+        <p:txBody>
+          <a:bodyPr rtlCol="0" anchor="ctr"/>
+          <a:lstStyle/>
+          <a:p>
+            <a:pPr algn="ctr"/>
+            <a:endParaRPr lang="it-IT"/>
+          </a:p>
+        </p:txBody>
+      </p:sp>
+      <p:sp>
+        <p:nvSpPr>
+          <p:cNvPr id="77" name="Ovale 76">
+            <a:extLst>
+              <a:ext uri="{FF2B5EF4-FFF2-40B4-BE49-F238E27FC236}">
+                <a16:creationId xmlns:a16="http://schemas.microsoft.com/office/drawing/2014/main" id="{FE360FAB-8674-64A3-E369-83811BB6E117}"/>
+              </a:ext>
+            </a:extLst>
+          </p:cNvPr>
+          <p:cNvSpPr/>
+          <p:nvPr/>
+        </p:nvSpPr>
+        <p:spPr>
+          <a:xfrm>
+            <a:off x="9519517" y="5073891"/>
+            <a:ext cx="281072" cy="291111"/>
+          </a:xfrm>
+          <a:prstGeom prst="ellipse">
+            <a:avLst/>
+          </a:prstGeom>
+          <a:ln>
+            <a:solidFill>
+              <a:schemeClr val="tx1"/>
+            </a:solidFill>
+          </a:ln>
+        </p:spPr>
+        <p:style>
+          <a:lnRef idx="2">
+            <a:schemeClr val="accent1">
+              <a:shade val="15000"/>
+            </a:schemeClr>
+          </a:lnRef>
+          <a:fillRef idx="1">
+            <a:schemeClr val="accent1"/>
+          </a:fillRef>
+          <a:effectRef idx="0">
+            <a:schemeClr val="accent1"/>
+          </a:effectRef>
+          <a:fontRef idx="minor">
+            <a:schemeClr val="lt1"/>
+          </a:fontRef>
+        </p:style>
+        <p:txBody>
+          <a:bodyPr rtlCol="0" anchor="ctr"/>
+          <a:lstStyle/>
+          <a:p>
+            <a:pPr algn="ctr"/>
+            <a:endParaRPr lang="it-IT"/>
+          </a:p>
+        </p:txBody>
+      </p:sp>
+      <p:sp>
+        <p:nvSpPr>
+          <p:cNvPr id="78" name="Ovale 77">
+            <a:extLst>
+              <a:ext uri="{FF2B5EF4-FFF2-40B4-BE49-F238E27FC236}">
+                <a16:creationId xmlns:a16="http://schemas.microsoft.com/office/drawing/2014/main" id="{592C6E13-2EEB-9459-331B-398906BB9D4D}"/>
+              </a:ext>
+            </a:extLst>
+          </p:cNvPr>
+          <p:cNvSpPr/>
+          <p:nvPr/>
+        </p:nvSpPr>
+        <p:spPr>
+          <a:xfrm>
+            <a:off x="9525232" y="5446207"/>
+            <a:ext cx="281072" cy="291111"/>
+          </a:xfrm>
+          <a:prstGeom prst="ellipse">
+            <a:avLst/>
+          </a:prstGeom>
+          <a:ln>
+            <a:solidFill>
+              <a:schemeClr val="tx1"/>
+            </a:solidFill>
+          </a:ln>
+        </p:spPr>
+        <p:style>
+          <a:lnRef idx="2">
+            <a:schemeClr val="accent1">
+              <a:shade val="15000"/>
+            </a:schemeClr>
+          </a:lnRef>
+          <a:fillRef idx="1">
+            <a:schemeClr val="accent1"/>
+          </a:fillRef>
+          <a:effectRef idx="0">
+            <a:schemeClr val="accent1"/>
+          </a:effectRef>
+          <a:fontRef idx="minor">
+            <a:schemeClr val="lt1"/>
+          </a:fontRef>
+        </p:style>
+        <p:txBody>
+          <a:bodyPr rtlCol="0" anchor="ctr"/>
+          <a:lstStyle/>
+          <a:p>
+            <a:pPr algn="ctr"/>
+            <a:endParaRPr lang="it-IT"/>
+          </a:p>
+        </p:txBody>
+      </p:sp>
+      <p:sp>
+        <p:nvSpPr>
+          <p:cNvPr id="79" name="Ovale 78">
+            <a:extLst>
+              <a:ext uri="{FF2B5EF4-FFF2-40B4-BE49-F238E27FC236}">
+                <a16:creationId xmlns:a16="http://schemas.microsoft.com/office/drawing/2014/main" id="{FF375FC0-C24B-5E6E-770E-272A6E38DD57}"/>
+              </a:ext>
+            </a:extLst>
+          </p:cNvPr>
+          <p:cNvSpPr/>
+          <p:nvPr/>
+        </p:nvSpPr>
+        <p:spPr>
+          <a:xfrm>
+            <a:off x="9525232" y="5819172"/>
+            <a:ext cx="281072" cy="291111"/>
+          </a:xfrm>
+          <a:prstGeom prst="ellipse">
+            <a:avLst/>
+          </a:prstGeom>
+          <a:ln>
+            <a:solidFill>
+              <a:schemeClr val="tx1"/>
+            </a:solidFill>
+          </a:ln>
+        </p:spPr>
+        <p:style>
+          <a:lnRef idx="2">
+            <a:schemeClr val="accent1">
+              <a:shade val="15000"/>
+            </a:schemeClr>
+          </a:lnRef>
+          <a:fillRef idx="1">
+            <a:schemeClr val="accent1"/>
+          </a:fillRef>
+          <a:effectRef idx="0">
+            <a:schemeClr val="accent1"/>
+          </a:effectRef>
+          <a:fontRef idx="minor">
+            <a:schemeClr val="lt1"/>
+          </a:fontRef>
+        </p:style>
+        <p:txBody>
+          <a:bodyPr rtlCol="0" anchor="ctr"/>
+          <a:lstStyle/>
+          <a:p>
+            <a:pPr algn="ctr"/>
+            <a:endParaRPr lang="it-IT"/>
+          </a:p>
+        </p:txBody>
+      </p:sp>
+      <p:sp>
+        <p:nvSpPr>
+          <p:cNvPr id="80" name="Ovale 79">
+            <a:extLst>
+              <a:ext uri="{FF2B5EF4-FFF2-40B4-BE49-F238E27FC236}">
+                <a16:creationId xmlns:a16="http://schemas.microsoft.com/office/drawing/2014/main" id="{9D727BC0-8C41-3BEC-6969-6F7C268D1694}"/>
+              </a:ext>
+            </a:extLst>
+          </p:cNvPr>
+          <p:cNvSpPr/>
+          <p:nvPr/>
+        </p:nvSpPr>
+        <p:spPr>
+          <a:xfrm>
+            <a:off x="9523327" y="4686672"/>
+            <a:ext cx="281072" cy="291111"/>
+          </a:xfrm>
+          <a:prstGeom prst="ellipse">
+            <a:avLst/>
+          </a:prstGeom>
+          <a:ln>
+            <a:solidFill>
+              <a:schemeClr val="tx1"/>
+            </a:solidFill>
+          </a:ln>
+        </p:spPr>
+        <p:style>
+          <a:lnRef idx="2">
+            <a:schemeClr val="accent1">
+              <a:shade val="15000"/>
+            </a:schemeClr>
+          </a:lnRef>
+          <a:fillRef idx="1">
+            <a:schemeClr val="accent1"/>
+          </a:fillRef>
+          <a:effectRef idx="0">
+            <a:schemeClr val="accent1"/>
+          </a:effectRef>
+          <a:fontRef idx="minor">
+            <a:schemeClr val="lt1"/>
+          </a:fontRef>
+        </p:style>
+        <p:txBody>
+          <a:bodyPr rtlCol="0" anchor="ctr"/>
+          <a:lstStyle/>
+          <a:p>
+            <a:pPr algn="ctr"/>
+            <a:endParaRPr lang="it-IT"/>
+          </a:p>
+        </p:txBody>
+      </p:sp>
+      <p:sp>
+        <p:nvSpPr>
+          <p:cNvPr id="82" name="Ovale 81">
+            <a:extLst>
+              <a:ext uri="{FF2B5EF4-FFF2-40B4-BE49-F238E27FC236}">
+                <a16:creationId xmlns:a16="http://schemas.microsoft.com/office/drawing/2014/main" id="{2E92C7B7-CB5A-97B1-A5B2-3CF99CE1E0BE}"/>
+              </a:ext>
+            </a:extLst>
+          </p:cNvPr>
+          <p:cNvSpPr/>
+          <p:nvPr/>
+        </p:nvSpPr>
+        <p:spPr>
+          <a:xfrm>
+            <a:off x="10706248" y="5244326"/>
+            <a:ext cx="281072" cy="291111"/>
+          </a:xfrm>
+          <a:prstGeom prst="ellipse">
+            <a:avLst/>
+          </a:prstGeom>
+          <a:ln>
+            <a:solidFill>
+              <a:schemeClr val="tx1"/>
+            </a:solidFill>
+          </a:ln>
+        </p:spPr>
+        <p:style>
+          <a:lnRef idx="2">
+            <a:schemeClr val="accent1">
+              <a:shade val="15000"/>
+            </a:schemeClr>
+          </a:lnRef>
+          <a:fillRef idx="1">
+            <a:schemeClr val="accent1"/>
+          </a:fillRef>
+          <a:effectRef idx="0">
+            <a:schemeClr val="accent1"/>
+          </a:effectRef>
+          <a:fontRef idx="minor">
+            <a:schemeClr val="lt1"/>
+          </a:fontRef>
+        </p:style>
+        <p:txBody>
+          <a:bodyPr rtlCol="0" anchor="ctr"/>
+          <a:lstStyle/>
+          <a:p>
+            <a:pPr algn="ctr"/>
+            <a:endParaRPr lang="it-IT"/>
+          </a:p>
+        </p:txBody>
+      </p:sp>
     </p:spTree>
     <p:extLst>
       <p:ext uri="{BB962C8B-B14F-4D97-AF65-F5344CB8AC3E}">
@@ -6857,11 +8109,15 @@
     <a:masterClrMapping/>
   </p:clrMapOvr>
   <mc:AlternateContent xmlns:mc="http://schemas.openxmlformats.org/markup-compatibility/2006">
-    <mc:Choice xmlns:p14="http://schemas.microsoft.com/office/powerpoint/2010/main" Requires="p14">
-      <p:transition p14:dur="10"/>
+    <mc:Choice xmlns:p159="http://schemas.microsoft.com/office/powerpoint/2015/09/main" Requires="p159">
+      <p:transition xmlns:p14="http://schemas.microsoft.com/office/powerpoint/2010/main" spd="slow" p14:dur="2000">
+        <p159:morph option="byObject"/>
+      </p:transition>
     </mc:Choice>
     <mc:Fallback>
-      <p:transition/>
+      <p:transition spd="slow">
+        <p:fade/>
+      </p:transition>
     </mc:Fallback>
   </mc:AlternateContent>
   <p:timing>
@@ -6960,6 +8216,744 @@
                       </p:childTnLst>
                     </p:cTn>
                   </p:par>
+                  <p:par>
+                    <p:cTn id="11" fill="hold">
+                      <p:stCondLst>
+                        <p:cond delay="indefinite"/>
+                      </p:stCondLst>
+                      <p:childTnLst>
+                        <p:par>
+                          <p:cTn id="12" fill="hold">
+                            <p:stCondLst>
+                              <p:cond delay="0"/>
+                            </p:stCondLst>
+                            <p:childTnLst>
+                              <p:par>
+                                <p:cTn id="13" presetID="22" presetClass="entr" presetSubtype="8" fill="hold" grpId="0" nodeType="clickEffect">
+                                  <p:stCondLst>
+                                    <p:cond delay="0"/>
+                                  </p:stCondLst>
+                                  <p:childTnLst>
+                                    <p:set>
+                                      <p:cBhvr>
+                                        <p:cTn id="14" dur="1" fill="hold">
+                                          <p:stCondLst>
+                                            <p:cond delay="0"/>
+                                          </p:stCondLst>
+                                        </p:cTn>
+                                        <p:tgtEl>
+                                          <p:spTgt spid="29"/>
+                                        </p:tgtEl>
+                                        <p:attrNameLst>
+                                          <p:attrName>style.visibility</p:attrName>
+                                        </p:attrNameLst>
+                                      </p:cBhvr>
+                                      <p:to>
+                                        <p:strVal val="visible"/>
+                                      </p:to>
+                                    </p:set>
+                                    <p:animEffect transition="in" filter="wipe(left)">
+                                      <p:cBhvr>
+                                        <p:cTn id="15" dur="500"/>
+                                        <p:tgtEl>
+                                          <p:spTgt spid="29"/>
+                                        </p:tgtEl>
+                                      </p:cBhvr>
+                                    </p:animEffect>
+                                  </p:childTnLst>
+                                </p:cTn>
+                              </p:par>
+                              <p:par>
+                                <p:cTn id="16" presetID="22" presetClass="entr" presetSubtype="8" fill="hold" grpId="0" nodeType="withEffect">
+                                  <p:stCondLst>
+                                    <p:cond delay="0"/>
+                                  </p:stCondLst>
+                                  <p:childTnLst>
+                                    <p:set>
+                                      <p:cBhvr>
+                                        <p:cTn id="17" dur="1" fill="hold">
+                                          <p:stCondLst>
+                                            <p:cond delay="0"/>
+                                          </p:stCondLst>
+                                        </p:cTn>
+                                        <p:tgtEl>
+                                          <p:spTgt spid="31"/>
+                                        </p:tgtEl>
+                                        <p:attrNameLst>
+                                          <p:attrName>style.visibility</p:attrName>
+                                        </p:attrNameLst>
+                                      </p:cBhvr>
+                                      <p:to>
+                                        <p:strVal val="visible"/>
+                                      </p:to>
+                                    </p:set>
+                                    <p:animEffect transition="in" filter="wipe(left)">
+                                      <p:cBhvr>
+                                        <p:cTn id="18" dur="500"/>
+                                        <p:tgtEl>
+                                          <p:spTgt spid="31"/>
+                                        </p:tgtEl>
+                                      </p:cBhvr>
+                                    </p:animEffect>
+                                  </p:childTnLst>
+                                </p:cTn>
+                              </p:par>
+                              <p:par>
+                                <p:cTn id="19" presetID="22" presetClass="entr" presetSubtype="8" fill="hold" grpId="0" nodeType="withEffect">
+                                  <p:stCondLst>
+                                    <p:cond delay="0"/>
+                                  </p:stCondLst>
+                                  <p:childTnLst>
+                                    <p:set>
+                                      <p:cBhvr>
+                                        <p:cTn id="20" dur="1" fill="hold">
+                                          <p:stCondLst>
+                                            <p:cond delay="0"/>
+                                          </p:stCondLst>
+                                        </p:cTn>
+                                        <p:tgtEl>
+                                          <p:spTgt spid="32"/>
+                                        </p:tgtEl>
+                                        <p:attrNameLst>
+                                          <p:attrName>style.visibility</p:attrName>
+                                        </p:attrNameLst>
+                                      </p:cBhvr>
+                                      <p:to>
+                                        <p:strVal val="visible"/>
+                                      </p:to>
+                                    </p:set>
+                                    <p:animEffect transition="in" filter="wipe(left)">
+                                      <p:cBhvr>
+                                        <p:cTn id="21" dur="500"/>
+                                        <p:tgtEl>
+                                          <p:spTgt spid="32"/>
+                                        </p:tgtEl>
+                                      </p:cBhvr>
+                                    </p:animEffect>
+                                  </p:childTnLst>
+                                </p:cTn>
+                              </p:par>
+                            </p:childTnLst>
+                          </p:cTn>
+                        </p:par>
+                      </p:childTnLst>
+                    </p:cTn>
+                  </p:par>
+                  <p:par>
+                    <p:cTn id="22" fill="hold">
+                      <p:stCondLst>
+                        <p:cond delay="indefinite"/>
+                      </p:stCondLst>
+                      <p:childTnLst>
+                        <p:par>
+                          <p:cTn id="23" fill="hold">
+                            <p:stCondLst>
+                              <p:cond delay="0"/>
+                            </p:stCondLst>
+                            <p:childTnLst>
+                              <p:par>
+                                <p:cTn id="24" presetID="22" presetClass="entr" presetSubtype="8" fill="hold" grpId="0" nodeType="clickEffect">
+                                  <p:stCondLst>
+                                    <p:cond delay="0"/>
+                                  </p:stCondLst>
+                                  <p:childTnLst>
+                                    <p:set>
+                                      <p:cBhvr>
+                                        <p:cTn id="25" dur="1" fill="hold">
+                                          <p:stCondLst>
+                                            <p:cond delay="0"/>
+                                          </p:stCondLst>
+                                        </p:cTn>
+                                        <p:tgtEl>
+                                          <p:spTgt spid="73"/>
+                                        </p:tgtEl>
+                                        <p:attrNameLst>
+                                          <p:attrName>style.visibility</p:attrName>
+                                        </p:attrNameLst>
+                                      </p:cBhvr>
+                                      <p:to>
+                                        <p:strVal val="visible"/>
+                                      </p:to>
+                                    </p:set>
+                                    <p:animEffect transition="in" filter="wipe(left)">
+                                      <p:cBhvr>
+                                        <p:cTn id="26" dur="500"/>
+                                        <p:tgtEl>
+                                          <p:spTgt spid="73"/>
+                                        </p:tgtEl>
+                                      </p:cBhvr>
+                                    </p:animEffect>
+                                  </p:childTnLst>
+                                </p:cTn>
+                              </p:par>
+                              <p:par>
+                                <p:cTn id="27" presetID="22" presetClass="entr" presetSubtype="8" fill="hold" grpId="0" nodeType="withEffect">
+                                  <p:stCondLst>
+                                    <p:cond delay="0"/>
+                                  </p:stCondLst>
+                                  <p:childTnLst>
+                                    <p:set>
+                                      <p:cBhvr>
+                                        <p:cTn id="28" dur="1" fill="hold">
+                                          <p:stCondLst>
+                                            <p:cond delay="0"/>
+                                          </p:stCondLst>
+                                        </p:cTn>
+                                        <p:tgtEl>
+                                          <p:spTgt spid="67"/>
+                                        </p:tgtEl>
+                                        <p:attrNameLst>
+                                          <p:attrName>style.visibility</p:attrName>
+                                        </p:attrNameLst>
+                                      </p:cBhvr>
+                                      <p:to>
+                                        <p:strVal val="visible"/>
+                                      </p:to>
+                                    </p:set>
+                                    <p:animEffect transition="in" filter="wipe(left)">
+                                      <p:cBhvr>
+                                        <p:cTn id="29" dur="500"/>
+                                        <p:tgtEl>
+                                          <p:spTgt spid="67"/>
+                                        </p:tgtEl>
+                                      </p:cBhvr>
+                                    </p:animEffect>
+                                  </p:childTnLst>
+                                </p:cTn>
+                              </p:par>
+                              <p:par>
+                                <p:cTn id="30" presetID="22" presetClass="entr" presetSubtype="8" fill="hold" grpId="0" nodeType="withEffect">
+                                  <p:stCondLst>
+                                    <p:cond delay="0"/>
+                                  </p:stCondLst>
+                                  <p:childTnLst>
+                                    <p:set>
+                                      <p:cBhvr>
+                                        <p:cTn id="31" dur="1" fill="hold">
+                                          <p:stCondLst>
+                                            <p:cond delay="0"/>
+                                          </p:stCondLst>
+                                        </p:cTn>
+                                        <p:tgtEl>
+                                          <p:spTgt spid="70"/>
+                                        </p:tgtEl>
+                                        <p:attrNameLst>
+                                          <p:attrName>style.visibility</p:attrName>
+                                        </p:attrNameLst>
+                                      </p:cBhvr>
+                                      <p:to>
+                                        <p:strVal val="visible"/>
+                                      </p:to>
+                                    </p:set>
+                                    <p:animEffect transition="in" filter="wipe(left)">
+                                      <p:cBhvr>
+                                        <p:cTn id="32" dur="500"/>
+                                        <p:tgtEl>
+                                          <p:spTgt spid="70"/>
+                                        </p:tgtEl>
+                                      </p:cBhvr>
+                                    </p:animEffect>
+                                  </p:childTnLst>
+                                </p:cTn>
+                              </p:par>
+                              <p:par>
+                                <p:cTn id="33" presetID="22" presetClass="entr" presetSubtype="8" fill="hold" grpId="0" nodeType="withEffect">
+                                  <p:stCondLst>
+                                    <p:cond delay="0"/>
+                                  </p:stCondLst>
+                                  <p:childTnLst>
+                                    <p:set>
+                                      <p:cBhvr>
+                                        <p:cTn id="34" dur="1" fill="hold">
+                                          <p:stCondLst>
+                                            <p:cond delay="0"/>
+                                          </p:stCondLst>
+                                        </p:cTn>
+                                        <p:tgtEl>
+                                          <p:spTgt spid="72"/>
+                                        </p:tgtEl>
+                                        <p:attrNameLst>
+                                          <p:attrName>style.visibility</p:attrName>
+                                        </p:attrNameLst>
+                                      </p:cBhvr>
+                                      <p:to>
+                                        <p:strVal val="visible"/>
+                                      </p:to>
+                                    </p:set>
+                                    <p:animEffect transition="in" filter="wipe(left)">
+                                      <p:cBhvr>
+                                        <p:cTn id="35" dur="500"/>
+                                        <p:tgtEl>
+                                          <p:spTgt spid="72"/>
+                                        </p:tgtEl>
+                                      </p:cBhvr>
+                                    </p:animEffect>
+                                  </p:childTnLst>
+                                </p:cTn>
+                              </p:par>
+                            </p:childTnLst>
+                          </p:cTn>
+                        </p:par>
+                      </p:childTnLst>
+                    </p:cTn>
+                  </p:par>
+                  <p:par>
+                    <p:cTn id="36" fill="hold">
+                      <p:stCondLst>
+                        <p:cond delay="indefinite"/>
+                      </p:stCondLst>
+                      <p:childTnLst>
+                        <p:par>
+                          <p:cTn id="37" fill="hold">
+                            <p:stCondLst>
+                              <p:cond delay="0"/>
+                            </p:stCondLst>
+                            <p:childTnLst>
+                              <p:par>
+                                <p:cTn id="38" presetID="22" presetClass="entr" presetSubtype="8" fill="hold" grpId="0" nodeType="clickEffect">
+                                  <p:stCondLst>
+                                    <p:cond delay="0"/>
+                                  </p:stCondLst>
+                                  <p:childTnLst>
+                                    <p:set>
+                                      <p:cBhvr>
+                                        <p:cTn id="39" dur="1" fill="hold">
+                                          <p:stCondLst>
+                                            <p:cond delay="0"/>
+                                          </p:stCondLst>
+                                        </p:cTn>
+                                        <p:tgtEl>
+                                          <p:spTgt spid="33"/>
+                                        </p:tgtEl>
+                                        <p:attrNameLst>
+                                          <p:attrName>style.visibility</p:attrName>
+                                        </p:attrNameLst>
+                                      </p:cBhvr>
+                                      <p:to>
+                                        <p:strVal val="visible"/>
+                                      </p:to>
+                                    </p:set>
+                                    <p:animEffect transition="in" filter="wipe(left)">
+                                      <p:cBhvr>
+                                        <p:cTn id="40" dur="500"/>
+                                        <p:tgtEl>
+                                          <p:spTgt spid="33"/>
+                                        </p:tgtEl>
+                                      </p:cBhvr>
+                                    </p:animEffect>
+                                  </p:childTnLst>
+                                </p:cTn>
+                              </p:par>
+                              <p:par>
+                                <p:cTn id="41" presetID="22" presetClass="entr" presetSubtype="8" fill="hold" grpId="0" nodeType="withEffect">
+                                  <p:stCondLst>
+                                    <p:cond delay="0"/>
+                                  </p:stCondLst>
+                                  <p:childTnLst>
+                                    <p:set>
+                                      <p:cBhvr>
+                                        <p:cTn id="42" dur="1" fill="hold">
+                                          <p:stCondLst>
+                                            <p:cond delay="0"/>
+                                          </p:stCondLst>
+                                        </p:cTn>
+                                        <p:tgtEl>
+                                          <p:spTgt spid="34"/>
+                                        </p:tgtEl>
+                                        <p:attrNameLst>
+                                          <p:attrName>style.visibility</p:attrName>
+                                        </p:attrNameLst>
+                                      </p:cBhvr>
+                                      <p:to>
+                                        <p:strVal val="visible"/>
+                                      </p:to>
+                                    </p:set>
+                                    <p:animEffect transition="in" filter="wipe(left)">
+                                      <p:cBhvr>
+                                        <p:cTn id="43" dur="500"/>
+                                        <p:tgtEl>
+                                          <p:spTgt spid="34"/>
+                                        </p:tgtEl>
+                                      </p:cBhvr>
+                                    </p:animEffect>
+                                  </p:childTnLst>
+                                </p:cTn>
+                              </p:par>
+                              <p:par>
+                                <p:cTn id="44" presetID="22" presetClass="entr" presetSubtype="8" fill="hold" grpId="0" nodeType="withEffect">
+                                  <p:stCondLst>
+                                    <p:cond delay="0"/>
+                                  </p:stCondLst>
+                                  <p:childTnLst>
+                                    <p:set>
+                                      <p:cBhvr>
+                                        <p:cTn id="45" dur="1" fill="hold">
+                                          <p:stCondLst>
+                                            <p:cond delay="0"/>
+                                          </p:stCondLst>
+                                        </p:cTn>
+                                        <p:tgtEl>
+                                          <p:spTgt spid="35"/>
+                                        </p:tgtEl>
+                                        <p:attrNameLst>
+                                          <p:attrName>style.visibility</p:attrName>
+                                        </p:attrNameLst>
+                                      </p:cBhvr>
+                                      <p:to>
+                                        <p:strVal val="visible"/>
+                                      </p:to>
+                                    </p:set>
+                                    <p:animEffect transition="in" filter="wipe(left)">
+                                      <p:cBhvr>
+                                        <p:cTn id="46" dur="500"/>
+                                        <p:tgtEl>
+                                          <p:spTgt spid="35"/>
+                                        </p:tgtEl>
+                                      </p:cBhvr>
+                                    </p:animEffect>
+                                  </p:childTnLst>
+                                </p:cTn>
+                              </p:par>
+                            </p:childTnLst>
+                          </p:cTn>
+                        </p:par>
+                      </p:childTnLst>
+                    </p:cTn>
+                  </p:par>
+                  <p:par>
+                    <p:cTn id="47" fill="hold">
+                      <p:stCondLst>
+                        <p:cond delay="indefinite"/>
+                      </p:stCondLst>
+                      <p:childTnLst>
+                        <p:par>
+                          <p:cTn id="48" fill="hold">
+                            <p:stCondLst>
+                              <p:cond delay="0"/>
+                            </p:stCondLst>
+                            <p:childTnLst>
+                              <p:par>
+                                <p:cTn id="49" presetID="22" presetClass="entr" presetSubtype="8" fill="hold" grpId="0" nodeType="clickEffect">
+                                  <p:stCondLst>
+                                    <p:cond delay="0"/>
+                                  </p:stCondLst>
+                                  <p:childTnLst>
+                                    <p:set>
+                                      <p:cBhvr>
+                                        <p:cTn id="50" dur="1" fill="hold">
+                                          <p:stCondLst>
+                                            <p:cond delay="0"/>
+                                          </p:stCondLst>
+                                        </p:cTn>
+                                        <p:tgtEl>
+                                          <p:spTgt spid="79"/>
+                                        </p:tgtEl>
+                                        <p:attrNameLst>
+                                          <p:attrName>style.visibility</p:attrName>
+                                        </p:attrNameLst>
+                                      </p:cBhvr>
+                                      <p:to>
+                                        <p:strVal val="visible"/>
+                                      </p:to>
+                                    </p:set>
+                                    <p:animEffect transition="in" filter="wipe(left)">
+                                      <p:cBhvr>
+                                        <p:cTn id="51" dur="500"/>
+                                        <p:tgtEl>
+                                          <p:spTgt spid="79"/>
+                                        </p:tgtEl>
+                                      </p:cBhvr>
+                                    </p:animEffect>
+                                  </p:childTnLst>
+                                </p:cTn>
+                              </p:par>
+                              <p:par>
+                                <p:cTn id="52" presetID="22" presetClass="entr" presetSubtype="8" fill="hold" grpId="0" nodeType="withEffect">
+                                  <p:stCondLst>
+                                    <p:cond delay="0"/>
+                                  </p:stCondLst>
+                                  <p:childTnLst>
+                                    <p:set>
+                                      <p:cBhvr>
+                                        <p:cTn id="53" dur="1" fill="hold">
+                                          <p:stCondLst>
+                                            <p:cond delay="0"/>
+                                          </p:stCondLst>
+                                        </p:cTn>
+                                        <p:tgtEl>
+                                          <p:spTgt spid="78"/>
+                                        </p:tgtEl>
+                                        <p:attrNameLst>
+                                          <p:attrName>style.visibility</p:attrName>
+                                        </p:attrNameLst>
+                                      </p:cBhvr>
+                                      <p:to>
+                                        <p:strVal val="visible"/>
+                                      </p:to>
+                                    </p:set>
+                                    <p:animEffect transition="in" filter="wipe(left)">
+                                      <p:cBhvr>
+                                        <p:cTn id="54" dur="500"/>
+                                        <p:tgtEl>
+                                          <p:spTgt spid="78"/>
+                                        </p:tgtEl>
+                                      </p:cBhvr>
+                                    </p:animEffect>
+                                  </p:childTnLst>
+                                </p:cTn>
+                              </p:par>
+                              <p:par>
+                                <p:cTn id="55" presetID="22" presetClass="entr" presetSubtype="8" fill="hold" grpId="0" nodeType="withEffect">
+                                  <p:stCondLst>
+                                    <p:cond delay="0"/>
+                                  </p:stCondLst>
+                                  <p:childTnLst>
+                                    <p:set>
+                                      <p:cBhvr>
+                                        <p:cTn id="56" dur="1" fill="hold">
+                                          <p:stCondLst>
+                                            <p:cond delay="0"/>
+                                          </p:stCondLst>
+                                        </p:cTn>
+                                        <p:tgtEl>
+                                          <p:spTgt spid="77"/>
+                                        </p:tgtEl>
+                                        <p:attrNameLst>
+                                          <p:attrName>style.visibility</p:attrName>
+                                        </p:attrNameLst>
+                                      </p:cBhvr>
+                                      <p:to>
+                                        <p:strVal val="visible"/>
+                                      </p:to>
+                                    </p:set>
+                                    <p:animEffect transition="in" filter="wipe(left)">
+                                      <p:cBhvr>
+                                        <p:cTn id="57" dur="500"/>
+                                        <p:tgtEl>
+                                          <p:spTgt spid="77"/>
+                                        </p:tgtEl>
+                                      </p:cBhvr>
+                                    </p:animEffect>
+                                  </p:childTnLst>
+                                </p:cTn>
+                              </p:par>
+                              <p:par>
+                                <p:cTn id="58" presetID="22" presetClass="entr" presetSubtype="8" fill="hold" grpId="0" nodeType="withEffect">
+                                  <p:stCondLst>
+                                    <p:cond delay="0"/>
+                                  </p:stCondLst>
+                                  <p:childTnLst>
+                                    <p:set>
+                                      <p:cBhvr>
+                                        <p:cTn id="59" dur="1" fill="hold">
+                                          <p:stCondLst>
+                                            <p:cond delay="0"/>
+                                          </p:stCondLst>
+                                        </p:cTn>
+                                        <p:tgtEl>
+                                          <p:spTgt spid="80"/>
+                                        </p:tgtEl>
+                                        <p:attrNameLst>
+                                          <p:attrName>style.visibility</p:attrName>
+                                        </p:attrNameLst>
+                                      </p:cBhvr>
+                                      <p:to>
+                                        <p:strVal val="visible"/>
+                                      </p:to>
+                                    </p:set>
+                                    <p:animEffect transition="in" filter="wipe(left)">
+                                      <p:cBhvr>
+                                        <p:cTn id="60" dur="500"/>
+                                        <p:tgtEl>
+                                          <p:spTgt spid="80"/>
+                                        </p:tgtEl>
+                                      </p:cBhvr>
+                                    </p:animEffect>
+                                  </p:childTnLst>
+                                </p:cTn>
+                              </p:par>
+                            </p:childTnLst>
+                          </p:cTn>
+                        </p:par>
+                      </p:childTnLst>
+                    </p:cTn>
+                  </p:par>
+                  <p:par>
+                    <p:cTn id="61" fill="hold">
+                      <p:stCondLst>
+                        <p:cond delay="indefinite"/>
+                      </p:stCondLst>
+                      <p:childTnLst>
+                        <p:par>
+                          <p:cTn id="62" fill="hold">
+                            <p:stCondLst>
+                              <p:cond delay="0"/>
+                            </p:stCondLst>
+                            <p:childTnLst>
+                              <p:par>
+                                <p:cTn id="63" presetID="22" presetClass="entr" presetSubtype="8" fill="hold" grpId="0" nodeType="clickEffect">
+                                  <p:stCondLst>
+                                    <p:cond delay="0"/>
+                                  </p:stCondLst>
+                                  <p:childTnLst>
+                                    <p:set>
+                                      <p:cBhvr>
+                                        <p:cTn id="64" dur="1" fill="hold">
+                                          <p:stCondLst>
+                                            <p:cond delay="0"/>
+                                          </p:stCondLst>
+                                        </p:cTn>
+                                        <p:tgtEl>
+                                          <p:spTgt spid="38"/>
+                                        </p:tgtEl>
+                                        <p:attrNameLst>
+                                          <p:attrName>style.visibility</p:attrName>
+                                        </p:attrNameLst>
+                                      </p:cBhvr>
+                                      <p:to>
+                                        <p:strVal val="visible"/>
+                                      </p:to>
+                                    </p:set>
+                                    <p:animEffect transition="in" filter="wipe(left)">
+                                      <p:cBhvr>
+                                        <p:cTn id="65" dur="500"/>
+                                        <p:tgtEl>
+                                          <p:spTgt spid="38"/>
+                                        </p:tgtEl>
+                                      </p:cBhvr>
+                                    </p:animEffect>
+                                  </p:childTnLst>
+                                </p:cTn>
+                              </p:par>
+                              <p:par>
+                                <p:cTn id="66" presetID="22" presetClass="entr" presetSubtype="8" fill="hold" grpId="0" nodeType="withEffect">
+                                  <p:stCondLst>
+                                    <p:cond delay="0"/>
+                                  </p:stCondLst>
+                                  <p:childTnLst>
+                                    <p:set>
+                                      <p:cBhvr>
+                                        <p:cTn id="67" dur="1" fill="hold">
+                                          <p:stCondLst>
+                                            <p:cond delay="0"/>
+                                          </p:stCondLst>
+                                        </p:cTn>
+                                        <p:tgtEl>
+                                          <p:spTgt spid="37"/>
+                                        </p:tgtEl>
+                                        <p:attrNameLst>
+                                          <p:attrName>style.visibility</p:attrName>
+                                        </p:attrNameLst>
+                                      </p:cBhvr>
+                                      <p:to>
+                                        <p:strVal val="visible"/>
+                                      </p:to>
+                                    </p:set>
+                                    <p:animEffect transition="in" filter="wipe(left)">
+                                      <p:cBhvr>
+                                        <p:cTn id="68" dur="500"/>
+                                        <p:tgtEl>
+                                          <p:spTgt spid="37"/>
+                                        </p:tgtEl>
+                                      </p:cBhvr>
+                                    </p:animEffect>
+                                  </p:childTnLst>
+                                </p:cTn>
+                              </p:par>
+                              <p:par>
+                                <p:cTn id="69" presetID="22" presetClass="entr" presetSubtype="8" fill="hold" grpId="0" nodeType="withEffect">
+                                  <p:stCondLst>
+                                    <p:cond delay="0"/>
+                                  </p:stCondLst>
+                                  <p:childTnLst>
+                                    <p:set>
+                                      <p:cBhvr>
+                                        <p:cTn id="70" dur="1" fill="hold">
+                                          <p:stCondLst>
+                                            <p:cond delay="0"/>
+                                          </p:stCondLst>
+                                        </p:cTn>
+                                        <p:tgtEl>
+                                          <p:spTgt spid="36"/>
+                                        </p:tgtEl>
+                                        <p:attrNameLst>
+                                          <p:attrName>style.visibility</p:attrName>
+                                        </p:attrNameLst>
+                                      </p:cBhvr>
+                                      <p:to>
+                                        <p:strVal val="visible"/>
+                                      </p:to>
+                                    </p:set>
+                                    <p:animEffect transition="in" filter="wipe(left)">
+                                      <p:cBhvr>
+                                        <p:cTn id="71" dur="500"/>
+                                        <p:tgtEl>
+                                          <p:spTgt spid="36"/>
+                                        </p:tgtEl>
+                                      </p:cBhvr>
+                                    </p:animEffect>
+                                  </p:childTnLst>
+                                </p:cTn>
+                              </p:par>
+                            </p:childTnLst>
+                          </p:cTn>
+                        </p:par>
+                      </p:childTnLst>
+                    </p:cTn>
+                  </p:par>
+                  <p:par>
+                    <p:cTn id="72" fill="hold">
+                      <p:stCondLst>
+                        <p:cond delay="indefinite"/>
+                      </p:stCondLst>
+                      <p:childTnLst>
+                        <p:par>
+                          <p:cTn id="73" fill="hold">
+                            <p:stCondLst>
+                              <p:cond delay="0"/>
+                            </p:stCondLst>
+                            <p:childTnLst>
+                              <p:par>
+                                <p:cTn id="74" presetID="22" presetClass="entr" presetSubtype="8" fill="hold" grpId="0" nodeType="clickEffect">
+                                  <p:stCondLst>
+                                    <p:cond delay="0"/>
+                                  </p:stCondLst>
+                                  <p:childTnLst>
+                                    <p:set>
+                                      <p:cBhvr>
+                                        <p:cTn id="75" dur="1" fill="hold">
+                                          <p:stCondLst>
+                                            <p:cond delay="0"/>
+                                          </p:stCondLst>
+                                        </p:cTn>
+                                        <p:tgtEl>
+                                          <p:spTgt spid="82"/>
+                                        </p:tgtEl>
+                                        <p:attrNameLst>
+                                          <p:attrName>style.visibility</p:attrName>
+                                        </p:attrNameLst>
+                                      </p:cBhvr>
+                                      <p:to>
+                                        <p:strVal val="visible"/>
+                                      </p:to>
+                                    </p:set>
+                                    <p:animEffect transition="in" filter="wipe(left)">
+                                      <p:cBhvr>
+                                        <p:cTn id="76" dur="500"/>
+                                        <p:tgtEl>
+                                          <p:spTgt spid="82"/>
+                                        </p:tgtEl>
+                                      </p:cBhvr>
+                                    </p:animEffect>
+                                  </p:childTnLst>
+                                </p:cTn>
+                              </p:par>
+                            </p:childTnLst>
+                          </p:cTn>
+                        </p:par>
+                      </p:childTnLst>
+                    </p:cTn>
+                  </p:par>
                 </p:childTnLst>
               </p:cTn>
               <p:prevCondLst>
@@ -6983,6 +8977,24 @@
     </p:tnLst>
     <p:bldLst>
       <p:bldP spid="76" grpId="0" animBg="1"/>
+      <p:bldP spid="29" grpId="0" animBg="1"/>
+      <p:bldP spid="31" grpId="0" animBg="1"/>
+      <p:bldP spid="32" grpId="0" animBg="1"/>
+      <p:bldP spid="33" grpId="0" animBg="1"/>
+      <p:bldP spid="34" grpId="0" animBg="1"/>
+      <p:bldP spid="35" grpId="0" animBg="1"/>
+      <p:bldP spid="36" grpId="0" animBg="1"/>
+      <p:bldP spid="37" grpId="0" animBg="1"/>
+      <p:bldP spid="38" grpId="0" animBg="1"/>
+      <p:bldP spid="67" grpId="0" animBg="1"/>
+      <p:bldP spid="70" grpId="0" animBg="1"/>
+      <p:bldP spid="72" grpId="0" animBg="1"/>
+      <p:bldP spid="73" grpId="0" animBg="1"/>
+      <p:bldP spid="77" grpId="0" animBg="1"/>
+      <p:bldP spid="78" grpId="0" animBg="1"/>
+      <p:bldP spid="79" grpId="0" animBg="1"/>
+      <p:bldP spid="80" grpId="0" animBg="1"/>
+      <p:bldP spid="82" grpId="0" animBg="1"/>
     </p:bldLst>
   </p:timing>
 </p:sld>
@@ -7912,8 +9924,8 @@
           </p:sp>
         </mc:Fallback>
       </mc:AlternateContent>
-      <mc:AlternateContent xmlns:mc="http://schemas.openxmlformats.org/markup-compatibility/2006" xmlns:a14="http://schemas.microsoft.com/office/drawing/2010/main">
-        <mc:Choice Requires="a14">
+      <mc:AlternateContent xmlns:mc="http://schemas.openxmlformats.org/markup-compatibility/2006">
+        <mc:Choice xmlns:a14="http://schemas.microsoft.com/office/drawing/2010/main" Requires="a14">
           <p:sp>
             <p:nvSpPr>
               <p:cNvPr id="5" name="CasellaDiTesto 4">
@@ -8015,7 +10027,7 @@
             </p:txBody>
           </p:sp>
         </mc:Choice>
-        <mc:Fallback xmlns="">
+        <mc:Fallback>
           <p:sp>
             <p:nvSpPr>
               <p:cNvPr id="5" name="CasellaDiTesto 4">
@@ -10215,6 +12227,567 @@
           </a:p>
         </p:txBody>
       </p:sp>
+      <p:sp>
+        <p:nvSpPr>
+          <p:cNvPr id="38" name="Ovale 37">
+            <a:extLst>
+              <a:ext uri="{FF2B5EF4-FFF2-40B4-BE49-F238E27FC236}">
+                <a16:creationId xmlns:a16="http://schemas.microsoft.com/office/drawing/2014/main" id="{5252C2A7-6183-8465-81AB-EA5DFC34632A}"/>
+              </a:ext>
+            </a:extLst>
+          </p:cNvPr>
+          <p:cNvSpPr/>
+          <p:nvPr/>
+        </p:nvSpPr>
+        <p:spPr>
+          <a:xfrm>
+            <a:off x="1623251" y="752325"/>
+            <a:ext cx="180000" cy="180000"/>
+          </a:xfrm>
+          <a:prstGeom prst="ellipse">
+            <a:avLst/>
+          </a:prstGeom>
+          <a:ln>
+            <a:solidFill>
+              <a:schemeClr val="tx1"/>
+            </a:solidFill>
+          </a:ln>
+        </p:spPr>
+        <p:style>
+          <a:lnRef idx="2">
+            <a:schemeClr val="accent1">
+              <a:shade val="15000"/>
+            </a:schemeClr>
+          </a:lnRef>
+          <a:fillRef idx="1">
+            <a:schemeClr val="accent1"/>
+          </a:fillRef>
+          <a:effectRef idx="0">
+            <a:schemeClr val="accent1"/>
+          </a:effectRef>
+          <a:fontRef idx="minor">
+            <a:schemeClr val="lt1"/>
+          </a:fontRef>
+        </p:style>
+        <p:txBody>
+          <a:bodyPr rtlCol="0" anchor="ctr"/>
+          <a:lstStyle/>
+          <a:p>
+            <a:pPr algn="ctr"/>
+            <a:endParaRPr lang="it-IT"/>
+          </a:p>
+        </p:txBody>
+      </p:sp>
+      <p:sp>
+        <p:nvSpPr>
+          <p:cNvPr id="39" name="Ovale 38">
+            <a:extLst>
+              <a:ext uri="{FF2B5EF4-FFF2-40B4-BE49-F238E27FC236}">
+                <a16:creationId xmlns:a16="http://schemas.microsoft.com/office/drawing/2014/main" id="{0FA57FC2-0BC5-F4E3-544B-834772085799}"/>
+              </a:ext>
+            </a:extLst>
+          </p:cNvPr>
+          <p:cNvSpPr/>
+          <p:nvPr/>
+        </p:nvSpPr>
+        <p:spPr>
+          <a:xfrm>
+            <a:off x="1623251" y="1010732"/>
+            <a:ext cx="180000" cy="180000"/>
+          </a:xfrm>
+          <a:prstGeom prst="ellipse">
+            <a:avLst/>
+          </a:prstGeom>
+          <a:ln>
+            <a:solidFill>
+              <a:schemeClr val="tx1"/>
+            </a:solidFill>
+          </a:ln>
+        </p:spPr>
+        <p:style>
+          <a:lnRef idx="2">
+            <a:schemeClr val="accent1">
+              <a:shade val="15000"/>
+            </a:schemeClr>
+          </a:lnRef>
+          <a:fillRef idx="1">
+            <a:schemeClr val="accent1"/>
+          </a:fillRef>
+          <a:effectRef idx="0">
+            <a:schemeClr val="accent1"/>
+          </a:effectRef>
+          <a:fontRef idx="minor">
+            <a:schemeClr val="lt1"/>
+          </a:fontRef>
+        </p:style>
+        <p:txBody>
+          <a:bodyPr rtlCol="0" anchor="ctr"/>
+          <a:lstStyle/>
+          <a:p>
+            <a:pPr algn="ctr"/>
+            <a:endParaRPr lang="it-IT"/>
+          </a:p>
+        </p:txBody>
+      </p:sp>
+      <p:sp>
+        <p:nvSpPr>
+          <p:cNvPr id="43" name="Ovale 42">
+            <a:extLst>
+              <a:ext uri="{FF2B5EF4-FFF2-40B4-BE49-F238E27FC236}">
+                <a16:creationId xmlns:a16="http://schemas.microsoft.com/office/drawing/2014/main" id="{6EF5C3FD-2D6B-5B20-6BEF-519505AE00CA}"/>
+              </a:ext>
+            </a:extLst>
+          </p:cNvPr>
+          <p:cNvSpPr/>
+          <p:nvPr/>
+        </p:nvSpPr>
+        <p:spPr>
+          <a:xfrm>
+            <a:off x="1623251" y="1241257"/>
+            <a:ext cx="180000" cy="180000"/>
+          </a:xfrm>
+          <a:prstGeom prst="ellipse">
+            <a:avLst/>
+          </a:prstGeom>
+          <a:ln>
+            <a:solidFill>
+              <a:schemeClr val="tx1"/>
+            </a:solidFill>
+          </a:ln>
+        </p:spPr>
+        <p:style>
+          <a:lnRef idx="2">
+            <a:schemeClr val="accent1">
+              <a:shade val="15000"/>
+            </a:schemeClr>
+          </a:lnRef>
+          <a:fillRef idx="1">
+            <a:schemeClr val="accent1"/>
+          </a:fillRef>
+          <a:effectRef idx="0">
+            <a:schemeClr val="accent1"/>
+          </a:effectRef>
+          <a:fontRef idx="minor">
+            <a:schemeClr val="lt1"/>
+          </a:fontRef>
+        </p:style>
+        <p:txBody>
+          <a:bodyPr rtlCol="0" anchor="ctr"/>
+          <a:lstStyle/>
+          <a:p>
+            <a:pPr algn="ctr"/>
+            <a:endParaRPr lang="it-IT"/>
+          </a:p>
+        </p:txBody>
+      </p:sp>
+      <p:sp>
+        <p:nvSpPr>
+          <p:cNvPr id="58" name="Ovale 57">
+            <a:extLst>
+              <a:ext uri="{FF2B5EF4-FFF2-40B4-BE49-F238E27FC236}">
+                <a16:creationId xmlns:a16="http://schemas.microsoft.com/office/drawing/2014/main" id="{2FF8E1AD-477B-B7DC-8D9A-7BE106039811}"/>
+              </a:ext>
+            </a:extLst>
+          </p:cNvPr>
+          <p:cNvSpPr/>
+          <p:nvPr/>
+        </p:nvSpPr>
+        <p:spPr>
+          <a:xfrm>
+            <a:off x="2108893" y="885997"/>
+            <a:ext cx="180000" cy="180000"/>
+          </a:xfrm>
+          <a:prstGeom prst="ellipse">
+            <a:avLst/>
+          </a:prstGeom>
+          <a:ln>
+            <a:solidFill>
+              <a:schemeClr val="tx1"/>
+            </a:solidFill>
+          </a:ln>
+        </p:spPr>
+        <p:style>
+          <a:lnRef idx="2">
+            <a:schemeClr val="accent1">
+              <a:shade val="15000"/>
+            </a:schemeClr>
+          </a:lnRef>
+          <a:fillRef idx="1">
+            <a:schemeClr val="accent1"/>
+          </a:fillRef>
+          <a:effectRef idx="0">
+            <a:schemeClr val="accent1"/>
+          </a:effectRef>
+          <a:fontRef idx="minor">
+            <a:schemeClr val="lt1"/>
+          </a:fontRef>
+        </p:style>
+        <p:txBody>
+          <a:bodyPr rtlCol="0" anchor="ctr"/>
+          <a:lstStyle/>
+          <a:p>
+            <a:pPr algn="ctr"/>
+            <a:endParaRPr lang="it-IT"/>
+          </a:p>
+        </p:txBody>
+      </p:sp>
+      <p:sp>
+        <p:nvSpPr>
+          <p:cNvPr id="59" name="Ovale 58">
+            <a:extLst>
+              <a:ext uri="{FF2B5EF4-FFF2-40B4-BE49-F238E27FC236}">
+                <a16:creationId xmlns:a16="http://schemas.microsoft.com/office/drawing/2014/main" id="{B1237167-182A-C512-D239-CBB916C99650}"/>
+              </a:ext>
+            </a:extLst>
+          </p:cNvPr>
+          <p:cNvSpPr/>
+          <p:nvPr/>
+        </p:nvSpPr>
+        <p:spPr>
+          <a:xfrm>
+            <a:off x="2102079" y="1126028"/>
+            <a:ext cx="180000" cy="180000"/>
+          </a:xfrm>
+          <a:prstGeom prst="ellipse">
+            <a:avLst/>
+          </a:prstGeom>
+          <a:ln>
+            <a:solidFill>
+              <a:schemeClr val="tx1"/>
+            </a:solidFill>
+          </a:ln>
+        </p:spPr>
+        <p:style>
+          <a:lnRef idx="2">
+            <a:schemeClr val="accent1">
+              <a:shade val="15000"/>
+            </a:schemeClr>
+          </a:lnRef>
+          <a:fillRef idx="1">
+            <a:schemeClr val="accent1"/>
+          </a:fillRef>
+          <a:effectRef idx="0">
+            <a:schemeClr val="accent1"/>
+          </a:effectRef>
+          <a:fontRef idx="minor">
+            <a:schemeClr val="lt1"/>
+          </a:fontRef>
+        </p:style>
+        <p:txBody>
+          <a:bodyPr rtlCol="0" anchor="ctr"/>
+          <a:lstStyle/>
+          <a:p>
+            <a:pPr algn="ctr"/>
+            <a:endParaRPr lang="it-IT"/>
+          </a:p>
+        </p:txBody>
+      </p:sp>
+      <p:sp>
+        <p:nvSpPr>
+          <p:cNvPr id="60" name="Ovale 59">
+            <a:extLst>
+              <a:ext uri="{FF2B5EF4-FFF2-40B4-BE49-F238E27FC236}">
+                <a16:creationId xmlns:a16="http://schemas.microsoft.com/office/drawing/2014/main" id="{6285E3A1-81E2-7395-C727-7908FF55DC73}"/>
+              </a:ext>
+            </a:extLst>
+          </p:cNvPr>
+          <p:cNvSpPr/>
+          <p:nvPr/>
+        </p:nvSpPr>
+        <p:spPr>
+          <a:xfrm>
+            <a:off x="2101167" y="1360315"/>
+            <a:ext cx="180000" cy="180000"/>
+          </a:xfrm>
+          <a:prstGeom prst="ellipse">
+            <a:avLst/>
+          </a:prstGeom>
+          <a:ln>
+            <a:solidFill>
+              <a:schemeClr val="tx1"/>
+            </a:solidFill>
+          </a:ln>
+        </p:spPr>
+        <p:style>
+          <a:lnRef idx="2">
+            <a:schemeClr val="accent1">
+              <a:shade val="15000"/>
+            </a:schemeClr>
+          </a:lnRef>
+          <a:fillRef idx="1">
+            <a:schemeClr val="accent1"/>
+          </a:fillRef>
+          <a:effectRef idx="0">
+            <a:schemeClr val="accent1"/>
+          </a:effectRef>
+          <a:fontRef idx="minor">
+            <a:schemeClr val="lt1"/>
+          </a:fontRef>
+        </p:style>
+        <p:txBody>
+          <a:bodyPr rtlCol="0" anchor="ctr"/>
+          <a:lstStyle/>
+          <a:p>
+            <a:pPr algn="ctr"/>
+            <a:endParaRPr lang="it-IT"/>
+          </a:p>
+        </p:txBody>
+      </p:sp>
+      <p:sp>
+        <p:nvSpPr>
+          <p:cNvPr id="61" name="Ovale 60">
+            <a:extLst>
+              <a:ext uri="{FF2B5EF4-FFF2-40B4-BE49-F238E27FC236}">
+                <a16:creationId xmlns:a16="http://schemas.microsoft.com/office/drawing/2014/main" id="{B1E22940-0BC5-44DF-81E2-F142E4440CBF}"/>
+              </a:ext>
+            </a:extLst>
+          </p:cNvPr>
+          <p:cNvSpPr/>
+          <p:nvPr/>
+        </p:nvSpPr>
+        <p:spPr>
+          <a:xfrm>
+            <a:off x="2108893" y="645846"/>
+            <a:ext cx="180000" cy="180000"/>
+          </a:xfrm>
+          <a:prstGeom prst="ellipse">
+            <a:avLst/>
+          </a:prstGeom>
+          <a:ln>
+            <a:solidFill>
+              <a:schemeClr val="tx1"/>
+            </a:solidFill>
+          </a:ln>
+        </p:spPr>
+        <p:style>
+          <a:lnRef idx="2">
+            <a:schemeClr val="accent1">
+              <a:shade val="15000"/>
+            </a:schemeClr>
+          </a:lnRef>
+          <a:fillRef idx="1">
+            <a:schemeClr val="accent1"/>
+          </a:fillRef>
+          <a:effectRef idx="0">
+            <a:schemeClr val="accent1"/>
+          </a:effectRef>
+          <a:fontRef idx="minor">
+            <a:schemeClr val="lt1"/>
+          </a:fontRef>
+        </p:style>
+        <p:txBody>
+          <a:bodyPr rtlCol="0" anchor="ctr"/>
+          <a:lstStyle/>
+          <a:p>
+            <a:pPr algn="ctr"/>
+            <a:endParaRPr lang="it-IT"/>
+          </a:p>
+        </p:txBody>
+      </p:sp>
+      <p:sp>
+        <p:nvSpPr>
+          <p:cNvPr id="66" name="Ovale 65">
+            <a:extLst>
+              <a:ext uri="{FF2B5EF4-FFF2-40B4-BE49-F238E27FC236}">
+                <a16:creationId xmlns:a16="http://schemas.microsoft.com/office/drawing/2014/main" id="{1F57BA00-62F4-193D-E73F-827C49852ABB}"/>
+              </a:ext>
+            </a:extLst>
+          </p:cNvPr>
+          <p:cNvSpPr/>
+          <p:nvPr/>
+        </p:nvSpPr>
+        <p:spPr>
+          <a:xfrm>
+            <a:off x="2850740" y="999877"/>
+            <a:ext cx="180000" cy="180000"/>
+          </a:xfrm>
+          <a:prstGeom prst="ellipse">
+            <a:avLst/>
+          </a:prstGeom>
+          <a:ln>
+            <a:solidFill>
+              <a:schemeClr val="tx1"/>
+            </a:solidFill>
+          </a:ln>
+        </p:spPr>
+        <p:style>
+          <a:lnRef idx="2">
+            <a:schemeClr val="accent1">
+              <a:shade val="15000"/>
+            </a:schemeClr>
+          </a:lnRef>
+          <a:fillRef idx="1">
+            <a:schemeClr val="accent1"/>
+          </a:fillRef>
+          <a:effectRef idx="0">
+            <a:schemeClr val="accent1"/>
+          </a:effectRef>
+          <a:fontRef idx="minor">
+            <a:schemeClr val="lt1"/>
+          </a:fontRef>
+        </p:style>
+        <p:txBody>
+          <a:bodyPr rtlCol="0" anchor="ctr"/>
+          <a:lstStyle/>
+          <a:p>
+            <a:pPr algn="ctr"/>
+            <a:endParaRPr lang="it-IT"/>
+          </a:p>
+        </p:txBody>
+      </p:sp>
+      <p:sp>
+        <p:nvSpPr>
+          <p:cNvPr id="67" name="Ovale 66">
+            <a:extLst>
+              <a:ext uri="{FF2B5EF4-FFF2-40B4-BE49-F238E27FC236}">
+                <a16:creationId xmlns:a16="http://schemas.microsoft.com/office/drawing/2014/main" id="{B4242FB7-0293-E576-A214-4B82A9B0F11C}"/>
+              </a:ext>
+            </a:extLst>
+          </p:cNvPr>
+          <p:cNvSpPr/>
+          <p:nvPr/>
+        </p:nvSpPr>
+        <p:spPr>
+          <a:xfrm>
+            <a:off x="2505279" y="754950"/>
+            <a:ext cx="180000" cy="180000"/>
+          </a:xfrm>
+          <a:prstGeom prst="ellipse">
+            <a:avLst/>
+          </a:prstGeom>
+          <a:ln>
+            <a:solidFill>
+              <a:schemeClr val="tx1"/>
+            </a:solidFill>
+          </a:ln>
+        </p:spPr>
+        <p:style>
+          <a:lnRef idx="2">
+            <a:schemeClr val="accent1">
+              <a:shade val="15000"/>
+            </a:schemeClr>
+          </a:lnRef>
+          <a:fillRef idx="1">
+            <a:schemeClr val="accent1"/>
+          </a:fillRef>
+          <a:effectRef idx="0">
+            <a:schemeClr val="accent1"/>
+          </a:effectRef>
+          <a:fontRef idx="minor">
+            <a:schemeClr val="lt1"/>
+          </a:fontRef>
+        </p:style>
+        <p:txBody>
+          <a:bodyPr rtlCol="0" anchor="ctr"/>
+          <a:lstStyle/>
+          <a:p>
+            <a:pPr algn="ctr"/>
+            <a:endParaRPr lang="it-IT"/>
+          </a:p>
+        </p:txBody>
+      </p:sp>
+      <p:sp>
+        <p:nvSpPr>
+          <p:cNvPr id="68" name="Ovale 67">
+            <a:extLst>
+              <a:ext uri="{FF2B5EF4-FFF2-40B4-BE49-F238E27FC236}">
+                <a16:creationId xmlns:a16="http://schemas.microsoft.com/office/drawing/2014/main" id="{144F964E-4EB2-B405-0133-AB77B7FA766A}"/>
+              </a:ext>
+            </a:extLst>
+          </p:cNvPr>
+          <p:cNvSpPr/>
+          <p:nvPr/>
+        </p:nvSpPr>
+        <p:spPr>
+          <a:xfrm>
+            <a:off x="2501469" y="1017167"/>
+            <a:ext cx="180000" cy="180000"/>
+          </a:xfrm>
+          <a:prstGeom prst="ellipse">
+            <a:avLst/>
+          </a:prstGeom>
+          <a:ln>
+            <a:solidFill>
+              <a:schemeClr val="tx1"/>
+            </a:solidFill>
+          </a:ln>
+        </p:spPr>
+        <p:style>
+          <a:lnRef idx="2">
+            <a:schemeClr val="accent1">
+              <a:shade val="15000"/>
+            </a:schemeClr>
+          </a:lnRef>
+          <a:fillRef idx="1">
+            <a:schemeClr val="accent1"/>
+          </a:fillRef>
+          <a:effectRef idx="0">
+            <a:schemeClr val="accent1"/>
+          </a:effectRef>
+          <a:fontRef idx="minor">
+            <a:schemeClr val="lt1"/>
+          </a:fontRef>
+        </p:style>
+        <p:txBody>
+          <a:bodyPr rtlCol="0" anchor="ctr"/>
+          <a:lstStyle/>
+          <a:p>
+            <a:pPr algn="ctr"/>
+            <a:endParaRPr lang="it-IT"/>
+          </a:p>
+        </p:txBody>
+      </p:sp>
+      <p:sp>
+        <p:nvSpPr>
+          <p:cNvPr id="69" name="Ovale 68">
+            <a:extLst>
+              <a:ext uri="{FF2B5EF4-FFF2-40B4-BE49-F238E27FC236}">
+                <a16:creationId xmlns:a16="http://schemas.microsoft.com/office/drawing/2014/main" id="{25E35D3D-AE57-4B05-BABF-5332F26FD78C}"/>
+              </a:ext>
+            </a:extLst>
+          </p:cNvPr>
+          <p:cNvSpPr/>
+          <p:nvPr/>
+        </p:nvSpPr>
+        <p:spPr>
+          <a:xfrm>
+            <a:off x="2504009" y="1240072"/>
+            <a:ext cx="180000" cy="180000"/>
+          </a:xfrm>
+          <a:prstGeom prst="ellipse">
+            <a:avLst/>
+          </a:prstGeom>
+          <a:ln>
+            <a:solidFill>
+              <a:schemeClr val="tx1"/>
+            </a:solidFill>
+          </a:ln>
+        </p:spPr>
+        <p:style>
+          <a:lnRef idx="2">
+            <a:schemeClr val="accent1">
+              <a:shade val="15000"/>
+            </a:schemeClr>
+          </a:lnRef>
+          <a:fillRef idx="1">
+            <a:schemeClr val="accent1"/>
+          </a:fillRef>
+          <a:effectRef idx="0">
+            <a:schemeClr val="accent1"/>
+          </a:effectRef>
+          <a:fontRef idx="minor">
+            <a:schemeClr val="lt1"/>
+          </a:fontRef>
+        </p:style>
+        <p:txBody>
+          <a:bodyPr rtlCol="0" anchor="ctr"/>
+          <a:lstStyle/>
+          <a:p>
+            <a:pPr algn="ctr"/>
+            <a:endParaRPr lang="it-IT"/>
+          </a:p>
+        </p:txBody>
+      </p:sp>
     </p:spTree>
     <p:extLst>
       <p:ext uri="{BB962C8B-B14F-4D97-AF65-F5344CB8AC3E}">
@@ -10334,7 +12907,7 @@
                             </p:stCondLst>
                             <p:childTnLst>
                               <p:par>
-                                <p:cTn id="13" presetID="10" presetClass="entr" presetSubtype="0" fill="hold" nodeType="clickEffect">
+                                <p:cTn id="13" presetID="22" presetClass="entr" presetSubtype="8" fill="hold" grpId="0" nodeType="clickEffect">
                                   <p:stCondLst>
                                     <p:cond delay="0"/>
                                   </p:stCondLst>
@@ -10342,6 +12915,409 @@
                                     <p:set>
                                       <p:cBhvr>
                                         <p:cTn id="14" dur="1" fill="hold">
+                                          <p:stCondLst>
+                                            <p:cond delay="0"/>
+                                          </p:stCondLst>
+                                        </p:cTn>
+                                        <p:tgtEl>
+                                          <p:spTgt spid="38"/>
+                                        </p:tgtEl>
+                                        <p:attrNameLst>
+                                          <p:attrName>style.visibility</p:attrName>
+                                        </p:attrNameLst>
+                                      </p:cBhvr>
+                                      <p:to>
+                                        <p:strVal val="visible"/>
+                                      </p:to>
+                                    </p:set>
+                                    <p:animEffect transition="in" filter="wipe(left)">
+                                      <p:cBhvr>
+                                        <p:cTn id="15" dur="500"/>
+                                        <p:tgtEl>
+                                          <p:spTgt spid="38"/>
+                                        </p:tgtEl>
+                                      </p:cBhvr>
+                                    </p:animEffect>
+                                  </p:childTnLst>
+                                </p:cTn>
+                              </p:par>
+                              <p:par>
+                                <p:cTn id="16" presetID="22" presetClass="entr" presetSubtype="8" fill="hold" grpId="0" nodeType="withEffect">
+                                  <p:stCondLst>
+                                    <p:cond delay="0"/>
+                                  </p:stCondLst>
+                                  <p:childTnLst>
+                                    <p:set>
+                                      <p:cBhvr>
+                                        <p:cTn id="17" dur="1" fill="hold">
+                                          <p:stCondLst>
+                                            <p:cond delay="0"/>
+                                          </p:stCondLst>
+                                        </p:cTn>
+                                        <p:tgtEl>
+                                          <p:spTgt spid="39"/>
+                                        </p:tgtEl>
+                                        <p:attrNameLst>
+                                          <p:attrName>style.visibility</p:attrName>
+                                        </p:attrNameLst>
+                                      </p:cBhvr>
+                                      <p:to>
+                                        <p:strVal val="visible"/>
+                                      </p:to>
+                                    </p:set>
+                                    <p:animEffect transition="in" filter="wipe(left)">
+                                      <p:cBhvr>
+                                        <p:cTn id="18" dur="500"/>
+                                        <p:tgtEl>
+                                          <p:spTgt spid="39"/>
+                                        </p:tgtEl>
+                                      </p:cBhvr>
+                                    </p:animEffect>
+                                  </p:childTnLst>
+                                </p:cTn>
+                              </p:par>
+                              <p:par>
+                                <p:cTn id="19" presetID="22" presetClass="entr" presetSubtype="8" fill="hold" grpId="0" nodeType="withEffect">
+                                  <p:stCondLst>
+                                    <p:cond delay="0"/>
+                                  </p:stCondLst>
+                                  <p:childTnLst>
+                                    <p:set>
+                                      <p:cBhvr>
+                                        <p:cTn id="20" dur="1" fill="hold">
+                                          <p:stCondLst>
+                                            <p:cond delay="0"/>
+                                          </p:stCondLst>
+                                        </p:cTn>
+                                        <p:tgtEl>
+                                          <p:spTgt spid="43"/>
+                                        </p:tgtEl>
+                                        <p:attrNameLst>
+                                          <p:attrName>style.visibility</p:attrName>
+                                        </p:attrNameLst>
+                                      </p:cBhvr>
+                                      <p:to>
+                                        <p:strVal val="visible"/>
+                                      </p:to>
+                                    </p:set>
+                                    <p:animEffect transition="in" filter="wipe(left)">
+                                      <p:cBhvr>
+                                        <p:cTn id="21" dur="500"/>
+                                        <p:tgtEl>
+                                          <p:spTgt spid="43"/>
+                                        </p:tgtEl>
+                                      </p:cBhvr>
+                                    </p:animEffect>
+                                  </p:childTnLst>
+                                </p:cTn>
+                              </p:par>
+                              <p:par>
+                                <p:cTn id="22" presetID="22" presetClass="entr" presetSubtype="8" fill="hold" grpId="0" nodeType="withEffect">
+                                  <p:stCondLst>
+                                    <p:cond delay="0"/>
+                                  </p:stCondLst>
+                                  <p:childTnLst>
+                                    <p:set>
+                                      <p:cBhvr>
+                                        <p:cTn id="23" dur="1" fill="hold">
+                                          <p:stCondLst>
+                                            <p:cond delay="0"/>
+                                          </p:stCondLst>
+                                        </p:cTn>
+                                        <p:tgtEl>
+                                          <p:spTgt spid="60"/>
+                                        </p:tgtEl>
+                                        <p:attrNameLst>
+                                          <p:attrName>style.visibility</p:attrName>
+                                        </p:attrNameLst>
+                                      </p:cBhvr>
+                                      <p:to>
+                                        <p:strVal val="visible"/>
+                                      </p:to>
+                                    </p:set>
+                                    <p:animEffect transition="in" filter="wipe(left)">
+                                      <p:cBhvr>
+                                        <p:cTn id="24" dur="500"/>
+                                        <p:tgtEl>
+                                          <p:spTgt spid="60"/>
+                                        </p:tgtEl>
+                                      </p:cBhvr>
+                                    </p:animEffect>
+                                  </p:childTnLst>
+                                </p:cTn>
+                              </p:par>
+                              <p:par>
+                                <p:cTn id="25" presetID="22" presetClass="entr" presetSubtype="8" fill="hold" grpId="0" nodeType="withEffect">
+                                  <p:stCondLst>
+                                    <p:cond delay="0"/>
+                                  </p:stCondLst>
+                                  <p:childTnLst>
+                                    <p:set>
+                                      <p:cBhvr>
+                                        <p:cTn id="26" dur="1" fill="hold">
+                                          <p:stCondLst>
+                                            <p:cond delay="0"/>
+                                          </p:stCondLst>
+                                        </p:cTn>
+                                        <p:tgtEl>
+                                          <p:spTgt spid="59"/>
+                                        </p:tgtEl>
+                                        <p:attrNameLst>
+                                          <p:attrName>style.visibility</p:attrName>
+                                        </p:attrNameLst>
+                                      </p:cBhvr>
+                                      <p:to>
+                                        <p:strVal val="visible"/>
+                                      </p:to>
+                                    </p:set>
+                                    <p:animEffect transition="in" filter="wipe(left)">
+                                      <p:cBhvr>
+                                        <p:cTn id="27" dur="500"/>
+                                        <p:tgtEl>
+                                          <p:spTgt spid="59"/>
+                                        </p:tgtEl>
+                                      </p:cBhvr>
+                                    </p:animEffect>
+                                  </p:childTnLst>
+                                </p:cTn>
+                              </p:par>
+                              <p:par>
+                                <p:cTn id="28" presetID="22" presetClass="entr" presetSubtype="8" fill="hold" grpId="0" nodeType="withEffect">
+                                  <p:stCondLst>
+                                    <p:cond delay="0"/>
+                                  </p:stCondLst>
+                                  <p:childTnLst>
+                                    <p:set>
+                                      <p:cBhvr>
+                                        <p:cTn id="29" dur="1" fill="hold">
+                                          <p:stCondLst>
+                                            <p:cond delay="0"/>
+                                          </p:stCondLst>
+                                        </p:cTn>
+                                        <p:tgtEl>
+                                          <p:spTgt spid="58"/>
+                                        </p:tgtEl>
+                                        <p:attrNameLst>
+                                          <p:attrName>style.visibility</p:attrName>
+                                        </p:attrNameLst>
+                                      </p:cBhvr>
+                                      <p:to>
+                                        <p:strVal val="visible"/>
+                                      </p:to>
+                                    </p:set>
+                                    <p:animEffect transition="in" filter="wipe(left)">
+                                      <p:cBhvr>
+                                        <p:cTn id="30" dur="500"/>
+                                        <p:tgtEl>
+                                          <p:spTgt spid="58"/>
+                                        </p:tgtEl>
+                                      </p:cBhvr>
+                                    </p:animEffect>
+                                  </p:childTnLst>
+                                </p:cTn>
+                              </p:par>
+                              <p:par>
+                                <p:cTn id="31" presetID="22" presetClass="entr" presetSubtype="8" fill="hold" grpId="0" nodeType="withEffect">
+                                  <p:stCondLst>
+                                    <p:cond delay="0"/>
+                                  </p:stCondLst>
+                                  <p:childTnLst>
+                                    <p:set>
+                                      <p:cBhvr>
+                                        <p:cTn id="32" dur="1" fill="hold">
+                                          <p:stCondLst>
+                                            <p:cond delay="0"/>
+                                          </p:stCondLst>
+                                        </p:cTn>
+                                        <p:tgtEl>
+                                          <p:spTgt spid="61"/>
+                                        </p:tgtEl>
+                                        <p:attrNameLst>
+                                          <p:attrName>style.visibility</p:attrName>
+                                        </p:attrNameLst>
+                                      </p:cBhvr>
+                                      <p:to>
+                                        <p:strVal val="visible"/>
+                                      </p:to>
+                                    </p:set>
+                                    <p:animEffect transition="in" filter="wipe(left)">
+                                      <p:cBhvr>
+                                        <p:cTn id="33" dur="500"/>
+                                        <p:tgtEl>
+                                          <p:spTgt spid="61"/>
+                                        </p:tgtEl>
+                                      </p:cBhvr>
+                                    </p:animEffect>
+                                  </p:childTnLst>
+                                </p:cTn>
+                              </p:par>
+                              <p:par>
+                                <p:cTn id="34" presetID="22" presetClass="entr" presetSubtype="8" fill="hold" grpId="0" nodeType="withEffect">
+                                  <p:stCondLst>
+                                    <p:cond delay="0"/>
+                                  </p:stCondLst>
+                                  <p:childTnLst>
+                                    <p:set>
+                                      <p:cBhvr>
+                                        <p:cTn id="35" dur="1" fill="hold">
+                                          <p:stCondLst>
+                                            <p:cond delay="0"/>
+                                          </p:stCondLst>
+                                        </p:cTn>
+                                        <p:tgtEl>
+                                          <p:spTgt spid="67"/>
+                                        </p:tgtEl>
+                                        <p:attrNameLst>
+                                          <p:attrName>style.visibility</p:attrName>
+                                        </p:attrNameLst>
+                                      </p:cBhvr>
+                                      <p:to>
+                                        <p:strVal val="visible"/>
+                                      </p:to>
+                                    </p:set>
+                                    <p:animEffect transition="in" filter="wipe(left)">
+                                      <p:cBhvr>
+                                        <p:cTn id="36" dur="500"/>
+                                        <p:tgtEl>
+                                          <p:spTgt spid="67"/>
+                                        </p:tgtEl>
+                                      </p:cBhvr>
+                                    </p:animEffect>
+                                  </p:childTnLst>
+                                </p:cTn>
+                              </p:par>
+                              <p:par>
+                                <p:cTn id="37" presetID="22" presetClass="entr" presetSubtype="8" fill="hold" grpId="0" nodeType="withEffect">
+                                  <p:stCondLst>
+                                    <p:cond delay="0"/>
+                                  </p:stCondLst>
+                                  <p:childTnLst>
+                                    <p:set>
+                                      <p:cBhvr>
+                                        <p:cTn id="38" dur="1" fill="hold">
+                                          <p:stCondLst>
+                                            <p:cond delay="0"/>
+                                          </p:stCondLst>
+                                        </p:cTn>
+                                        <p:tgtEl>
+                                          <p:spTgt spid="68"/>
+                                        </p:tgtEl>
+                                        <p:attrNameLst>
+                                          <p:attrName>style.visibility</p:attrName>
+                                        </p:attrNameLst>
+                                      </p:cBhvr>
+                                      <p:to>
+                                        <p:strVal val="visible"/>
+                                      </p:to>
+                                    </p:set>
+                                    <p:animEffect transition="in" filter="wipe(left)">
+                                      <p:cBhvr>
+                                        <p:cTn id="39" dur="500"/>
+                                        <p:tgtEl>
+                                          <p:spTgt spid="68"/>
+                                        </p:tgtEl>
+                                      </p:cBhvr>
+                                    </p:animEffect>
+                                  </p:childTnLst>
+                                </p:cTn>
+                              </p:par>
+                              <p:par>
+                                <p:cTn id="40" presetID="22" presetClass="entr" presetSubtype="8" fill="hold" grpId="0" nodeType="withEffect">
+                                  <p:stCondLst>
+                                    <p:cond delay="0"/>
+                                  </p:stCondLst>
+                                  <p:childTnLst>
+                                    <p:set>
+                                      <p:cBhvr>
+                                        <p:cTn id="41" dur="1" fill="hold">
+                                          <p:stCondLst>
+                                            <p:cond delay="0"/>
+                                          </p:stCondLst>
+                                        </p:cTn>
+                                        <p:tgtEl>
+                                          <p:spTgt spid="69"/>
+                                        </p:tgtEl>
+                                        <p:attrNameLst>
+                                          <p:attrName>style.visibility</p:attrName>
+                                        </p:attrNameLst>
+                                      </p:cBhvr>
+                                      <p:to>
+                                        <p:strVal val="visible"/>
+                                      </p:to>
+                                    </p:set>
+                                    <p:animEffect transition="in" filter="wipe(left)">
+                                      <p:cBhvr>
+                                        <p:cTn id="42" dur="500"/>
+                                        <p:tgtEl>
+                                          <p:spTgt spid="69"/>
+                                        </p:tgtEl>
+                                      </p:cBhvr>
+                                    </p:animEffect>
+                                  </p:childTnLst>
+                                </p:cTn>
+                              </p:par>
+                              <p:par>
+                                <p:cTn id="43" presetID="22" presetClass="entr" presetSubtype="8" fill="hold" grpId="0" nodeType="withEffect">
+                                  <p:stCondLst>
+                                    <p:cond delay="0"/>
+                                  </p:stCondLst>
+                                  <p:childTnLst>
+                                    <p:set>
+                                      <p:cBhvr>
+                                        <p:cTn id="44" dur="1" fill="hold">
+                                          <p:stCondLst>
+                                            <p:cond delay="0"/>
+                                          </p:stCondLst>
+                                        </p:cTn>
+                                        <p:tgtEl>
+                                          <p:spTgt spid="66"/>
+                                        </p:tgtEl>
+                                        <p:attrNameLst>
+                                          <p:attrName>style.visibility</p:attrName>
+                                        </p:attrNameLst>
+                                      </p:cBhvr>
+                                      <p:to>
+                                        <p:strVal val="visible"/>
+                                      </p:to>
+                                    </p:set>
+                                    <p:animEffect transition="in" filter="wipe(left)">
+                                      <p:cBhvr>
+                                        <p:cTn id="45" dur="500"/>
+                                        <p:tgtEl>
+                                          <p:spTgt spid="66"/>
+                                        </p:tgtEl>
+                                      </p:cBhvr>
+                                    </p:animEffect>
+                                  </p:childTnLst>
+                                </p:cTn>
+                              </p:par>
+                            </p:childTnLst>
+                          </p:cTn>
+                        </p:par>
+                      </p:childTnLst>
+                    </p:cTn>
+                  </p:par>
+                  <p:par>
+                    <p:cTn id="46" fill="hold">
+                      <p:stCondLst>
+                        <p:cond delay="indefinite"/>
+                      </p:stCondLst>
+                      <p:childTnLst>
+                        <p:par>
+                          <p:cTn id="47" fill="hold">
+                            <p:stCondLst>
+                              <p:cond delay="0"/>
+                            </p:stCondLst>
+                            <p:childTnLst>
+                              <p:par>
+                                <p:cTn id="48" presetID="10" presetClass="entr" presetSubtype="0" fill="hold" nodeType="clickEffect">
+                                  <p:stCondLst>
+                                    <p:cond delay="0"/>
+                                  </p:stCondLst>
+                                  <p:childTnLst>
+                                    <p:set>
+                                      <p:cBhvr>
+                                        <p:cTn id="49" dur="1" fill="hold">
                                           <p:stCondLst>
                                             <p:cond delay="0"/>
                                           </p:stCondLst>
@@ -10359,7 +13335,7 @@
                                     </p:set>
                                     <p:animEffect transition="in" filter="fade">
                                       <p:cBhvr>
-                                        <p:cTn id="15" dur="500"/>
+                                        <p:cTn id="50" dur="500"/>
                                         <p:tgtEl>
                                           <p:spTgt spid="49"/>
                                         </p:tgtEl>
@@ -10369,14 +13345,14 @@
                                 </p:cTn>
                               </p:par>
                               <p:par>
-                                <p:cTn id="16" presetID="10" presetClass="entr" presetSubtype="0" fill="hold" nodeType="withEffect">
+                                <p:cTn id="51" presetID="10" presetClass="entr" presetSubtype="0" fill="hold" nodeType="withEffect">
                                   <p:stCondLst>
                                     <p:cond delay="0"/>
                                   </p:stCondLst>
                                   <p:childTnLst>
                                     <p:set>
                                       <p:cBhvr>
-                                        <p:cTn id="17" dur="1" fill="hold">
+                                        <p:cTn id="52" dur="1" fill="hold">
                                           <p:stCondLst>
                                             <p:cond delay="0"/>
                                           </p:stCondLst>
@@ -10394,7 +13370,7 @@
                                     </p:set>
                                     <p:animEffect transition="in" filter="fade">
                                       <p:cBhvr>
-                                        <p:cTn id="18" dur="500"/>
+                                        <p:cTn id="53" dur="500"/>
                                         <p:tgtEl>
                                           <p:spTgt spid="52"/>
                                         </p:tgtEl>
@@ -10404,14 +13380,14 @@
                                 </p:cTn>
                               </p:par>
                               <p:par>
-                                <p:cTn id="19" presetID="10" presetClass="entr" presetSubtype="0" fill="hold" grpId="0" nodeType="withEffect">
+                                <p:cTn id="54" presetID="10" presetClass="entr" presetSubtype="0" fill="hold" grpId="0" nodeType="withEffect">
                                   <p:stCondLst>
                                     <p:cond delay="0"/>
                                   </p:stCondLst>
                                   <p:childTnLst>
                                     <p:set>
                                       <p:cBhvr>
-                                        <p:cTn id="20" dur="1" fill="hold">
+                                        <p:cTn id="55" dur="1" fill="hold">
                                           <p:stCondLst>
                                             <p:cond delay="0"/>
                                           </p:stCondLst>
@@ -10429,7 +13405,7 @@
                                     </p:set>
                                     <p:animEffect transition="in" filter="fade">
                                       <p:cBhvr>
-                                        <p:cTn id="21" dur="500"/>
+                                        <p:cTn id="56" dur="500"/>
                                         <p:tgtEl>
                                           <p:spTgt spid="54"/>
                                         </p:tgtEl>
@@ -10439,14 +13415,14 @@
                                 </p:cTn>
                               </p:par>
                               <p:par>
-                                <p:cTn id="22" presetID="10" presetClass="entr" presetSubtype="0" fill="hold" grpId="0" nodeType="withEffect">
+                                <p:cTn id="57" presetID="10" presetClass="entr" presetSubtype="0" fill="hold" grpId="0" nodeType="withEffect">
                                   <p:stCondLst>
                                     <p:cond delay="0"/>
                                   </p:stCondLst>
                                   <p:childTnLst>
                                     <p:set>
                                       <p:cBhvr>
-                                        <p:cTn id="23" dur="1" fill="hold">
+                                        <p:cTn id="58" dur="1" fill="hold">
                                           <p:stCondLst>
                                             <p:cond delay="0"/>
                                           </p:stCondLst>
@@ -10464,7 +13440,7 @@
                                     </p:set>
                                     <p:animEffect transition="in" filter="fade">
                                       <p:cBhvr>
-                                        <p:cTn id="24" dur="500"/>
+                                        <p:cTn id="59" dur="500"/>
                                         <p:tgtEl>
                                           <p:spTgt spid="55"/>
                                         </p:tgtEl>
@@ -10480,26 +13456,26 @@
                     </p:cTn>
                   </p:par>
                   <p:par>
-                    <p:cTn id="25" fill="hold">
+                    <p:cTn id="60" fill="hold">
                       <p:stCondLst>
                         <p:cond delay="indefinite"/>
                       </p:stCondLst>
                       <p:childTnLst>
                         <p:par>
-                          <p:cTn id="26" fill="hold">
+                          <p:cTn id="61" fill="hold">
                             <p:stCondLst>
                               <p:cond delay="0"/>
                             </p:stCondLst>
                             <p:childTnLst>
                               <p:par>
-                                <p:cTn id="27" presetID="10" presetClass="entr" presetSubtype="0" fill="hold" grpId="0" nodeType="clickEffect">
+                                <p:cTn id="62" presetID="10" presetClass="entr" presetSubtype="0" fill="hold" grpId="0" nodeType="clickEffect">
                                   <p:stCondLst>
                                     <p:cond delay="0"/>
                                   </p:stCondLst>
                                   <p:childTnLst>
                                     <p:set>
                                       <p:cBhvr>
-                                        <p:cTn id="28" dur="1" fill="hold">
+                                        <p:cTn id="63" dur="1" fill="hold">
                                           <p:stCondLst>
                                             <p:cond delay="0"/>
                                           </p:stCondLst>
@@ -10517,7 +13493,7 @@
                                     </p:set>
                                     <p:animEffect transition="in" filter="fade">
                                       <p:cBhvr>
-                                        <p:cTn id="29" dur="500"/>
+                                        <p:cTn id="64" dur="500"/>
                                         <p:tgtEl>
                                           <p:spTgt spid="2"/>
                                         </p:tgtEl>
@@ -10527,14 +13503,14 @@
                                 </p:cTn>
                               </p:par>
                               <p:par>
-                                <p:cTn id="30" presetID="10" presetClass="entr" presetSubtype="0" fill="hold" grpId="0" nodeType="withEffect">
+                                <p:cTn id="65" presetID="10" presetClass="entr" presetSubtype="0" fill="hold" grpId="0" nodeType="withEffect">
                                   <p:stCondLst>
                                     <p:cond delay="0"/>
                                   </p:stCondLst>
                                   <p:childTnLst>
                                     <p:set>
                                       <p:cBhvr>
-                                        <p:cTn id="31" dur="1" fill="hold">
+                                        <p:cTn id="66" dur="1" fill="hold">
                                           <p:stCondLst>
                                             <p:cond delay="0"/>
                                           </p:stCondLst>
@@ -10552,7 +13528,7 @@
                                     </p:set>
                                     <p:animEffect transition="in" filter="fade">
                                       <p:cBhvr>
-                                        <p:cTn id="32" dur="500"/>
+                                        <p:cTn id="67" dur="500"/>
                                         <p:tgtEl>
                                           <p:spTgt spid="22"/>
                                         </p:tgtEl>
@@ -10568,26 +13544,26 @@
                     </p:cTn>
                   </p:par>
                   <p:par>
-                    <p:cTn id="33" fill="hold">
+                    <p:cTn id="68" fill="hold">
                       <p:stCondLst>
                         <p:cond delay="indefinite"/>
                       </p:stCondLst>
                       <p:childTnLst>
                         <p:par>
-                          <p:cTn id="34" fill="hold">
+                          <p:cTn id="69" fill="hold">
                             <p:stCondLst>
                               <p:cond delay="0"/>
                             </p:stCondLst>
                             <p:childTnLst>
                               <p:par>
-                                <p:cTn id="35" presetID="10" presetClass="entr" presetSubtype="0" fill="hold" grpId="0" nodeType="clickEffect">
+                                <p:cTn id="70" presetID="10" presetClass="entr" presetSubtype="0" fill="hold" grpId="0" nodeType="clickEffect">
                                   <p:stCondLst>
                                     <p:cond delay="0"/>
                                   </p:stCondLst>
                                   <p:childTnLst>
                                     <p:set>
                                       <p:cBhvr>
-                                        <p:cTn id="36" dur="1" fill="hold">
+                                        <p:cTn id="71" dur="1" fill="hold">
                                           <p:stCondLst>
                                             <p:cond delay="0"/>
                                           </p:stCondLst>
@@ -10605,7 +13581,7 @@
                                     </p:set>
                                     <p:animEffect transition="in" filter="fade">
                                       <p:cBhvr>
-                                        <p:cTn id="37" dur="500"/>
+                                        <p:cTn id="72" dur="500"/>
                                         <p:tgtEl>
                                           <p:spTgt spid="5"/>
                                         </p:tgtEl>
@@ -10615,14 +13591,14 @@
                                 </p:cTn>
                               </p:par>
                               <p:par>
-                                <p:cTn id="38" presetID="10" presetClass="entr" presetSubtype="0" fill="hold" grpId="0" nodeType="withEffect">
+                                <p:cTn id="73" presetID="10" presetClass="entr" presetSubtype="0" fill="hold" grpId="0" nodeType="withEffect">
                                   <p:stCondLst>
                                     <p:cond delay="0"/>
                                   </p:stCondLst>
                                   <p:childTnLst>
                                     <p:set>
                                       <p:cBhvr>
-                                        <p:cTn id="39" dur="1" fill="hold">
+                                        <p:cTn id="74" dur="1" fill="hold">
                                           <p:stCondLst>
                                             <p:cond delay="0"/>
                                           </p:stCondLst>
@@ -10640,7 +13616,7 @@
                                     </p:set>
                                     <p:animEffect transition="in" filter="fade">
                                       <p:cBhvr>
-                                        <p:cTn id="40" dur="500"/>
+                                        <p:cTn id="75" dur="500"/>
                                         <p:tgtEl>
                                           <p:spTgt spid="20"/>
                                         </p:tgtEl>
@@ -10650,14 +13626,14 @@
                                 </p:cTn>
                               </p:par>
                               <p:par>
-                                <p:cTn id="41" presetID="10" presetClass="entr" presetSubtype="0" fill="hold" grpId="0" nodeType="withEffect">
+                                <p:cTn id="76" presetID="10" presetClass="entr" presetSubtype="0" fill="hold" grpId="0" nodeType="withEffect">
                                   <p:stCondLst>
                                     <p:cond delay="0"/>
                                   </p:stCondLst>
                                   <p:childTnLst>
                                     <p:set>
                                       <p:cBhvr>
-                                        <p:cTn id="42" dur="1" fill="hold">
+                                        <p:cTn id="77" dur="1" fill="hold">
                                           <p:stCondLst>
                                             <p:cond delay="0"/>
                                           </p:stCondLst>
@@ -10675,7 +13651,7 @@
                                     </p:set>
                                     <p:animEffect transition="in" filter="fade">
                                       <p:cBhvr>
-                                        <p:cTn id="43" dur="500"/>
+                                        <p:cTn id="78" dur="500"/>
                                         <p:tgtEl>
                                           <p:spTgt spid="48"/>
                                         </p:tgtEl>
@@ -10685,14 +13661,14 @@
                                 </p:cTn>
                               </p:par>
                               <p:par>
-                                <p:cTn id="44" presetID="10" presetClass="entr" presetSubtype="0" fill="hold" nodeType="withEffect">
+                                <p:cTn id="79" presetID="10" presetClass="entr" presetSubtype="0" fill="hold" nodeType="withEffect">
                                   <p:stCondLst>
                                     <p:cond delay="0"/>
                                   </p:stCondLst>
                                   <p:childTnLst>
                                     <p:set>
                                       <p:cBhvr>
-                                        <p:cTn id="45" dur="1" fill="hold">
+                                        <p:cTn id="80" dur="1" fill="hold">
                                           <p:stCondLst>
                                             <p:cond delay="0"/>
                                           </p:stCondLst>
@@ -10710,7 +13686,7 @@
                                     </p:set>
                                     <p:animEffect transition="in" filter="fade">
                                       <p:cBhvr>
-                                        <p:cTn id="46" dur="500"/>
+                                        <p:cTn id="81" dur="500"/>
                                         <p:tgtEl>
                                           <p:spTgt spid="6"/>
                                         </p:tgtEl>
@@ -10720,14 +13696,14 @@
                                 </p:cTn>
                               </p:par>
                               <p:par>
-                                <p:cTn id="47" presetID="10" presetClass="entr" presetSubtype="0" fill="hold" nodeType="withEffect">
+                                <p:cTn id="82" presetID="10" presetClass="entr" presetSubtype="0" fill="hold" nodeType="withEffect">
                                   <p:stCondLst>
                                     <p:cond delay="0"/>
                                   </p:stCondLst>
                                   <p:childTnLst>
                                     <p:set>
                                       <p:cBhvr>
-                                        <p:cTn id="48" dur="1" fill="hold">
+                                        <p:cTn id="83" dur="1" fill="hold">
                                           <p:stCondLst>
                                             <p:cond delay="0"/>
                                           </p:stCondLst>
@@ -10745,7 +13721,7 @@
                                     </p:set>
                                     <p:animEffect transition="in" filter="fade">
                                       <p:cBhvr>
-                                        <p:cTn id="49" dur="500"/>
+                                        <p:cTn id="84" dur="500"/>
                                         <p:tgtEl>
                                           <p:spTgt spid="7"/>
                                         </p:tgtEl>
@@ -10755,14 +13731,14 @@
                                 </p:cTn>
                               </p:par>
                               <p:par>
-                                <p:cTn id="50" presetID="10" presetClass="entr" presetSubtype="0" fill="hold" grpId="0" nodeType="withEffect">
+                                <p:cTn id="85" presetID="10" presetClass="entr" presetSubtype="0" fill="hold" grpId="0" nodeType="withEffect">
                                   <p:stCondLst>
                                     <p:cond delay="0"/>
                                   </p:stCondLst>
                                   <p:childTnLst>
                                     <p:set>
                                       <p:cBhvr>
-                                        <p:cTn id="51" dur="1" fill="hold">
+                                        <p:cTn id="86" dur="1" fill="hold">
                                           <p:stCondLst>
                                             <p:cond delay="0"/>
                                           </p:stCondLst>
@@ -10780,7 +13756,7 @@
                                     </p:set>
                                     <p:animEffect transition="in" filter="fade">
                                       <p:cBhvr>
-                                        <p:cTn id="52" dur="500"/>
+                                        <p:cTn id="87" dur="500"/>
                                         <p:tgtEl>
                                           <p:spTgt spid="19"/>
                                         </p:tgtEl>
@@ -10790,14 +13766,14 @@
                                 </p:cTn>
                               </p:par>
                               <p:par>
-                                <p:cTn id="53" presetID="10" presetClass="entr" presetSubtype="0" fill="hold" grpId="0" nodeType="withEffect">
+                                <p:cTn id="88" presetID="10" presetClass="entr" presetSubtype="0" fill="hold" grpId="0" nodeType="withEffect">
                                   <p:stCondLst>
                                     <p:cond delay="0"/>
                                   </p:stCondLst>
                                   <p:childTnLst>
                                     <p:set>
                                       <p:cBhvr>
-                                        <p:cTn id="54" dur="1" fill="hold">
+                                        <p:cTn id="89" dur="1" fill="hold">
                                           <p:stCondLst>
                                             <p:cond delay="0"/>
                                           </p:stCondLst>
@@ -10815,7 +13791,7 @@
                                     </p:set>
                                     <p:animEffect transition="in" filter="fade">
                                       <p:cBhvr>
-                                        <p:cTn id="55" dur="500"/>
+                                        <p:cTn id="90" dur="500"/>
                                         <p:tgtEl>
                                           <p:spTgt spid="3"/>
                                         </p:tgtEl>
@@ -10831,26 +13807,26 @@
                     </p:cTn>
                   </p:par>
                   <p:par>
-                    <p:cTn id="56" fill="hold">
+                    <p:cTn id="91" fill="hold">
                       <p:stCondLst>
                         <p:cond delay="indefinite"/>
                       </p:stCondLst>
                       <p:childTnLst>
                         <p:par>
-                          <p:cTn id="57" fill="hold">
+                          <p:cTn id="92" fill="hold">
                             <p:stCondLst>
                               <p:cond delay="0"/>
                             </p:stCondLst>
                             <p:childTnLst>
                               <p:par>
-                                <p:cTn id="58" presetID="10" presetClass="entr" presetSubtype="0" fill="hold" grpId="0" nodeType="clickEffect">
+                                <p:cTn id="93" presetID="10" presetClass="entr" presetSubtype="0" fill="hold" grpId="0" nodeType="clickEffect">
                                   <p:stCondLst>
                                     <p:cond delay="0"/>
                                   </p:stCondLst>
                                   <p:childTnLst>
                                     <p:set>
                                       <p:cBhvr>
-                                        <p:cTn id="59" dur="1" fill="hold">
+                                        <p:cTn id="94" dur="1" fill="hold">
                                           <p:stCondLst>
                                             <p:cond delay="0"/>
                                           </p:stCondLst>
@@ -10868,7 +13844,7 @@
                                     </p:set>
                                     <p:animEffect transition="in" filter="fade">
                                       <p:cBhvr>
-                                        <p:cTn id="60" dur="500"/>
+                                        <p:cTn id="95" dur="500"/>
                                         <p:tgtEl>
                                           <p:spTgt spid="17"/>
                                         </p:tgtEl>
@@ -10878,14 +13854,14 @@
                                 </p:cTn>
                               </p:par>
                               <p:par>
-                                <p:cTn id="61" presetID="10" presetClass="entr" presetSubtype="0" fill="hold" grpId="0" nodeType="withEffect">
+                                <p:cTn id="96" presetID="10" presetClass="entr" presetSubtype="0" fill="hold" grpId="0" nodeType="withEffect">
                                   <p:stCondLst>
                                     <p:cond delay="0"/>
                                   </p:stCondLst>
                                   <p:childTnLst>
                                     <p:set>
                                       <p:cBhvr>
-                                        <p:cTn id="62" dur="1" fill="hold">
+                                        <p:cTn id="97" dur="1" fill="hold">
                                           <p:stCondLst>
                                             <p:cond delay="0"/>
                                           </p:stCondLst>
@@ -10903,7 +13879,7 @@
                                     </p:set>
                                     <p:animEffect transition="in" filter="fade">
                                       <p:cBhvr>
-                                        <p:cTn id="63" dur="500"/>
+                                        <p:cTn id="98" dur="500"/>
                                         <p:tgtEl>
                                           <p:spTgt spid="4"/>
                                         </p:tgtEl>
@@ -10919,26 +13895,26 @@
                     </p:cTn>
                   </p:par>
                   <p:par>
-                    <p:cTn id="64" fill="hold">
+                    <p:cTn id="99" fill="hold">
                       <p:stCondLst>
                         <p:cond delay="indefinite"/>
                       </p:stCondLst>
                       <p:childTnLst>
                         <p:par>
-                          <p:cTn id="65" fill="hold">
+                          <p:cTn id="100" fill="hold">
                             <p:stCondLst>
                               <p:cond delay="0"/>
                             </p:stCondLst>
                             <p:childTnLst>
                               <p:par>
-                                <p:cTn id="66" presetID="10" presetClass="entr" presetSubtype="0" fill="hold" nodeType="clickEffect">
+                                <p:cTn id="101" presetID="10" presetClass="entr" presetSubtype="0" fill="hold" nodeType="clickEffect">
                                   <p:stCondLst>
                                     <p:cond delay="0"/>
                                   </p:stCondLst>
                                   <p:childTnLst>
                                     <p:set>
                                       <p:cBhvr>
-                                        <p:cTn id="67" dur="1" fill="hold">
+                                        <p:cTn id="102" dur="1" fill="hold">
                                           <p:stCondLst>
                                             <p:cond delay="0"/>
                                           </p:stCondLst>
@@ -10956,7 +13932,7 @@
                                     </p:set>
                                     <p:animEffect transition="in" filter="fade">
                                       <p:cBhvr>
-                                        <p:cTn id="68" dur="500"/>
+                                        <p:cTn id="103" dur="500"/>
                                         <p:tgtEl>
                                           <p:spTgt spid="8"/>
                                         </p:tgtEl>
@@ -10966,14 +13942,14 @@
                                 </p:cTn>
                               </p:par>
                               <p:par>
-                                <p:cTn id="69" presetID="10" presetClass="entr" presetSubtype="0" fill="hold" nodeType="withEffect">
+                                <p:cTn id="104" presetID="10" presetClass="entr" presetSubtype="0" fill="hold" nodeType="withEffect">
                                   <p:stCondLst>
                                     <p:cond delay="0"/>
                                   </p:stCondLst>
                                   <p:childTnLst>
                                     <p:set>
                                       <p:cBhvr>
-                                        <p:cTn id="70" dur="1" fill="hold">
+                                        <p:cTn id="105" dur="1" fill="hold">
                                           <p:stCondLst>
                                             <p:cond delay="0"/>
                                           </p:stCondLst>
@@ -10991,7 +13967,7 @@
                                     </p:set>
                                     <p:animEffect transition="in" filter="fade">
                                       <p:cBhvr>
-                                        <p:cTn id="71" dur="500"/>
+                                        <p:cTn id="106" dur="500"/>
                                         <p:tgtEl>
                                           <p:spTgt spid="10"/>
                                         </p:tgtEl>
@@ -11001,14 +13977,14 @@
                                 </p:cTn>
                               </p:par>
                               <p:par>
-                                <p:cTn id="72" presetID="10" presetClass="entr" presetSubtype="0" fill="hold" grpId="0" nodeType="withEffect">
+                                <p:cTn id="107" presetID="10" presetClass="entr" presetSubtype="0" fill="hold" grpId="0" nodeType="withEffect">
                                   <p:stCondLst>
                                     <p:cond delay="0"/>
                                   </p:stCondLst>
                                   <p:childTnLst>
                                     <p:set>
                                       <p:cBhvr>
-                                        <p:cTn id="73" dur="1" fill="hold">
+                                        <p:cTn id="108" dur="1" fill="hold">
                                           <p:stCondLst>
                                             <p:cond delay="0"/>
                                           </p:stCondLst>
@@ -11026,7 +14002,7 @@
                                     </p:set>
                                     <p:animEffect transition="in" filter="fade">
                                       <p:cBhvr>
-                                        <p:cTn id="74" dur="500"/>
+                                        <p:cTn id="109" dur="500"/>
                                         <p:tgtEl>
                                           <p:spTgt spid="9"/>
                                         </p:tgtEl>
@@ -11036,14 +14012,14 @@
                                 </p:cTn>
                               </p:par>
                               <p:par>
-                                <p:cTn id="75" presetID="10" presetClass="entr" presetSubtype="0" fill="hold" grpId="0" nodeType="withEffect">
+                                <p:cTn id="110" presetID="10" presetClass="entr" presetSubtype="0" fill="hold" grpId="0" nodeType="withEffect">
                                   <p:stCondLst>
                                     <p:cond delay="0"/>
                                   </p:stCondLst>
                                   <p:childTnLst>
                                     <p:set>
                                       <p:cBhvr>
-                                        <p:cTn id="76" dur="1" fill="hold">
+                                        <p:cTn id="111" dur="1" fill="hold">
                                           <p:stCondLst>
                                             <p:cond delay="0"/>
                                           </p:stCondLst>
@@ -11061,7 +14037,7 @@
                                     </p:set>
                                     <p:animEffect transition="in" filter="fade">
                                       <p:cBhvr>
-                                        <p:cTn id="77" dur="500"/>
+                                        <p:cTn id="112" dur="500"/>
                                         <p:tgtEl>
                                           <p:spTgt spid="18"/>
                                         </p:tgtEl>
@@ -11077,26 +14053,26 @@
                     </p:cTn>
                   </p:par>
                   <p:par>
-                    <p:cTn id="78" fill="hold">
+                    <p:cTn id="113" fill="hold">
                       <p:stCondLst>
                         <p:cond delay="indefinite"/>
                       </p:stCondLst>
                       <p:childTnLst>
                         <p:par>
-                          <p:cTn id="79" fill="hold">
+                          <p:cTn id="114" fill="hold">
                             <p:stCondLst>
                               <p:cond delay="0"/>
                             </p:stCondLst>
                             <p:childTnLst>
                               <p:par>
-                                <p:cTn id="80" presetID="10" presetClass="entr" presetSubtype="0" fill="hold" nodeType="clickEffect">
+                                <p:cTn id="115" presetID="10" presetClass="entr" presetSubtype="0" fill="hold" nodeType="clickEffect">
                                   <p:stCondLst>
                                     <p:cond delay="0"/>
                                   </p:stCondLst>
                                   <p:childTnLst>
                                     <p:set>
                                       <p:cBhvr>
-                                        <p:cTn id="81" dur="1" fill="hold">
+                                        <p:cTn id="116" dur="1" fill="hold">
                                           <p:stCondLst>
                                             <p:cond delay="0"/>
                                           </p:stCondLst>
@@ -11114,7 +14090,7 @@
                                     </p:set>
                                     <p:animEffect transition="in" filter="fade">
                                       <p:cBhvr>
-                                        <p:cTn id="82" dur="500"/>
+                                        <p:cTn id="117" dur="500"/>
                                         <p:tgtEl>
                                           <p:spTgt spid="11"/>
                                         </p:tgtEl>
@@ -11124,14 +14100,14 @@
                                 </p:cTn>
                               </p:par>
                               <p:par>
-                                <p:cTn id="83" presetID="10" presetClass="entr" presetSubtype="0" fill="hold" nodeType="withEffect">
+                                <p:cTn id="118" presetID="10" presetClass="entr" presetSubtype="0" fill="hold" nodeType="withEffect">
                                   <p:stCondLst>
                                     <p:cond delay="0"/>
                                   </p:stCondLst>
                                   <p:childTnLst>
                                     <p:set>
                                       <p:cBhvr>
-                                        <p:cTn id="84" dur="1" fill="hold">
+                                        <p:cTn id="119" dur="1" fill="hold">
                                           <p:stCondLst>
                                             <p:cond delay="0"/>
                                           </p:stCondLst>
@@ -11149,7 +14125,7 @@
                                     </p:set>
                                     <p:animEffect transition="in" filter="fade">
                                       <p:cBhvr>
-                                        <p:cTn id="85" dur="500"/>
+                                        <p:cTn id="120" dur="500"/>
                                         <p:tgtEl>
                                           <p:spTgt spid="12"/>
                                         </p:tgtEl>
@@ -11159,14 +14135,14 @@
                                 </p:cTn>
                               </p:par>
                               <p:par>
-                                <p:cTn id="86" presetID="10" presetClass="entr" presetSubtype="0" fill="hold" grpId="0" nodeType="withEffect">
+                                <p:cTn id="121" presetID="10" presetClass="entr" presetSubtype="0" fill="hold" grpId="0" nodeType="withEffect">
                                   <p:stCondLst>
                                     <p:cond delay="0"/>
                                   </p:stCondLst>
                                   <p:childTnLst>
                                     <p:set>
                                       <p:cBhvr>
-                                        <p:cTn id="87" dur="1" fill="hold">
+                                        <p:cTn id="122" dur="1" fill="hold">
                                           <p:stCondLst>
                                             <p:cond delay="0"/>
                                           </p:stCondLst>
@@ -11184,7 +14160,7 @@
                                     </p:set>
                                     <p:animEffect transition="in" filter="fade">
                                       <p:cBhvr>
-                                        <p:cTn id="88" dur="500"/>
+                                        <p:cTn id="123" dur="500"/>
                                         <p:tgtEl>
                                           <p:spTgt spid="14"/>
                                         </p:tgtEl>
@@ -11194,14 +14170,14 @@
                                 </p:cTn>
                               </p:par>
                               <p:par>
-                                <p:cTn id="89" presetID="10" presetClass="entr" presetSubtype="0" fill="hold" nodeType="withEffect">
+                                <p:cTn id="124" presetID="10" presetClass="entr" presetSubtype="0" fill="hold" nodeType="withEffect">
                                   <p:stCondLst>
                                     <p:cond delay="0"/>
                                   </p:stCondLst>
                                   <p:childTnLst>
                                     <p:set>
                                       <p:cBhvr>
-                                        <p:cTn id="90" dur="1" fill="hold">
+                                        <p:cTn id="125" dur="1" fill="hold">
                                           <p:stCondLst>
                                             <p:cond delay="0"/>
                                           </p:stCondLst>
@@ -11219,7 +14195,7 @@
                                     </p:set>
                                     <p:animEffect transition="in" filter="fade">
                                       <p:cBhvr>
-                                        <p:cTn id="91" dur="500"/>
+                                        <p:cTn id="126" dur="500"/>
                                         <p:tgtEl>
                                           <p:spTgt spid="15"/>
                                         </p:tgtEl>
@@ -11229,14 +14205,14 @@
                                 </p:cTn>
                               </p:par>
                               <p:par>
-                                <p:cTn id="92" presetID="10" presetClass="entr" presetSubtype="0" fill="hold" nodeType="withEffect">
+                                <p:cTn id="127" presetID="10" presetClass="entr" presetSubtype="0" fill="hold" nodeType="withEffect">
                                   <p:stCondLst>
                                     <p:cond delay="0"/>
                                   </p:stCondLst>
                                   <p:childTnLst>
                                     <p:set>
                                       <p:cBhvr>
-                                        <p:cTn id="93" dur="1" fill="hold">
+                                        <p:cTn id="128" dur="1" fill="hold">
                                           <p:stCondLst>
                                             <p:cond delay="0"/>
                                           </p:stCondLst>
@@ -11254,7 +14230,7 @@
                                     </p:set>
                                     <p:animEffect transition="in" filter="fade">
                                       <p:cBhvr>
-                                        <p:cTn id="94" dur="500"/>
+                                        <p:cTn id="129" dur="500"/>
                                         <p:tgtEl>
                                           <p:spTgt spid="21"/>
                                         </p:tgtEl>
@@ -11264,14 +14240,14 @@
                                 </p:cTn>
                               </p:par>
                               <p:par>
-                                <p:cTn id="95" presetID="10" presetClass="entr" presetSubtype="0" fill="hold" nodeType="withEffect">
+                                <p:cTn id="130" presetID="10" presetClass="entr" presetSubtype="0" fill="hold" nodeType="withEffect">
                                   <p:stCondLst>
                                     <p:cond delay="0"/>
                                   </p:stCondLst>
                                   <p:childTnLst>
                                     <p:set>
                                       <p:cBhvr>
-                                        <p:cTn id="96" dur="1" fill="hold">
+                                        <p:cTn id="131" dur="1" fill="hold">
                                           <p:stCondLst>
                                             <p:cond delay="0"/>
                                           </p:stCondLst>
@@ -11289,7 +14265,7 @@
                                     </p:set>
                                     <p:animEffect transition="in" filter="fade">
                                       <p:cBhvr>
-                                        <p:cTn id="97" dur="500"/>
+                                        <p:cTn id="132" dur="500"/>
                                         <p:tgtEl>
                                           <p:spTgt spid="16"/>
                                         </p:tgtEl>
@@ -11305,26 +14281,26 @@
                     </p:cTn>
                   </p:par>
                   <p:par>
-                    <p:cTn id="98" fill="hold">
+                    <p:cTn id="133" fill="hold">
                       <p:stCondLst>
                         <p:cond delay="indefinite"/>
                       </p:stCondLst>
                       <p:childTnLst>
                         <p:par>
-                          <p:cTn id="99" fill="hold">
+                          <p:cTn id="134" fill="hold">
                             <p:stCondLst>
                               <p:cond delay="0"/>
                             </p:stCondLst>
                             <p:childTnLst>
                               <p:par>
-                                <p:cTn id="100" presetID="10" presetClass="entr" presetSubtype="0" fill="hold" grpId="0" nodeType="clickEffect">
+                                <p:cTn id="135" presetID="10" presetClass="entr" presetSubtype="0" fill="hold" grpId="0" nodeType="clickEffect">
                                   <p:stCondLst>
                                     <p:cond delay="0"/>
                                   </p:stCondLst>
                                   <p:childTnLst>
                                     <p:set>
                                       <p:cBhvr>
-                                        <p:cTn id="101" dur="1" fill="hold">
+                                        <p:cTn id="136" dur="1" fill="hold">
                                           <p:stCondLst>
                                             <p:cond delay="0"/>
                                           </p:stCondLst>
@@ -11342,7 +14318,7 @@
                                     </p:set>
                                     <p:animEffect transition="in" filter="fade">
                                       <p:cBhvr>
-                                        <p:cTn id="102" dur="500"/>
+                                        <p:cTn id="137" dur="500"/>
                                         <p:tgtEl>
                                           <p:spTgt spid="23"/>
                                         </p:tgtEl>
@@ -11352,14 +14328,14 @@
                                 </p:cTn>
                               </p:par>
                               <p:par>
-                                <p:cTn id="103" presetID="10" presetClass="entr" presetSubtype="0" fill="hold" grpId="0" nodeType="withEffect">
+                                <p:cTn id="138" presetID="10" presetClass="entr" presetSubtype="0" fill="hold" grpId="0" nodeType="withEffect">
                                   <p:stCondLst>
                                     <p:cond delay="0"/>
                                   </p:stCondLst>
                                   <p:childTnLst>
                                     <p:set>
                                       <p:cBhvr>
-                                        <p:cTn id="104" dur="1" fill="hold">
+                                        <p:cTn id="139" dur="1" fill="hold">
                                           <p:stCondLst>
                                             <p:cond delay="0"/>
                                           </p:stCondLst>
@@ -11377,7 +14353,7 @@
                                     </p:set>
                                     <p:animEffect transition="in" filter="fade">
                                       <p:cBhvr>
-                                        <p:cTn id="105" dur="500"/>
+                                        <p:cTn id="140" dur="500"/>
                                         <p:tgtEl>
                                           <p:spTgt spid="24"/>
                                         </p:tgtEl>
@@ -11393,26 +14369,26 @@
                     </p:cTn>
                   </p:par>
                   <p:par>
-                    <p:cTn id="106" fill="hold">
+                    <p:cTn id="141" fill="hold">
                       <p:stCondLst>
                         <p:cond delay="indefinite"/>
                       </p:stCondLst>
                       <p:childTnLst>
                         <p:par>
-                          <p:cTn id="107" fill="hold">
+                          <p:cTn id="142" fill="hold">
                             <p:stCondLst>
                               <p:cond delay="0"/>
                             </p:stCondLst>
                             <p:childTnLst>
                               <p:par>
-                                <p:cTn id="108" presetID="10" presetClass="entr" presetSubtype="0" fill="hold" nodeType="clickEffect">
+                                <p:cTn id="143" presetID="10" presetClass="entr" presetSubtype="0" fill="hold" nodeType="clickEffect">
                                   <p:stCondLst>
                                     <p:cond delay="0"/>
                                   </p:stCondLst>
                                   <p:childTnLst>
                                     <p:set>
                                       <p:cBhvr>
-                                        <p:cTn id="109" dur="1" fill="hold">
+                                        <p:cTn id="144" dur="1" fill="hold">
                                           <p:stCondLst>
                                             <p:cond delay="0"/>
                                           </p:stCondLst>
@@ -11430,7 +14406,7 @@
                                     </p:set>
                                     <p:animEffect transition="in" filter="fade">
                                       <p:cBhvr>
-                                        <p:cTn id="110" dur="500"/>
+                                        <p:cTn id="145" dur="500"/>
                                         <p:tgtEl>
                                           <p:spTgt spid="46"/>
                                         </p:tgtEl>
@@ -11483,6 +14459,17 @@
       <p:bldP spid="55" grpId="0"/>
       <p:bldP spid="2" grpId="0"/>
       <p:bldP spid="22" grpId="0"/>
+      <p:bldP spid="38" grpId="0" animBg="1"/>
+      <p:bldP spid="39" grpId="0" animBg="1"/>
+      <p:bldP spid="43" grpId="0" animBg="1"/>
+      <p:bldP spid="58" grpId="0" animBg="1"/>
+      <p:bldP spid="59" grpId="0" animBg="1"/>
+      <p:bldP spid="60" grpId="0" animBg="1"/>
+      <p:bldP spid="61" grpId="0" animBg="1"/>
+      <p:bldP spid="66" grpId="0" animBg="1"/>
+      <p:bldP spid="67" grpId="0" animBg="1"/>
+      <p:bldP spid="68" grpId="0" animBg="1"/>
+      <p:bldP spid="69" grpId="0" animBg="1"/>
     </p:bldLst>
   </p:timing>
   <p:extLst>
@@ -11512,10 +14499,10 @@
       </p:grpSpPr>
       <p:pic>
         <p:nvPicPr>
-          <p:cNvPr id="7" name="Immagine 6">
+          <p:cNvPr id="15" name="Immagine 14">
             <a:extLst>
               <a:ext uri="{FF2B5EF4-FFF2-40B4-BE49-F238E27FC236}">
-                <a16:creationId xmlns:a16="http://schemas.microsoft.com/office/drawing/2014/main" id="{DA019632-93C8-E3A4-C8D3-E3A913CC9071}"/>
+                <a16:creationId xmlns:a16="http://schemas.microsoft.com/office/drawing/2014/main" id="{AD999A0C-A454-4641-56F5-DBA5A8BD7C9F}"/>
               </a:ext>
             </a:extLst>
           </p:cNvPr>
@@ -11538,8 +14525,928 @@
         </p:blipFill>
         <p:spPr>
           <a:xfrm>
-            <a:off x="159228" y="793156"/>
-            <a:ext cx="3498371" cy="3404873"/>
+            <a:off x="8488396" y="4423680"/>
+            <a:ext cx="2605476" cy="982904"/>
+          </a:xfrm>
+          <a:prstGeom prst="rect">
+            <a:avLst/>
+          </a:prstGeom>
+        </p:spPr>
+      </p:pic>
+      <p:sp>
+        <p:nvSpPr>
+          <p:cNvPr id="16" name="CasellaDiTesto 15">
+            <a:extLst>
+              <a:ext uri="{FF2B5EF4-FFF2-40B4-BE49-F238E27FC236}">
+                <a16:creationId xmlns:a16="http://schemas.microsoft.com/office/drawing/2014/main" id="{354D4B41-893F-FF18-14A7-E86464D06A4B}"/>
+              </a:ext>
+            </a:extLst>
+          </p:cNvPr>
+          <p:cNvSpPr txBox="1"/>
+          <p:nvPr/>
+        </p:nvSpPr>
+        <p:spPr>
+          <a:xfrm>
+            <a:off x="8661827" y="5673131"/>
+            <a:ext cx="1762126" cy="923330"/>
+          </a:xfrm>
+          <a:prstGeom prst="rect">
+            <a:avLst/>
+          </a:prstGeom>
+          <a:solidFill>
+            <a:srgbClr val="FFC000"/>
+          </a:solidFill>
+          <a:ln w="28575">
+            <a:solidFill>
+              <a:srgbClr val="00B050"/>
+            </a:solidFill>
+          </a:ln>
+        </p:spPr>
+        <p:txBody>
+          <a:bodyPr wrap="square" rtlCol="0">
+            <a:spAutoFit/>
+          </a:bodyPr>
+          <a:lstStyle/>
+          <a:p>
+            <a:pPr algn="ctr"/>
+            <a:r>
+              <a:rPr lang="it-IT" b="1" dirty="0" err="1">
+                <a:latin typeface="Georgia" panose="02040502050405020303" pitchFamily="18" charset="0"/>
+              </a:rPr>
+              <a:t>Fully</a:t>
+            </a:r>
+            <a:endParaRPr lang="it-IT" b="1" dirty="0">
+              <a:latin typeface="Georgia" panose="02040502050405020303" pitchFamily="18" charset="0"/>
+            </a:endParaRPr>
+          </a:p>
+          <a:p>
+            <a:pPr algn="ctr"/>
+            <a:r>
+              <a:rPr lang="it-IT" b="1" dirty="0" err="1">
+                <a:latin typeface="Georgia" panose="02040502050405020303" pitchFamily="18" charset="0"/>
+              </a:rPr>
+              <a:t>Connected</a:t>
+            </a:r>
+            <a:r>
+              <a:rPr lang="it-IT" b="1" dirty="0">
+                <a:latin typeface="Georgia" panose="02040502050405020303" pitchFamily="18" charset="0"/>
+              </a:rPr>
+              <a:t> Layer</a:t>
+            </a:r>
+          </a:p>
+        </p:txBody>
+      </p:sp>
+      <p:pic>
+        <p:nvPicPr>
+          <p:cNvPr id="14" name="Immagine 13">
+            <a:extLst>
+              <a:ext uri="{FF2B5EF4-FFF2-40B4-BE49-F238E27FC236}">
+                <a16:creationId xmlns:a16="http://schemas.microsoft.com/office/drawing/2014/main" id="{6DA2688E-22DB-C0DA-2E1A-E166A4ADFE01}"/>
+              </a:ext>
+            </a:extLst>
+          </p:cNvPr>
+          <p:cNvPicPr>
+            <a:picLocks noChangeAspect="1"/>
+          </p:cNvPicPr>
+          <p:nvPr/>
+        </p:nvPicPr>
+        <p:blipFill>
+          <a:blip r:embed="rId3">
+            <a:extLst>
+              <a:ext uri="{28A0092B-C50C-407E-A947-70E740481C1C}">
+                <a14:useLocalDpi xmlns:a14="http://schemas.microsoft.com/office/drawing/2010/main" val="0"/>
+              </a:ext>
+            </a:extLst>
+          </a:blip>
+          <a:stretch>
+            <a:fillRect/>
+          </a:stretch>
+        </p:blipFill>
+        <p:spPr>
+          <a:xfrm>
+            <a:off x="183980" y="3916772"/>
+            <a:ext cx="3421677" cy="2941228"/>
+          </a:xfrm>
+          <a:prstGeom prst="rect">
+            <a:avLst/>
+          </a:prstGeom>
+        </p:spPr>
+      </p:pic>
+      <p:grpSp>
+        <p:nvGrpSpPr>
+          <p:cNvPr id="12" name="Gruppo 11">
+            <a:extLst>
+              <a:ext uri="{FF2B5EF4-FFF2-40B4-BE49-F238E27FC236}">
+                <a16:creationId xmlns:a16="http://schemas.microsoft.com/office/drawing/2014/main" id="{B2EDFD89-48F0-FE94-BCE7-7FD3B8CEF332}"/>
+              </a:ext>
+            </a:extLst>
+          </p:cNvPr>
+          <p:cNvGrpSpPr/>
+          <p:nvPr/>
+        </p:nvGrpSpPr>
+        <p:grpSpPr>
+          <a:xfrm>
+            <a:off x="254343" y="3730492"/>
+            <a:ext cx="3855839" cy="3077988"/>
+            <a:chOff x="254343" y="3923814"/>
+            <a:chExt cx="3718903" cy="2884666"/>
+          </a:xfrm>
+        </p:grpSpPr>
+        <p:pic>
+          <p:nvPicPr>
+            <p:cNvPr id="4" name="Immagine 3">
+              <a:extLst>
+                <a:ext uri="{FF2B5EF4-FFF2-40B4-BE49-F238E27FC236}">
+                  <a16:creationId xmlns:a16="http://schemas.microsoft.com/office/drawing/2014/main" id="{BB3C2F52-4204-383C-1E25-8A24C69CAF9B}"/>
+                </a:ext>
+              </a:extLst>
+            </p:cNvPr>
+            <p:cNvPicPr>
+              <a:picLocks noChangeAspect="1"/>
+            </p:cNvPicPr>
+            <p:nvPr/>
+          </p:nvPicPr>
+          <p:blipFill>
+            <a:blip r:embed="rId4">
+              <a:extLst>
+                <a:ext uri="{28A0092B-C50C-407E-A947-70E740481C1C}">
+                  <a14:useLocalDpi xmlns:a14="http://schemas.microsoft.com/office/drawing/2010/main" val="0"/>
+                </a:ext>
+              </a:extLst>
+            </a:blip>
+            <a:stretch>
+              <a:fillRect/>
+            </a:stretch>
+          </p:blipFill>
+          <p:spPr>
+            <a:xfrm flipH="1">
+              <a:off x="254343" y="4108480"/>
+              <a:ext cx="3718903" cy="2700000"/>
+            </a:xfrm>
+            <a:prstGeom prst="rect">
+              <a:avLst/>
+            </a:prstGeom>
+          </p:spPr>
+        </p:pic>
+        <p:sp>
+          <p:nvSpPr>
+            <p:cNvPr id="7" name="CasellaDiTesto 6">
+              <a:extLst>
+                <a:ext uri="{FF2B5EF4-FFF2-40B4-BE49-F238E27FC236}">
+                  <a16:creationId xmlns:a16="http://schemas.microsoft.com/office/drawing/2014/main" id="{B3D23749-DE3F-268C-30D2-C5139678F3DE}"/>
+                </a:ext>
+              </a:extLst>
+            </p:cNvPr>
+            <p:cNvSpPr txBox="1"/>
+            <p:nvPr/>
+          </p:nvSpPr>
+          <p:spPr>
+            <a:xfrm>
+              <a:off x="718446" y="3923814"/>
+              <a:ext cx="774571" cy="369332"/>
+            </a:xfrm>
+            <a:prstGeom prst="rect">
+              <a:avLst/>
+            </a:prstGeom>
+            <a:noFill/>
+          </p:spPr>
+          <p:txBody>
+            <a:bodyPr wrap="none" rtlCol="0">
+              <a:spAutoFit/>
+            </a:bodyPr>
+            <a:lstStyle/>
+            <a:p>
+              <a:pPr algn="ctr"/>
+              <a:r>
+                <a:rPr lang="it-IT" b="1" dirty="0">
+                  <a:latin typeface="Book Antiqua" panose="02040602050305030304" pitchFamily="18" charset="0"/>
+                </a:rPr>
+                <a:t>Input</a:t>
+              </a:r>
+            </a:p>
+          </p:txBody>
+        </p:sp>
+        <p:sp>
+          <p:nvSpPr>
+            <p:cNvPr id="11" name="CasellaDiTesto 10">
+              <a:extLst>
+                <a:ext uri="{FF2B5EF4-FFF2-40B4-BE49-F238E27FC236}">
+                  <a16:creationId xmlns:a16="http://schemas.microsoft.com/office/drawing/2014/main" id="{1518AE30-46D7-45AA-092F-8FEAE47A2A61}"/>
+                </a:ext>
+              </a:extLst>
+            </p:cNvPr>
+            <p:cNvSpPr txBox="1"/>
+            <p:nvPr/>
+          </p:nvSpPr>
+          <p:spPr>
+            <a:xfrm>
+              <a:off x="2321344" y="4478774"/>
+              <a:ext cx="1412240" cy="369332"/>
+            </a:xfrm>
+            <a:prstGeom prst="rect">
+              <a:avLst/>
+            </a:prstGeom>
+            <a:noFill/>
+          </p:spPr>
+          <p:txBody>
+            <a:bodyPr wrap="square">
+              <a:spAutoFit/>
+            </a:bodyPr>
+            <a:lstStyle/>
+            <a:p>
+              <a:pPr algn="ctr"/>
+              <a:r>
+                <a:rPr lang="it-IT" b="1" dirty="0">
+                  <a:latin typeface="Book Antiqua" panose="02040602050305030304" pitchFamily="18" charset="0"/>
+                </a:rPr>
+                <a:t>Output</a:t>
+              </a:r>
+            </a:p>
+          </p:txBody>
+        </p:sp>
+      </p:grpSp>
+      <p:sp>
+        <p:nvSpPr>
+          <p:cNvPr id="17" name="CasellaDiTesto 16">
+            <a:extLst>
+              <a:ext uri="{FF2B5EF4-FFF2-40B4-BE49-F238E27FC236}">
+                <a16:creationId xmlns:a16="http://schemas.microsoft.com/office/drawing/2014/main" id="{CE021267-A76C-D48D-774D-D2FEA09C6338}"/>
+              </a:ext>
+            </a:extLst>
+          </p:cNvPr>
+          <p:cNvSpPr txBox="1"/>
+          <p:nvPr/>
+        </p:nvSpPr>
+        <p:spPr>
+          <a:xfrm>
+            <a:off x="3226754" y="5974475"/>
+            <a:ext cx="1907581" cy="646331"/>
+          </a:xfrm>
+          <a:prstGeom prst="rect">
+            <a:avLst/>
+          </a:prstGeom>
+          <a:solidFill>
+            <a:srgbClr val="FFC000"/>
+          </a:solidFill>
+          <a:ln w="28575">
+            <a:solidFill>
+              <a:srgbClr val="00B050"/>
+            </a:solidFill>
+          </a:ln>
+        </p:spPr>
+        <p:txBody>
+          <a:bodyPr wrap="square" rtlCol="0">
+            <a:spAutoFit/>
+          </a:bodyPr>
+          <a:lstStyle/>
+          <a:p>
+            <a:pPr algn="ctr"/>
+            <a:r>
+              <a:rPr lang="it-IT" b="1" dirty="0" err="1">
+                <a:latin typeface="Georgia" panose="02040502050405020303" pitchFamily="18" charset="0"/>
+              </a:rPr>
+              <a:t>Convolutional</a:t>
+            </a:r>
+            <a:r>
+              <a:rPr lang="it-IT" b="1" dirty="0">
+                <a:latin typeface="Georgia" panose="02040502050405020303" pitchFamily="18" charset="0"/>
+              </a:rPr>
+              <a:t> Layer</a:t>
+            </a:r>
+          </a:p>
+        </p:txBody>
+      </p:sp>
+      <p:pic>
+        <p:nvPicPr>
+          <p:cNvPr id="5" name="Immagine 4">
+            <a:extLst>
+              <a:ext uri="{FF2B5EF4-FFF2-40B4-BE49-F238E27FC236}">
+                <a16:creationId xmlns:a16="http://schemas.microsoft.com/office/drawing/2014/main" id="{19439E8E-69C0-D331-43E0-542CEEF937F9}"/>
+              </a:ext>
+            </a:extLst>
+          </p:cNvPr>
+          <p:cNvPicPr>
+            <a:picLocks noChangeAspect="1"/>
+          </p:cNvPicPr>
+          <p:nvPr/>
+        </p:nvPicPr>
+        <p:blipFill>
+          <a:blip r:embed="rId5">
+            <a:extLst>
+              <a:ext uri="{28A0092B-C50C-407E-A947-70E740481C1C}">
+                <a14:useLocalDpi xmlns:a14="http://schemas.microsoft.com/office/drawing/2010/main" val="0"/>
+              </a:ext>
+            </a:extLst>
+          </a:blip>
+          <a:stretch>
+            <a:fillRect/>
+          </a:stretch>
+        </p:blipFill>
+        <p:spPr>
+          <a:xfrm>
+            <a:off x="2321344" y="0"/>
+            <a:ext cx="8134618" cy="3002280"/>
+          </a:xfrm>
+          <a:prstGeom prst="rect">
+            <a:avLst/>
+          </a:prstGeom>
+        </p:spPr>
+      </p:pic>
+      <p:sp>
+        <p:nvSpPr>
+          <p:cNvPr id="6" name="CasellaDiTesto 5">
+            <a:extLst>
+              <a:ext uri="{FF2B5EF4-FFF2-40B4-BE49-F238E27FC236}">
+                <a16:creationId xmlns:a16="http://schemas.microsoft.com/office/drawing/2014/main" id="{923A10A0-A854-346D-5922-5A282C5C9FFA}"/>
+              </a:ext>
+            </a:extLst>
+          </p:cNvPr>
+          <p:cNvSpPr txBox="1"/>
+          <p:nvPr/>
+        </p:nvSpPr>
+        <p:spPr>
+          <a:xfrm>
+            <a:off x="2442945" y="2542229"/>
+            <a:ext cx="2121093" cy="646331"/>
+          </a:xfrm>
+          <a:prstGeom prst="rect">
+            <a:avLst/>
+          </a:prstGeom>
+          <a:noFill/>
+        </p:spPr>
+        <p:txBody>
+          <a:bodyPr wrap="none" rtlCol="0">
+            <a:spAutoFit/>
+          </a:bodyPr>
+          <a:lstStyle/>
+          <a:p>
+            <a:pPr algn="ctr"/>
+            <a:r>
+              <a:rPr lang="it-IT" b="1" dirty="0">
+                <a:latin typeface="Book Antiqua" panose="02040602050305030304" pitchFamily="18" charset="0"/>
+              </a:rPr>
+              <a:t>Input</a:t>
+            </a:r>
+          </a:p>
+          <a:p>
+            <a:pPr algn="ctr"/>
+            <a:r>
+              <a:rPr lang="it-IT" dirty="0">
+                <a:latin typeface="Book Antiqua" panose="02040602050305030304" pitchFamily="18" charset="0"/>
+              </a:rPr>
+              <a:t>(or </a:t>
+            </a:r>
+            <a:r>
+              <a:rPr lang="it-IT" dirty="0" err="1">
+                <a:latin typeface="Book Antiqua" panose="02040602050305030304" pitchFamily="18" charset="0"/>
+              </a:rPr>
+              <a:t>previous</a:t>
+            </a:r>
+            <a:r>
+              <a:rPr lang="it-IT" dirty="0">
+                <a:latin typeface="Book Antiqua" panose="02040602050305030304" pitchFamily="18" charset="0"/>
+              </a:rPr>
+              <a:t> </a:t>
+            </a:r>
+            <a:r>
+              <a:rPr lang="it-IT" dirty="0" err="1">
+                <a:latin typeface="Book Antiqua" panose="02040602050305030304" pitchFamily="18" charset="0"/>
+              </a:rPr>
+              <a:t>layer</a:t>
+            </a:r>
+            <a:r>
+              <a:rPr lang="it-IT" dirty="0">
+                <a:latin typeface="Book Antiqua" panose="02040602050305030304" pitchFamily="18" charset="0"/>
+              </a:rPr>
+              <a:t>)</a:t>
+            </a:r>
+          </a:p>
+        </p:txBody>
+      </p:sp>
+      <p:sp>
+        <p:nvSpPr>
+          <p:cNvPr id="9" name="CasellaDiTesto 8">
+            <a:extLst>
+              <a:ext uri="{FF2B5EF4-FFF2-40B4-BE49-F238E27FC236}">
+                <a16:creationId xmlns:a16="http://schemas.microsoft.com/office/drawing/2014/main" id="{7F89B00F-771D-D0D6-66F0-B9FE362C3CAF}"/>
+              </a:ext>
+            </a:extLst>
+          </p:cNvPr>
+          <p:cNvSpPr txBox="1"/>
+          <p:nvPr/>
+        </p:nvSpPr>
+        <p:spPr>
+          <a:xfrm>
+            <a:off x="5338457" y="2125924"/>
+            <a:ext cx="1172116" cy="646331"/>
+          </a:xfrm>
+          <a:prstGeom prst="rect">
+            <a:avLst/>
+          </a:prstGeom>
+          <a:noFill/>
+        </p:spPr>
+        <p:txBody>
+          <a:bodyPr wrap="none" rtlCol="0">
+            <a:spAutoFit/>
+          </a:bodyPr>
+          <a:lstStyle/>
+          <a:p>
+            <a:pPr algn="ctr"/>
+            <a:r>
+              <a:rPr lang="it-IT" b="1" dirty="0">
+                <a:latin typeface="Book Antiqua" panose="02040602050305030304" pitchFamily="18" charset="0"/>
+              </a:rPr>
+              <a:t>Kernel</a:t>
+            </a:r>
+          </a:p>
+          <a:p>
+            <a:pPr algn="ctr"/>
+            <a:r>
+              <a:rPr lang="it-IT" dirty="0">
+                <a:latin typeface="Book Antiqua" panose="02040602050305030304" pitchFamily="18" charset="0"/>
+              </a:rPr>
+              <a:t>(weights)</a:t>
+            </a:r>
+          </a:p>
+        </p:txBody>
+      </p:sp>
+      <p:sp>
+        <p:nvSpPr>
+          <p:cNvPr id="10" name="CasellaDiTesto 9">
+            <a:extLst>
+              <a:ext uri="{FF2B5EF4-FFF2-40B4-BE49-F238E27FC236}">
+                <a16:creationId xmlns:a16="http://schemas.microsoft.com/office/drawing/2014/main" id="{AF831536-F254-CF43-8F6C-52B922C8B1F2}"/>
+              </a:ext>
+            </a:extLst>
+          </p:cNvPr>
+          <p:cNvSpPr txBox="1"/>
+          <p:nvPr/>
+        </p:nvSpPr>
+        <p:spPr>
+          <a:xfrm>
+            <a:off x="8221474" y="3002280"/>
+            <a:ext cx="1569660" cy="646331"/>
+          </a:xfrm>
+          <a:prstGeom prst="rect">
+            <a:avLst/>
+          </a:prstGeom>
+          <a:noFill/>
+        </p:spPr>
+        <p:txBody>
+          <a:bodyPr wrap="none" rtlCol="0">
+            <a:spAutoFit/>
+          </a:bodyPr>
+          <a:lstStyle/>
+          <a:p>
+            <a:pPr algn="ctr"/>
+            <a:r>
+              <a:rPr lang="it-IT" b="1" dirty="0">
+                <a:latin typeface="Book Antiqua" panose="02040602050305030304" pitchFamily="18" charset="0"/>
+              </a:rPr>
+              <a:t>Output</a:t>
+            </a:r>
+          </a:p>
+          <a:p>
+            <a:pPr algn="ctr"/>
+            <a:r>
+              <a:rPr lang="it-IT" dirty="0">
+                <a:latin typeface="Book Antiqua" panose="02040602050305030304" pitchFamily="18" charset="0"/>
+              </a:rPr>
+              <a:t>(</a:t>
+            </a:r>
+            <a:r>
+              <a:rPr lang="it-IT" dirty="0" err="1">
+                <a:latin typeface="Book Antiqua" panose="02040602050305030304" pitchFamily="18" charset="0"/>
+              </a:rPr>
+              <a:t>convolution</a:t>
+            </a:r>
+            <a:r>
+              <a:rPr lang="it-IT" dirty="0">
+                <a:latin typeface="Book Antiqua" panose="02040602050305030304" pitchFamily="18" charset="0"/>
+              </a:rPr>
+              <a:t>)</a:t>
+            </a:r>
+          </a:p>
+        </p:txBody>
+      </p:sp>
+      <p:pic>
+        <p:nvPicPr>
+          <p:cNvPr id="3" name="Immagine 2">
+            <a:extLst>
+              <a:ext uri="{FF2B5EF4-FFF2-40B4-BE49-F238E27FC236}">
+                <a16:creationId xmlns:a16="http://schemas.microsoft.com/office/drawing/2014/main" id="{5D77EE5D-F9A0-0444-5DE0-9A6D5045AAEB}"/>
+              </a:ext>
+            </a:extLst>
+          </p:cNvPr>
+          <p:cNvPicPr>
+            <a:picLocks noChangeAspect="1"/>
+          </p:cNvPicPr>
+          <p:nvPr/>
+        </p:nvPicPr>
+        <p:blipFill>
+          <a:blip r:embed="rId6">
+            <a:extLst>
+              <a:ext uri="{28A0092B-C50C-407E-A947-70E740481C1C}">
+                <a14:useLocalDpi xmlns:a14="http://schemas.microsoft.com/office/drawing/2010/main" val="0"/>
+              </a:ext>
+            </a:extLst>
+          </a:blip>
+          <a:stretch>
+            <a:fillRect/>
+          </a:stretch>
+        </p:blipFill>
+        <p:spPr>
+          <a:xfrm>
+            <a:off x="8149477" y="3961992"/>
+            <a:ext cx="3186761" cy="2700000"/>
+          </a:xfrm>
+          <a:prstGeom prst="rect">
+            <a:avLst/>
+          </a:prstGeom>
+        </p:spPr>
+      </p:pic>
+      <p:sp>
+        <p:nvSpPr>
+          <p:cNvPr id="13" name="CasellaDiTesto 12">
+            <a:extLst>
+              <a:ext uri="{FF2B5EF4-FFF2-40B4-BE49-F238E27FC236}">
+                <a16:creationId xmlns:a16="http://schemas.microsoft.com/office/drawing/2014/main" id="{D1ECBFF2-951E-607D-20F9-9B75CFD074E0}"/>
+              </a:ext>
+            </a:extLst>
+          </p:cNvPr>
+          <p:cNvSpPr txBox="1"/>
+          <p:nvPr/>
+        </p:nvSpPr>
+        <p:spPr>
+          <a:xfrm>
+            <a:off x="4661737" y="3861268"/>
+            <a:ext cx="3140603" cy="923330"/>
+          </a:xfrm>
+          <a:prstGeom prst="rect">
+            <a:avLst/>
+          </a:prstGeom>
+          <a:noFill/>
+        </p:spPr>
+        <p:txBody>
+          <a:bodyPr wrap="none" rtlCol="0">
+            <a:spAutoFit/>
+          </a:bodyPr>
+          <a:lstStyle/>
+          <a:p>
+            <a:pPr marL="285750" indent="-285750">
+              <a:buFont typeface="Arial" panose="020B0604020202020204" pitchFamily="34" charset="0"/>
+              <a:buChar char="•"/>
+            </a:pPr>
+            <a:r>
+              <a:rPr lang="it-IT" dirty="0"/>
+              <a:t>Kernel size</a:t>
+            </a:r>
+          </a:p>
+          <a:p>
+            <a:pPr marL="285750" indent="-285750">
+              <a:buFont typeface="Arial" panose="020B0604020202020204" pitchFamily="34" charset="0"/>
+              <a:buChar char="•"/>
+            </a:pPr>
+            <a:r>
+              <a:rPr lang="it-IT" dirty="0"/>
+              <a:t>Number of kernels (</a:t>
+            </a:r>
+            <a:r>
+              <a:rPr lang="it-IT" dirty="0" err="1"/>
+              <a:t>maps</a:t>
+            </a:r>
+            <a:r>
+              <a:rPr lang="it-IT" dirty="0"/>
+              <a:t>)</a:t>
+            </a:r>
+          </a:p>
+          <a:p>
+            <a:endParaRPr lang="it-IT" dirty="0"/>
+          </a:p>
+        </p:txBody>
+      </p:sp>
+    </p:spTree>
+    <p:extLst>
+      <p:ext uri="{BB962C8B-B14F-4D97-AF65-F5344CB8AC3E}">
+        <p14:creationId xmlns:p14="http://schemas.microsoft.com/office/powerpoint/2010/main" val="2747483415"/>
+      </p:ext>
+    </p:extLst>
+  </p:cSld>
+  <p:clrMapOvr>
+    <a:masterClrMapping/>
+  </p:clrMapOvr>
+  <p:timing>
+    <p:tnLst>
+      <p:par>
+        <p:cTn id="1" dur="indefinite" restart="never" nodeType="tmRoot">
+          <p:childTnLst>
+            <p:seq concurrent="1" nextAc="seek">
+              <p:cTn id="2" dur="indefinite" nodeType="mainSeq">
+                <p:childTnLst>
+                  <p:par>
+                    <p:cTn id="3" fill="hold">
+                      <p:stCondLst>
+                        <p:cond delay="indefinite"/>
+                      </p:stCondLst>
+                      <p:childTnLst>
+                        <p:par>
+                          <p:cTn id="4" fill="hold">
+                            <p:stCondLst>
+                              <p:cond delay="0"/>
+                            </p:stCondLst>
+                            <p:childTnLst>
+                              <p:par>
+                                <p:cTn id="5" presetID="10" presetClass="entr" presetSubtype="0" fill="hold" nodeType="clickEffect">
+                                  <p:stCondLst>
+                                    <p:cond delay="0"/>
+                                  </p:stCondLst>
+                                  <p:childTnLst>
+                                    <p:set>
+                                      <p:cBhvr>
+                                        <p:cTn id="6" dur="1" fill="hold">
+                                          <p:stCondLst>
+                                            <p:cond delay="0"/>
+                                          </p:stCondLst>
+                                        </p:cTn>
+                                        <p:tgtEl>
+                                          <p:spTgt spid="12"/>
+                                        </p:tgtEl>
+                                        <p:attrNameLst>
+                                          <p:attrName>style.visibility</p:attrName>
+                                        </p:attrNameLst>
+                                      </p:cBhvr>
+                                      <p:to>
+                                        <p:strVal val="visible"/>
+                                      </p:to>
+                                    </p:set>
+                                    <p:animEffect transition="in" filter="fade">
+                                      <p:cBhvr>
+                                        <p:cTn id="7" dur="500"/>
+                                        <p:tgtEl>
+                                          <p:spTgt spid="12"/>
+                                        </p:tgtEl>
+                                      </p:cBhvr>
+                                    </p:animEffect>
+                                  </p:childTnLst>
+                                </p:cTn>
+                              </p:par>
+                            </p:childTnLst>
+                          </p:cTn>
+                        </p:par>
+                      </p:childTnLst>
+                    </p:cTn>
+                  </p:par>
+                  <p:par>
+                    <p:cTn id="8" fill="hold">
+                      <p:stCondLst>
+                        <p:cond delay="indefinite"/>
+                      </p:stCondLst>
+                      <p:childTnLst>
+                        <p:par>
+                          <p:cTn id="9" fill="hold">
+                            <p:stCondLst>
+                              <p:cond delay="0"/>
+                            </p:stCondLst>
+                            <p:childTnLst>
+                              <p:par>
+                                <p:cTn id="10" presetID="10" presetClass="entr" presetSubtype="0" fill="hold" nodeType="clickEffect">
+                                  <p:stCondLst>
+                                    <p:cond delay="0"/>
+                                  </p:stCondLst>
+                                  <p:childTnLst>
+                                    <p:set>
+                                      <p:cBhvr>
+                                        <p:cTn id="11" dur="1" fill="hold">
+                                          <p:stCondLst>
+                                            <p:cond delay="0"/>
+                                          </p:stCondLst>
+                                        </p:cTn>
+                                        <p:tgtEl>
+                                          <p:spTgt spid="3"/>
+                                        </p:tgtEl>
+                                        <p:attrNameLst>
+                                          <p:attrName>style.visibility</p:attrName>
+                                        </p:attrNameLst>
+                                      </p:cBhvr>
+                                      <p:to>
+                                        <p:strVal val="visible"/>
+                                      </p:to>
+                                    </p:set>
+                                    <p:animEffect transition="in" filter="fade">
+                                      <p:cBhvr>
+                                        <p:cTn id="12" dur="500"/>
+                                        <p:tgtEl>
+                                          <p:spTgt spid="3"/>
+                                        </p:tgtEl>
+                                      </p:cBhvr>
+                                    </p:animEffect>
+                                  </p:childTnLst>
+                                </p:cTn>
+                              </p:par>
+                            </p:childTnLst>
+                          </p:cTn>
+                        </p:par>
+                      </p:childTnLst>
+                    </p:cTn>
+                  </p:par>
+                </p:childTnLst>
+              </p:cTn>
+              <p:prevCondLst>
+                <p:cond evt="onPrev" delay="0">
+                  <p:tgtEl>
+                    <p:sldTgt/>
+                  </p:tgtEl>
+                </p:cond>
+              </p:prevCondLst>
+              <p:nextCondLst>
+                <p:cond evt="onNext" delay="0">
+                  <p:tgtEl>
+                    <p:sldTgt/>
+                  </p:tgtEl>
+                </p:cond>
+              </p:nextCondLst>
+            </p:seq>
+          </p:childTnLst>
+        </p:cTn>
+      </p:par>
+    </p:tnLst>
+  </p:timing>
+</p:sld>
+</file>
+
+<file path=ppt/slides/slide5.xml><?xml version="1.0" encoding="utf-8"?>
+<p:sld xmlns:a="http://schemas.openxmlformats.org/drawingml/2006/main" xmlns:r="http://schemas.openxmlformats.org/officeDocument/2006/relationships" xmlns:p="http://schemas.openxmlformats.org/presentationml/2006/main">
+  <p:cSld>
+    <p:spTree>
+      <p:nvGrpSpPr>
+        <p:cNvPr id="1" name=""/>
+        <p:cNvGrpSpPr/>
+        <p:nvPr/>
+      </p:nvGrpSpPr>
+      <p:grpSpPr>
+        <a:xfrm>
+          <a:off x="0" y="0"/>
+          <a:ext cx="0" cy="0"/>
+          <a:chOff x="0" y="0"/>
+          <a:chExt cx="0" cy="0"/>
+        </a:xfrm>
+      </p:grpSpPr>
+      <p:sp>
+        <p:nvSpPr>
+          <p:cNvPr id="32" name="CasellaDiTesto 31">
+            <a:extLst>
+              <a:ext uri="{FF2B5EF4-FFF2-40B4-BE49-F238E27FC236}">
+                <a16:creationId xmlns:a16="http://schemas.microsoft.com/office/drawing/2014/main" id="{70D898C2-42B9-BEBA-4301-4D24331121CC}"/>
+              </a:ext>
+            </a:extLst>
+          </p:cNvPr>
+          <p:cNvSpPr txBox="1"/>
+          <p:nvPr/>
+        </p:nvSpPr>
+        <p:spPr>
+          <a:xfrm>
+            <a:off x="6909271" y="1508304"/>
+            <a:ext cx="1762126" cy="923330"/>
+          </a:xfrm>
+          <a:prstGeom prst="rect">
+            <a:avLst/>
+          </a:prstGeom>
+          <a:solidFill>
+            <a:schemeClr val="bg1"/>
+          </a:solidFill>
+          <a:ln w="28575">
+            <a:solidFill>
+              <a:srgbClr val="00B050"/>
+            </a:solidFill>
+          </a:ln>
+        </p:spPr>
+        <p:txBody>
+          <a:bodyPr wrap="square" rtlCol="0">
+            <a:spAutoFit/>
+          </a:bodyPr>
+          <a:lstStyle/>
+          <a:p>
+            <a:pPr algn="ctr"/>
+            <a:r>
+              <a:rPr lang="it-IT" b="1" dirty="0" err="1">
+                <a:latin typeface="Georgia" panose="02040502050405020303" pitchFamily="18" charset="0"/>
+              </a:rPr>
+              <a:t>Fully</a:t>
+            </a:r>
+            <a:endParaRPr lang="it-IT" b="1" dirty="0">
+              <a:latin typeface="Georgia" panose="02040502050405020303" pitchFamily="18" charset="0"/>
+            </a:endParaRPr>
+          </a:p>
+          <a:p>
+            <a:pPr algn="ctr"/>
+            <a:r>
+              <a:rPr lang="it-IT" b="1" dirty="0" err="1">
+                <a:latin typeface="Georgia" panose="02040502050405020303" pitchFamily="18" charset="0"/>
+              </a:rPr>
+              <a:t>Connected</a:t>
+            </a:r>
+            <a:r>
+              <a:rPr lang="it-IT" b="1" dirty="0">
+                <a:latin typeface="Georgia" panose="02040502050405020303" pitchFamily="18" charset="0"/>
+              </a:rPr>
+              <a:t> Layer</a:t>
+            </a:r>
+          </a:p>
+        </p:txBody>
+      </p:sp>
+      <p:sp>
+        <p:nvSpPr>
+          <p:cNvPr id="9" name="CasellaDiTesto 8">
+            <a:extLst>
+              <a:ext uri="{FF2B5EF4-FFF2-40B4-BE49-F238E27FC236}">
+                <a16:creationId xmlns:a16="http://schemas.microsoft.com/office/drawing/2014/main" id="{7E9199C7-12B3-5641-DBCB-8D272DD448E0}"/>
+              </a:ext>
+            </a:extLst>
+          </p:cNvPr>
+          <p:cNvSpPr txBox="1"/>
+          <p:nvPr/>
+        </p:nvSpPr>
+        <p:spPr>
+          <a:xfrm>
+            <a:off x="6909271" y="1508305"/>
+            <a:ext cx="1762126" cy="923330"/>
+          </a:xfrm>
+          <a:prstGeom prst="rect">
+            <a:avLst/>
+          </a:prstGeom>
+          <a:solidFill>
+            <a:srgbClr val="FFC000"/>
+          </a:solidFill>
+          <a:ln w="28575">
+            <a:solidFill>
+              <a:srgbClr val="00B050"/>
+            </a:solidFill>
+          </a:ln>
+        </p:spPr>
+        <p:txBody>
+          <a:bodyPr wrap="square" rtlCol="0">
+            <a:spAutoFit/>
+          </a:bodyPr>
+          <a:lstStyle/>
+          <a:p>
+            <a:pPr algn="ctr"/>
+            <a:r>
+              <a:rPr lang="it-IT" b="1" dirty="0" err="1">
+                <a:latin typeface="Georgia" panose="02040502050405020303" pitchFamily="18" charset="0"/>
+              </a:rPr>
+              <a:t>Fully</a:t>
+            </a:r>
+            <a:endParaRPr lang="it-IT" b="1" dirty="0">
+              <a:latin typeface="Georgia" panose="02040502050405020303" pitchFamily="18" charset="0"/>
+            </a:endParaRPr>
+          </a:p>
+          <a:p>
+            <a:pPr algn="ctr"/>
+            <a:r>
+              <a:rPr lang="it-IT" b="1" dirty="0" err="1">
+                <a:latin typeface="Georgia" panose="02040502050405020303" pitchFamily="18" charset="0"/>
+              </a:rPr>
+              <a:t>Connected</a:t>
+            </a:r>
+            <a:r>
+              <a:rPr lang="it-IT" b="1" dirty="0">
+                <a:latin typeface="Georgia" panose="02040502050405020303" pitchFamily="18" charset="0"/>
+              </a:rPr>
+              <a:t> Layer</a:t>
+            </a:r>
+          </a:p>
+        </p:txBody>
+      </p:sp>
+      <p:pic>
+        <p:nvPicPr>
+          <p:cNvPr id="14" name="Immagine 13">
+            <a:extLst>
+              <a:ext uri="{FF2B5EF4-FFF2-40B4-BE49-F238E27FC236}">
+                <a16:creationId xmlns:a16="http://schemas.microsoft.com/office/drawing/2014/main" id="{78E17394-287E-490E-D376-E8834094CBCA}"/>
+              </a:ext>
+            </a:extLst>
+          </p:cNvPr>
+          <p:cNvPicPr>
+            <a:picLocks noChangeAspect="1"/>
+          </p:cNvPicPr>
+          <p:nvPr/>
+        </p:nvPicPr>
+        <p:blipFill>
+          <a:blip r:embed="rId2">
+            <a:extLst>
+              <a:ext uri="{28A0092B-C50C-407E-A947-70E740481C1C}">
+                <a14:useLocalDpi xmlns:a14="http://schemas.microsoft.com/office/drawing/2010/main" val="0"/>
+              </a:ext>
+            </a:extLst>
+          </a:blip>
+          <a:stretch>
+            <a:fillRect/>
+          </a:stretch>
+        </p:blipFill>
+        <p:spPr>
+          <a:xfrm>
+            <a:off x="45435" y="-78508"/>
+            <a:ext cx="3421677" cy="3002540"/>
           </a:xfrm>
           <a:prstGeom prst="rect">
             <a:avLst/>
@@ -11560,7 +15467,7 @@
         </p:nvSpPr>
         <p:spPr>
           <a:xfrm>
-            <a:off x="3396866" y="2325957"/>
+            <a:off x="3261802" y="1662546"/>
             <a:ext cx="1907581" cy="646331"/>
           </a:xfrm>
           <a:prstGeom prst="rect">
@@ -11592,17 +15499,17 @@
               <a:rPr lang="it-IT" b="1" dirty="0">
                 <a:latin typeface="Georgia" panose="02040502050405020303" pitchFamily="18" charset="0"/>
               </a:rPr>
-              <a:t> Network</a:t>
+              <a:t> Layer</a:t>
             </a:r>
           </a:p>
         </p:txBody>
       </p:sp>
       <p:sp>
         <p:nvSpPr>
-          <p:cNvPr id="32" name="CasellaDiTesto 31">
+          <p:cNvPr id="11" name="CasellaDiTesto 10">
             <a:extLst>
               <a:ext uri="{FF2B5EF4-FFF2-40B4-BE49-F238E27FC236}">
-                <a16:creationId xmlns:a16="http://schemas.microsoft.com/office/drawing/2014/main" id="{70D898C2-42B9-BEBA-4301-4D24331121CC}"/>
+                <a16:creationId xmlns:a16="http://schemas.microsoft.com/office/drawing/2014/main" id="{1033E41D-1CA6-7FC2-41B2-5370161DD731}"/>
               </a:ext>
             </a:extLst>
           </p:cNvPr>
@@ -11611,14 +15518,14 @@
         </p:nvSpPr>
         <p:spPr>
           <a:xfrm>
-            <a:off x="6863089" y="2187457"/>
-            <a:ext cx="1762126" cy="923330"/>
+            <a:off x="3261802" y="1662546"/>
+            <a:ext cx="1907581" cy="646331"/>
           </a:xfrm>
           <a:prstGeom prst="rect">
             <a:avLst/>
           </a:prstGeom>
           <a:solidFill>
-            <a:schemeClr val="bg1"/>
+            <a:srgbClr val="FFC000"/>
           </a:solidFill>
           <a:ln w="28575">
             <a:solidFill>
@@ -11637,25 +15544,13 @@
               <a:rPr lang="it-IT" b="1" dirty="0" err="1">
                 <a:latin typeface="Georgia" panose="02040502050405020303" pitchFamily="18" charset="0"/>
               </a:rPr>
-              <a:t>Fully</a:t>
-            </a:r>
-            <a:endParaRPr lang="it-IT" b="1" dirty="0">
-              <a:latin typeface="Georgia" panose="02040502050405020303" pitchFamily="18" charset="0"/>
-            </a:endParaRPr>
-          </a:p>
-          <a:p>
-            <a:pPr algn="ctr"/>
-            <a:r>
-              <a:rPr lang="it-IT" b="1" dirty="0" err="1">
-                <a:latin typeface="Georgia" panose="02040502050405020303" pitchFamily="18" charset="0"/>
-              </a:rPr>
-              <a:t>Connected</a:t>
+              <a:t>Convolutional</a:t>
             </a:r>
             <a:r>
               <a:rPr lang="it-IT" b="1" dirty="0">
                 <a:latin typeface="Georgia" panose="02040502050405020303" pitchFamily="18" charset="0"/>
               </a:rPr>
-              <a:t> Network</a:t>
+              <a:t> Layer</a:t>
             </a:r>
           </a:p>
         </p:txBody>
@@ -11688,128 +15583,14 @@
         </p:blipFill>
         <p:spPr>
           <a:xfrm>
-            <a:off x="8731154" y="2058893"/>
-            <a:ext cx="3129158" cy="1180461"/>
+            <a:off x="9042401" y="1508304"/>
+            <a:ext cx="2605476" cy="982904"/>
           </a:xfrm>
           <a:prstGeom prst="rect">
             <a:avLst/>
           </a:prstGeom>
         </p:spPr>
       </p:pic>
-      <p:sp>
-        <p:nvSpPr>
-          <p:cNvPr id="9" name="CasellaDiTesto 8">
-            <a:extLst>
-              <a:ext uri="{FF2B5EF4-FFF2-40B4-BE49-F238E27FC236}">
-                <a16:creationId xmlns:a16="http://schemas.microsoft.com/office/drawing/2014/main" id="{7E9199C7-12B3-5641-DBCB-8D272DD448E0}"/>
-              </a:ext>
-            </a:extLst>
-          </p:cNvPr>
-          <p:cNvSpPr txBox="1"/>
-          <p:nvPr/>
-        </p:nvSpPr>
-        <p:spPr>
-          <a:xfrm>
-            <a:off x="6863089" y="2187458"/>
-            <a:ext cx="1762126" cy="923330"/>
-          </a:xfrm>
-          <a:prstGeom prst="rect">
-            <a:avLst/>
-          </a:prstGeom>
-          <a:solidFill>
-            <a:srgbClr val="FFC000"/>
-          </a:solidFill>
-          <a:ln w="28575">
-            <a:solidFill>
-              <a:srgbClr val="00B050"/>
-            </a:solidFill>
-          </a:ln>
-        </p:spPr>
-        <p:txBody>
-          <a:bodyPr wrap="square" rtlCol="0">
-            <a:spAutoFit/>
-          </a:bodyPr>
-          <a:lstStyle/>
-          <a:p>
-            <a:pPr algn="ctr"/>
-            <a:r>
-              <a:rPr lang="it-IT" b="1" dirty="0" err="1">
-                <a:latin typeface="Georgia" panose="02040502050405020303" pitchFamily="18" charset="0"/>
-              </a:rPr>
-              <a:t>Fully</a:t>
-            </a:r>
-            <a:endParaRPr lang="it-IT" b="1" dirty="0">
-              <a:latin typeface="Georgia" panose="02040502050405020303" pitchFamily="18" charset="0"/>
-            </a:endParaRPr>
-          </a:p>
-          <a:p>
-            <a:pPr algn="ctr"/>
-            <a:r>
-              <a:rPr lang="it-IT" b="1" dirty="0" err="1">
-                <a:latin typeface="Georgia" panose="02040502050405020303" pitchFamily="18" charset="0"/>
-              </a:rPr>
-              <a:t>Connected</a:t>
-            </a:r>
-            <a:r>
-              <a:rPr lang="it-IT" b="1" dirty="0">
-                <a:latin typeface="Georgia" panose="02040502050405020303" pitchFamily="18" charset="0"/>
-              </a:rPr>
-              <a:t> Network</a:t>
-            </a:r>
-          </a:p>
-        </p:txBody>
-      </p:sp>
-      <p:sp>
-        <p:nvSpPr>
-          <p:cNvPr id="11" name="CasellaDiTesto 10">
-            <a:extLst>
-              <a:ext uri="{FF2B5EF4-FFF2-40B4-BE49-F238E27FC236}">
-                <a16:creationId xmlns:a16="http://schemas.microsoft.com/office/drawing/2014/main" id="{1033E41D-1CA6-7FC2-41B2-5370161DD731}"/>
-              </a:ext>
-            </a:extLst>
-          </p:cNvPr>
-          <p:cNvSpPr txBox="1"/>
-          <p:nvPr/>
-        </p:nvSpPr>
-        <p:spPr>
-          <a:xfrm>
-            <a:off x="3396866" y="2325957"/>
-            <a:ext cx="1907581" cy="646331"/>
-          </a:xfrm>
-          <a:prstGeom prst="rect">
-            <a:avLst/>
-          </a:prstGeom>
-          <a:solidFill>
-            <a:srgbClr val="FFC000"/>
-          </a:solidFill>
-          <a:ln w="28575">
-            <a:solidFill>
-              <a:srgbClr val="00B050"/>
-            </a:solidFill>
-          </a:ln>
-        </p:spPr>
-        <p:txBody>
-          <a:bodyPr wrap="square" rtlCol="0">
-            <a:spAutoFit/>
-          </a:bodyPr>
-          <a:lstStyle/>
-          <a:p>
-            <a:pPr algn="ctr"/>
-            <a:r>
-              <a:rPr lang="it-IT" b="1" dirty="0" err="1">
-                <a:latin typeface="Georgia" panose="02040502050405020303" pitchFamily="18" charset="0"/>
-              </a:rPr>
-              <a:t>Convolutional</a:t>
-            </a:r>
-            <a:r>
-              <a:rPr lang="it-IT" b="1" dirty="0">
-                <a:latin typeface="Georgia" panose="02040502050405020303" pitchFamily="18" charset="0"/>
-              </a:rPr>
-              <a:t> Network</a:t>
-            </a:r>
-          </a:p>
-        </p:txBody>
-      </p:sp>
       <p:grpSp>
         <p:nvGrpSpPr>
           <p:cNvPr id="13" name="Gruppo 12">
@@ -11824,10 +15605,10 @@
         </p:nvGrpSpPr>
         <p:grpSpPr>
           <a:xfrm>
-            <a:off x="3983945" y="151815"/>
-            <a:ext cx="4224109" cy="1001551"/>
+            <a:off x="3983945" y="148478"/>
+            <a:ext cx="4224109" cy="930431"/>
             <a:chOff x="7634679" y="1303727"/>
-            <a:chExt cx="4224109" cy="1001551"/>
+            <a:chExt cx="4224109" cy="930431"/>
           </a:xfrm>
         </p:grpSpPr>
         <p:sp>
@@ -11899,7 +15680,7 @@
           </p:nvSpPr>
           <p:spPr>
             <a:xfrm>
-              <a:off x="8334164" y="1935946"/>
+              <a:off x="8334164" y="1864826"/>
               <a:ext cx="1110265" cy="369332"/>
             </a:xfrm>
             <a:prstGeom prst="rect">
@@ -12011,7 +15792,7 @@
           </p:nvSpPr>
           <p:spPr>
             <a:xfrm>
-              <a:off x="10096662" y="1935769"/>
+              <a:off x="10096662" y="1864649"/>
               <a:ext cx="1762126" cy="369332"/>
             </a:xfrm>
             <a:prstGeom prst="rect">
@@ -12076,7 +15857,7 @@
           <p:spPr>
             <a:xfrm flipH="1">
               <a:off x="10977725" y="1676396"/>
-              <a:ext cx="1" cy="259373"/>
+              <a:ext cx="1" cy="188253"/>
             </a:xfrm>
             <a:prstGeom prst="straightConnector1">
               <a:avLst/>
@@ -12118,7 +15899,7 @@
           </p:nvCxnSpPr>
           <p:spPr>
             <a:xfrm flipH="1">
-              <a:off x="9444429" y="2120435"/>
+              <a:off x="9444429" y="2049315"/>
               <a:ext cx="652233" cy="177"/>
             </a:xfrm>
             <a:prstGeom prst="straightConnector1">
@@ -12201,13 +15982,13 @@
           </p:nvCxnSpPr>
           <p:spPr>
             <a:xfrm rot="16200000" flipV="1">
-              <a:off x="8663341" y="1709989"/>
-              <a:ext cx="447553" cy="4361"/>
+              <a:off x="8698901" y="1674429"/>
+              <a:ext cx="376433" cy="4361"/>
             </a:xfrm>
             <a:prstGeom prst="bentConnector4">
               <a:avLst>
-                <a:gd name="adj1" fmla="val 29369"/>
-                <a:gd name="adj2" fmla="val 8545563"/>
+                <a:gd name="adj1" fmla="val 25471"/>
+                <a:gd name="adj2" fmla="val 6322701"/>
               </a:avLst>
             </a:prstGeom>
             <a:ln>
@@ -12343,7 +16124,7 @@
         </p:nvSpPr>
         <p:spPr>
           <a:xfrm>
-            <a:off x="4683430" y="780697"/>
+            <a:off x="4683430" y="708307"/>
             <a:ext cx="1110265" cy="369332"/>
           </a:xfrm>
           <a:prstGeom prst="rect">
@@ -12396,13 +16177,15 @@
               </a:ext>
             </a:extLst>
           </p:cNvPr>
-          <p:cNvCxnSpPr/>
+          <p:cNvCxnSpPr>
+            <a:cxnSpLocks/>
+          </p:cNvCxnSpPr>
           <p:nvPr/>
         </p:nvCxnSpPr>
         <p:spPr>
-          <a:xfrm>
-            <a:off x="6096000" y="1662546"/>
-            <a:ext cx="0" cy="4608945"/>
+          <a:xfrm flipH="1">
+            <a:off x="6080702" y="1662546"/>
+            <a:ext cx="15298" cy="5027814"/>
           </a:xfrm>
           <a:prstGeom prst="line">
             <a:avLst/>
@@ -12430,10 +16213,10 @@
       </p:cxnSp>
       <p:sp>
         <p:nvSpPr>
-          <p:cNvPr id="35" name="CasellaDiTesto 34">
+          <p:cNvPr id="6" name="CasellaDiTesto 5">
             <a:extLst>
               <a:ext uri="{FF2B5EF4-FFF2-40B4-BE49-F238E27FC236}">
-                <a16:creationId xmlns:a16="http://schemas.microsoft.com/office/drawing/2014/main" id="{91067565-CA67-5BD1-AED2-DCC99432F156}"/>
+                <a16:creationId xmlns:a16="http://schemas.microsoft.com/office/drawing/2014/main" id="{0FAEFBE3-51A2-FE80-8C2B-094629BEEB1D}"/>
               </a:ext>
             </a:extLst>
           </p:cNvPr>
@@ -12442,8 +16225,8 @@
         </p:nvSpPr>
         <p:spPr>
           <a:xfrm>
-            <a:off x="6119811" y="4244784"/>
-            <a:ext cx="6164580" cy="2031325"/>
+            <a:off x="6200254" y="2912831"/>
+            <a:ext cx="6032421" cy="4247317"/>
           </a:xfrm>
           <a:prstGeom prst="rect">
             <a:avLst/>
@@ -12451,7 +16234,7 @@
           <a:noFill/>
         </p:spPr>
         <p:txBody>
-          <a:bodyPr wrap="square" rtlCol="0">
+          <a:bodyPr wrap="none" rtlCol="0">
             <a:spAutoFit/>
           </a:bodyPr>
           <a:lstStyle/>
@@ -12461,54 +16244,42 @@
               <a:buChar char="•"/>
             </a:pPr>
             <a:r>
-              <a:rPr lang="it-IT" dirty="0"/>
-              <a:t>Every </a:t>
-            </a:r>
-            <a:r>
-              <a:rPr lang="it-IT" dirty="0" err="1"/>
-              <a:t>neuron</a:t>
-            </a:r>
-            <a:r>
-              <a:rPr lang="it-IT" dirty="0"/>
-              <a:t> </a:t>
-            </a:r>
-            <a:r>
-              <a:rPr lang="it-IT" dirty="0" err="1"/>
-              <a:t>is</a:t>
-            </a:r>
-            <a:r>
-              <a:rPr lang="it-IT" dirty="0"/>
-              <a:t> </a:t>
-            </a:r>
-            <a:r>
-              <a:rPr lang="it-IT" dirty="0" err="1"/>
-              <a:t>connected</a:t>
-            </a:r>
-            <a:r>
-              <a:rPr lang="it-IT" dirty="0"/>
-              <a:t> to </a:t>
-            </a:r>
-            <a:r>
-              <a:rPr lang="it-IT" dirty="0" err="1"/>
-              <a:t>each</a:t>
-            </a:r>
-            <a:r>
-              <a:rPr lang="it-IT" dirty="0"/>
-              <a:t> of the </a:t>
-            </a:r>
-            <a:r>
-              <a:rPr lang="it-IT" dirty="0" err="1"/>
-              <a:t>previous</a:t>
-            </a:r>
-            <a:r>
-              <a:rPr lang="it-IT" dirty="0"/>
-              <a:t> </a:t>
-            </a:r>
-            <a:r>
-              <a:rPr lang="it-IT" dirty="0" err="1"/>
-              <a:t>layer</a:t>
-            </a:r>
-            <a:endParaRPr lang="it-IT" dirty="0"/>
+              <a:rPr lang="en-US" b="1" dirty="0"/>
+              <a:t>Global connectivity</a:t>
+            </a:r>
+          </a:p>
+          <a:p>
+            <a:r>
+              <a:rPr lang="en-US" dirty="0"/>
+              <a:t>Every unit is connected to </a:t>
+            </a:r>
+            <a:r>
+              <a:rPr lang="en-US" b="1" dirty="0">
+                <a:solidFill>
+                  <a:schemeClr val="accent3">
+                    <a:lumMod val="60000"/>
+                    <a:lumOff val="40000"/>
+                  </a:schemeClr>
+                </a:solidFill>
+              </a:rPr>
+              <a:t>all ones </a:t>
+            </a:r>
+            <a:r>
+              <a:rPr lang="en-US" dirty="0"/>
+              <a:t>in the previous layer</a:t>
+            </a:r>
+          </a:p>
+          <a:p>
+            <a:endParaRPr lang="en-US" sz="600" dirty="0"/>
+          </a:p>
+          <a:p>
+            <a:endParaRPr lang="en-US" sz="600" dirty="0"/>
+          </a:p>
+          <a:p>
+            <a:endParaRPr lang="en-US" sz="600" dirty="0"/>
+          </a:p>
+          <a:p>
+            <a:endParaRPr lang="en-US" sz="600" dirty="0"/>
           </a:p>
           <a:p>
             <a:pPr marL="285750" indent="-285750">
@@ -12516,45 +16287,21 @@
               <a:buChar char="•"/>
             </a:pPr>
             <a:r>
-              <a:rPr lang="it-IT" dirty="0"/>
-              <a:t>No relations </a:t>
-            </a:r>
-            <a:r>
-              <a:rPr lang="it-IT" dirty="0" err="1"/>
-              <a:t>differences</a:t>
-            </a:r>
-            <a:r>
-              <a:rPr lang="it-IT" dirty="0"/>
-              <a:t> </a:t>
-            </a:r>
-            <a:r>
-              <a:rPr lang="it-IT" dirty="0" err="1"/>
-              <a:t>between</a:t>
-            </a:r>
-            <a:r>
-              <a:rPr lang="it-IT" dirty="0"/>
-              <a:t> </a:t>
-            </a:r>
-            <a:r>
-              <a:rPr lang="it-IT" dirty="0" err="1"/>
-              <a:t>neurons</a:t>
-            </a:r>
-            <a:r>
-              <a:rPr lang="it-IT" dirty="0"/>
-              <a:t>, no </a:t>
-            </a:r>
-            <a:r>
-              <a:rPr lang="it-IT" dirty="0" err="1"/>
-              <a:t>structure</a:t>
-            </a:r>
-            <a:r>
-              <a:rPr lang="it-IT" dirty="0"/>
-              <a:t> in the network (</a:t>
-            </a:r>
+              <a:rPr lang="en-US" b="1" dirty="0"/>
+              <a:t>No structure assumptions</a:t>
+            </a:r>
+          </a:p>
+          <a:p>
             <a:r>
               <a:rPr lang="en-US" dirty="0"/>
-              <a:t>we do not know anything in advance about how the individual elements might relate to each other.)</a:t>
-            </a:r>
+              <a:t>The model does not assume local relationships of inputs</a:t>
+            </a:r>
+          </a:p>
+          <a:p>
+            <a:endParaRPr lang="it-IT" sz="600" dirty="0"/>
+          </a:p>
+          <a:p>
+            <a:endParaRPr lang="it-IT" sz="600" dirty="0"/>
           </a:p>
           <a:p>
             <a:pPr marL="285750" indent="-285750">
@@ -12562,9 +16309,50 @@
               <a:buChar char="•"/>
             </a:pPr>
             <a:r>
+              <a:rPr lang="en-US" b="1" dirty="0"/>
+              <a:t>Sensitive to input ordering</a:t>
+            </a:r>
+          </a:p>
+          <a:p>
+            <a:r>
               <a:rPr lang="en-US" dirty="0"/>
-              <a:t>If we permute two elements, the result is the same</a:t>
-            </a:r>
+              <a:t>Changing the </a:t>
+            </a:r>
+            <a:r>
+              <a:rPr lang="en-US" b="1" dirty="0">
+                <a:solidFill>
+                  <a:schemeClr val="accent3">
+                    <a:lumMod val="60000"/>
+                    <a:lumOff val="40000"/>
+                  </a:schemeClr>
+                </a:solidFill>
+              </a:rPr>
+              <a:t>order</a:t>
+            </a:r>
+            <a:r>
+              <a:rPr lang="en-US" dirty="0"/>
+              <a:t> of input features </a:t>
+            </a:r>
+            <a:r>
+              <a:rPr lang="en-US" b="1" dirty="0">
+                <a:solidFill>
+                  <a:schemeClr val="accent3">
+                    <a:lumMod val="60000"/>
+                    <a:lumOff val="40000"/>
+                  </a:schemeClr>
+                </a:solidFill>
+              </a:rPr>
+              <a:t>changes the result</a:t>
+            </a:r>
+          </a:p>
+          <a:p>
+            <a:endParaRPr lang="it-IT" sz="600" dirty="0"/>
+          </a:p>
+          <a:p>
+            <a:endParaRPr lang="it-IT" sz="600" dirty="0"/>
+          </a:p>
+          <a:p>
+            <a:endParaRPr lang="it-IT" sz="600" dirty="0"/>
           </a:p>
           <a:p>
             <a:pPr marL="285750" indent="-285750">
@@ -12572,19 +16360,88 @@
               <a:buChar char="•"/>
             </a:pPr>
             <a:r>
+              <a:rPr lang="en-US" b="1" dirty="0"/>
+              <a:t>Feature learning is global</a:t>
+            </a:r>
+          </a:p>
+          <a:p>
+            <a:r>
               <a:rPr lang="en-US" dirty="0"/>
-              <a:t>Good for (these cases of applications)</a:t>
-            </a:r>
+              <a:t>Each neuron mixes information from the </a:t>
+            </a:r>
+            <a:r>
+              <a:rPr lang="en-US" b="1" dirty="0">
+                <a:solidFill>
+                  <a:srgbClr val="00B0F0"/>
+                </a:solidFill>
+              </a:rPr>
+              <a:t>entire input</a:t>
+            </a:r>
+            <a:endParaRPr lang="it-IT" sz="600" b="1" dirty="0">
+              <a:solidFill>
+                <a:srgbClr val="00B0F0"/>
+              </a:solidFill>
+            </a:endParaRPr>
+          </a:p>
+          <a:p>
+            <a:endParaRPr lang="it-IT" sz="600" b="1" dirty="0">
+              <a:solidFill>
+                <a:schemeClr val="accent3">
+                  <a:lumMod val="60000"/>
+                  <a:lumOff val="40000"/>
+                </a:schemeClr>
+              </a:solidFill>
+            </a:endParaRPr>
+          </a:p>
+          <a:p>
+            <a:endParaRPr lang="it-IT" sz="600" b="1" dirty="0">
+              <a:solidFill>
+                <a:schemeClr val="accent3">
+                  <a:lumMod val="60000"/>
+                  <a:lumOff val="40000"/>
+                </a:schemeClr>
+              </a:solidFill>
+            </a:endParaRPr>
+          </a:p>
+          <a:p>
+            <a:pPr marL="285750" indent="-285750">
+              <a:buFont typeface="Arial" panose="020B0604020202020204" pitchFamily="34" charset="0"/>
+              <a:buChar char="•"/>
+            </a:pPr>
+            <a:r>
+              <a:rPr lang="en-US" b="1" dirty="0"/>
+              <a:t>Large number of parameters</a:t>
+            </a:r>
+          </a:p>
+          <a:p>
+            <a:r>
+              <a:rPr lang="en-US" dirty="0"/>
+              <a:t>Poor with </a:t>
+            </a:r>
+            <a:r>
+              <a:rPr lang="en-US" b="1" dirty="0">
+                <a:solidFill>
+                  <a:srgbClr val="00B0F0"/>
+                </a:solidFill>
+              </a:rPr>
+              <a:t>high-dimensional</a:t>
+            </a:r>
+            <a:r>
+              <a:rPr lang="en-US" dirty="0"/>
+              <a:t> inputs (e.g., images) </a:t>
+            </a:r>
+          </a:p>
+          <a:p>
             <a:endParaRPr lang="it-IT" dirty="0"/>
           </a:p>
         </p:txBody>
       </p:sp>
       <p:sp>
         <p:nvSpPr>
-          <p:cNvPr id="37" name="CasellaDiTesto 36">
+          <p:cNvPr id="8" name="CasellaDiTesto 7">
             <a:extLst>
               <a:ext uri="{FF2B5EF4-FFF2-40B4-BE49-F238E27FC236}">
-                <a16:creationId xmlns:a16="http://schemas.microsoft.com/office/drawing/2014/main" id="{C8D2ABF1-8EBC-A899-7416-C16EAB43238D}"/>
+                <a16:creationId xmlns:a16="http://schemas.microsoft.com/office/drawing/2014/main" id="{36072CD2-67DF-082F-659D-A44B66FF0DE9}"/>
               </a:ext>
             </a:extLst>
           </p:cNvPr>
@@ -12593,8 +16450,8 @@
         </p:nvSpPr>
         <p:spPr>
           <a:xfrm>
-            <a:off x="56012" y="4320423"/>
-            <a:ext cx="6063799" cy="2031325"/>
+            <a:off x="-9427" y="2912831"/>
+            <a:ext cx="6090129" cy="3831818"/>
           </a:xfrm>
           <a:prstGeom prst="rect">
             <a:avLst/>
@@ -12602,7 +16459,7 @@
           <a:noFill/>
         </p:spPr>
         <p:txBody>
-          <a:bodyPr wrap="square">
+          <a:bodyPr wrap="none" rtlCol="0">
             <a:spAutoFit/>
           </a:bodyPr>
           <a:lstStyle/>
@@ -12612,62 +16469,43 @@
               <a:buChar char="•"/>
             </a:pPr>
             <a:r>
-              <a:rPr lang="it-IT" dirty="0"/>
-              <a:t>Every </a:t>
-            </a:r>
-            <a:r>
-              <a:rPr lang="it-IT" dirty="0" err="1"/>
-              <a:t>neuron</a:t>
-            </a:r>
-            <a:r>
-              <a:rPr lang="it-IT" dirty="0"/>
-              <a:t> </a:t>
-            </a:r>
-            <a:r>
-              <a:rPr lang="it-IT" dirty="0" err="1"/>
-              <a:t>is</a:t>
-            </a:r>
-            <a:r>
-              <a:rPr lang="it-IT" dirty="0"/>
-              <a:t> </a:t>
-            </a:r>
-            <a:r>
-              <a:rPr lang="it-IT" dirty="0" err="1"/>
-              <a:t>connected</a:t>
-            </a:r>
-            <a:r>
-              <a:rPr lang="it-IT" dirty="0"/>
-              <a:t> </a:t>
-            </a:r>
-            <a:r>
-              <a:rPr lang="it-IT" dirty="0" err="1"/>
-              <a:t>only</a:t>
-            </a:r>
-            <a:r>
-              <a:rPr lang="it-IT" dirty="0"/>
-              <a:t> to a part of </a:t>
-            </a:r>
-            <a:r>
-              <a:rPr lang="it-IT" dirty="0" err="1"/>
-              <a:t>neurons</a:t>
-            </a:r>
-            <a:r>
-              <a:rPr lang="it-IT" dirty="0"/>
-              <a:t> of the </a:t>
-            </a:r>
-            <a:r>
-              <a:rPr lang="it-IT" dirty="0" err="1"/>
-              <a:t>previous</a:t>
-            </a:r>
-            <a:r>
-              <a:rPr lang="it-IT" dirty="0"/>
-              <a:t> </a:t>
-            </a:r>
-            <a:r>
-              <a:rPr lang="it-IT" dirty="0" err="1"/>
-              <a:t>layer</a:t>
-            </a:r>
-            <a:endParaRPr lang="it-IT" dirty="0"/>
+              <a:rPr lang="en-US" b="1" dirty="0"/>
+              <a:t>Local connectivity </a:t>
+            </a:r>
+            <a:r>
+              <a:rPr lang="en-US" dirty="0"/>
+              <a:t>(receptive fields)</a:t>
+            </a:r>
+          </a:p>
+          <a:p>
+            <a:r>
+              <a:rPr lang="en-US" dirty="0"/>
+              <a:t>Each unit is connected only to a </a:t>
+            </a:r>
+            <a:r>
+              <a:rPr lang="en-US" b="1" dirty="0">
+                <a:solidFill>
+                  <a:schemeClr val="accent3">
+                    <a:lumMod val="60000"/>
+                    <a:lumOff val="40000"/>
+                  </a:schemeClr>
+                </a:solidFill>
+              </a:rPr>
+              <a:t>local region </a:t>
+            </a:r>
+            <a:r>
+              <a:rPr lang="en-US" dirty="0"/>
+              <a:t>of the input </a:t>
+            </a:r>
+          </a:p>
+          <a:p>
+            <a:r>
+              <a:rPr lang="en-US" dirty="0"/>
+              <a:t>(Assumes nearby elements (ex. pixels) are more related)</a:t>
+            </a:r>
+          </a:p>
+          <a:p>
+            <a:endParaRPr lang="en-US" sz="600" dirty="0"/>
           </a:p>
           <a:p>
             <a:pPr marL="285750" indent="-285750">
@@ -12675,58 +16513,64 @@
               <a:buChar char="•"/>
             </a:pPr>
             <a:r>
-              <a:rPr lang="it-IT" dirty="0" err="1"/>
-              <a:t>There</a:t>
-            </a:r>
-            <a:r>
-              <a:rPr lang="it-IT" dirty="0"/>
-              <a:t> </a:t>
-            </a:r>
-            <a:r>
-              <a:rPr lang="it-IT" dirty="0" err="1"/>
-              <a:t>is</a:t>
-            </a:r>
-            <a:r>
-              <a:rPr lang="it-IT" dirty="0"/>
-              <a:t> a </a:t>
-            </a:r>
-            <a:r>
-              <a:rPr lang="it-IT" dirty="0" err="1"/>
-              <a:t>structure</a:t>
-            </a:r>
-            <a:r>
-              <a:rPr lang="it-IT" dirty="0"/>
-              <a:t> in the data: </a:t>
-            </a:r>
-            <a:r>
-              <a:rPr lang="it-IT" dirty="0" err="1"/>
-              <a:t>neurons</a:t>
-            </a:r>
-            <a:r>
-              <a:rPr lang="it-IT" dirty="0"/>
-              <a:t> close to </a:t>
-            </a:r>
-            <a:r>
-              <a:rPr lang="it-IT" dirty="0" err="1"/>
-              <a:t>each</a:t>
-            </a:r>
-            <a:r>
-              <a:rPr lang="it-IT" dirty="0"/>
-              <a:t> </a:t>
-            </a:r>
-            <a:r>
-              <a:rPr lang="it-IT" dirty="0" err="1"/>
-              <a:t>other</a:t>
-            </a:r>
-            <a:r>
-              <a:rPr lang="it-IT" dirty="0"/>
-              <a:t> are more </a:t>
-            </a:r>
-            <a:r>
-              <a:rPr lang="it-IT" dirty="0" err="1"/>
-              <a:t>related</a:t>
-            </a:r>
-            <a:endParaRPr lang="it-IT" dirty="0"/>
+              <a:rPr lang="en-US" b="1" dirty="0"/>
+              <a:t>Parameter sharing </a:t>
+            </a:r>
+            <a:r>
+              <a:rPr lang="en-US" dirty="0"/>
+              <a:t>(filters/</a:t>
+            </a:r>
+            <a:r>
+              <a:rPr lang="en-US" b="1" dirty="0">
+                <a:solidFill>
+                  <a:srgbClr val="FF0000"/>
+                </a:solidFill>
+              </a:rPr>
+              <a:t>kernels</a:t>
+            </a:r>
+            <a:r>
+              <a:rPr lang="en-US" dirty="0"/>
+              <a:t>)</a:t>
+            </a:r>
+          </a:p>
+          <a:p>
+            <a:r>
+              <a:rPr lang="en-US" dirty="0"/>
+              <a:t>The same </a:t>
+            </a:r>
+            <a:r>
+              <a:rPr lang="en-US" b="1" dirty="0">
+                <a:solidFill>
+                  <a:schemeClr val="accent3">
+                    <a:lumMod val="60000"/>
+                    <a:lumOff val="40000"/>
+                  </a:schemeClr>
+                </a:solidFill>
+              </a:rPr>
+              <a:t>weights</a:t>
+            </a:r>
+            <a:r>
+              <a:rPr lang="en-US" dirty="0"/>
+              <a:t> are </a:t>
+            </a:r>
+            <a:r>
+              <a:rPr lang="en-US" b="1" dirty="0">
+                <a:solidFill>
+                  <a:schemeClr val="accent3">
+                    <a:lumMod val="60000"/>
+                    <a:lumOff val="40000"/>
+                  </a:schemeClr>
+                </a:solidFill>
+              </a:rPr>
+              <a:t>reused</a:t>
+            </a:r>
+            <a:r>
+              <a:rPr lang="en-US" dirty="0"/>
+              <a:t> → fewer parameters </a:t>
+            </a:r>
+          </a:p>
+          <a:p>
+            <a:endParaRPr lang="en-US" sz="600" dirty="0"/>
           </a:p>
           <a:p>
             <a:pPr marL="285750" indent="-285750">
@@ -12734,72 +16578,26 @@
               <a:buChar char="•"/>
             </a:pPr>
             <a:r>
-              <a:rPr lang="it-IT" dirty="0"/>
-              <a:t>Permute </a:t>
-            </a:r>
-            <a:r>
-              <a:rPr lang="it-IT" dirty="0" err="1"/>
-              <a:t>two</a:t>
-            </a:r>
-            <a:r>
-              <a:rPr lang="it-IT" dirty="0"/>
+              <a:rPr lang="en-US" b="1" dirty="0"/>
+              <a:t>Translation “invariant”</a:t>
+            </a:r>
+          </a:p>
+          <a:p>
+            <a:r>
+              <a:rPr lang="en-US" dirty="0"/>
+              <a:t>When shifting input (e.g., moving an object in an image) </a:t>
+            </a:r>
+          </a:p>
+          <a:p>
+            <a:r>
+              <a:rPr lang="en-US" dirty="0"/>
+              <a:t>patterns can still be detected</a:t>
+            </a:r>
+          </a:p>
+          <a:p>
+            <a:r>
+              <a:rPr lang="en-US" sz="600" dirty="0"/>
               <a:t> </a:t>
-            </a:r>
-            <a:r>
-              <a:rPr lang="it-IT" dirty="0" err="1"/>
-              <a:t>elements</a:t>
-            </a:r>
-            <a:r>
-              <a:rPr lang="it-IT" dirty="0"/>
-              <a:t>: the </a:t>
-            </a:r>
-            <a:r>
-              <a:rPr lang="it-IT" dirty="0" err="1"/>
-              <a:t>meaning</a:t>
-            </a:r>
-            <a:r>
-              <a:rPr lang="it-IT" dirty="0"/>
-              <a:t> </a:t>
-            </a:r>
-            <a:r>
-              <a:rPr lang="it-IT" dirty="0" err="1"/>
-              <a:t>change</a:t>
-            </a:r>
-            <a:r>
-              <a:rPr lang="it-IT" dirty="0"/>
-              <a:t> (</a:t>
-            </a:r>
-            <a:r>
-              <a:rPr lang="it-IT" dirty="0" err="1"/>
-              <a:t>move</a:t>
-            </a:r>
-            <a:r>
-              <a:rPr lang="it-IT" dirty="0"/>
-              <a:t> pixel in image </a:t>
-            </a:r>
-            <a:r>
-              <a:rPr lang="it-IT" dirty="0" err="1"/>
-              <a:t>is</a:t>
-            </a:r>
-            <a:r>
-              <a:rPr lang="it-IT" dirty="0"/>
-              <a:t> </a:t>
-            </a:r>
-            <a:r>
-              <a:rPr lang="it-IT" dirty="0" err="1"/>
-              <a:t>not</a:t>
-            </a:r>
-            <a:r>
-              <a:rPr lang="it-IT" dirty="0"/>
-              <a:t> the </a:t>
-            </a:r>
-            <a:r>
-              <a:rPr lang="it-IT" dirty="0" err="1"/>
-              <a:t>same</a:t>
-            </a:r>
-            <a:r>
-              <a:rPr lang="it-IT" dirty="0"/>
-              <a:t> image)</a:t>
             </a:r>
           </a:p>
           <a:p>
@@ -12808,8 +16606,60 @@
               <a:buChar char="•"/>
             </a:pPr>
             <a:r>
-              <a:rPr lang="it-IT" dirty="0"/>
-              <a:t>Good for images</a:t>
+              <a:rPr lang="en-US" b="1" dirty="0"/>
+              <a:t>Hierarchical feature learning</a:t>
+            </a:r>
+          </a:p>
+          <a:p>
+            <a:r>
+              <a:rPr lang="en-US" dirty="0"/>
+              <a:t>Early layers detect simple </a:t>
+            </a:r>
+            <a:r>
+              <a:rPr lang="en-US" b="1" dirty="0">
+                <a:solidFill>
+                  <a:srgbClr val="00B0F0"/>
+                </a:solidFill>
+              </a:rPr>
+              <a:t>features </a:t>
+            </a:r>
+            <a:r>
+              <a:rPr lang="en-US" dirty="0"/>
+              <a:t>(an eye in an image) </a:t>
+            </a:r>
+          </a:p>
+          <a:p>
+            <a:r>
+              <a:rPr lang="en-US" dirty="0"/>
+              <a:t>Deep layers detect complex </a:t>
+            </a:r>
+            <a:r>
+              <a:rPr lang="en-US" b="1" dirty="0">
+                <a:solidFill>
+                  <a:srgbClr val="00B0F0"/>
+                </a:solidFill>
+              </a:rPr>
+              <a:t>patterns </a:t>
+            </a:r>
+            <a:r>
+              <a:rPr lang="en-US" dirty="0"/>
+              <a:t>(an entire person)</a:t>
+            </a:r>
+          </a:p>
+          <a:p>
+            <a:endParaRPr lang="en-US" sz="600" dirty="0"/>
+          </a:p>
+          <a:p>
+            <a:endParaRPr lang="en-US" sz="300" dirty="0"/>
+          </a:p>
+          <a:p>
+            <a:pPr marL="285750" indent="-285750">
+              <a:buFont typeface="Arial" panose="020B0604020202020204" pitchFamily="34" charset="0"/>
+              <a:buChar char="•"/>
+            </a:pPr>
+            <a:r>
+              <a:rPr lang="en-US" b="1" dirty="0"/>
+              <a:t>Much fewer parameters than fully connected layers</a:t>
             </a:r>
           </a:p>
         </p:txBody>
@@ -12985,249 +16835,6 @@
 </p:sld>
 </file>
 
-<file path=ppt/slides/slide5.xml><?xml version="1.0" encoding="utf-8"?>
-<p:sld xmlns:a="http://schemas.openxmlformats.org/drawingml/2006/main" xmlns:r="http://schemas.openxmlformats.org/officeDocument/2006/relationships" xmlns:p="http://schemas.openxmlformats.org/presentationml/2006/main">
-  <p:cSld>
-    <p:spTree>
-      <p:nvGrpSpPr>
-        <p:cNvPr id="1" name=""/>
-        <p:cNvGrpSpPr/>
-        <p:nvPr/>
-      </p:nvGrpSpPr>
-      <p:grpSpPr>
-        <a:xfrm>
-          <a:off x="0" y="0"/>
-          <a:ext cx="0" cy="0"/>
-          <a:chOff x="0" y="0"/>
-          <a:chExt cx="0" cy="0"/>
-        </a:xfrm>
-      </p:grpSpPr>
-      <p:pic>
-        <p:nvPicPr>
-          <p:cNvPr id="5" name="Immagine 4">
-            <a:extLst>
-              <a:ext uri="{FF2B5EF4-FFF2-40B4-BE49-F238E27FC236}">
-                <a16:creationId xmlns:a16="http://schemas.microsoft.com/office/drawing/2014/main" id="{19439E8E-69C0-D331-43E0-542CEEF937F9}"/>
-              </a:ext>
-            </a:extLst>
-          </p:cNvPr>
-          <p:cNvPicPr>
-            <a:picLocks noChangeAspect="1"/>
-          </p:cNvPicPr>
-          <p:nvPr/>
-        </p:nvPicPr>
-        <p:blipFill>
-          <a:blip r:embed="rId2">
-            <a:extLst>
-              <a:ext uri="{28A0092B-C50C-407E-A947-70E740481C1C}">
-                <a14:useLocalDpi xmlns:a14="http://schemas.microsoft.com/office/drawing/2010/main" val="0"/>
-              </a:ext>
-            </a:extLst>
-          </a:blip>
-          <a:stretch>
-            <a:fillRect/>
-          </a:stretch>
-        </p:blipFill>
-        <p:spPr>
-          <a:xfrm>
-            <a:off x="1720395" y="1127760"/>
-            <a:ext cx="8950437" cy="3303378"/>
-          </a:xfrm>
-          <a:prstGeom prst="rect">
-            <a:avLst/>
-          </a:prstGeom>
-        </p:spPr>
-      </p:pic>
-      <p:sp>
-        <p:nvSpPr>
-          <p:cNvPr id="6" name="CasellaDiTesto 5">
-            <a:extLst>
-              <a:ext uri="{FF2B5EF4-FFF2-40B4-BE49-F238E27FC236}">
-                <a16:creationId xmlns:a16="http://schemas.microsoft.com/office/drawing/2014/main" id="{923A10A0-A854-346D-5922-5A282C5C9FFA}"/>
-              </a:ext>
-            </a:extLst>
-          </p:cNvPr>
-          <p:cNvSpPr txBox="1"/>
-          <p:nvPr/>
-        </p:nvSpPr>
-        <p:spPr>
-          <a:xfrm>
-            <a:off x="1833345" y="3960206"/>
-            <a:ext cx="2121093" cy="646331"/>
-          </a:xfrm>
-          <a:prstGeom prst="rect">
-            <a:avLst/>
-          </a:prstGeom>
-          <a:noFill/>
-        </p:spPr>
-        <p:txBody>
-          <a:bodyPr wrap="none" rtlCol="0">
-            <a:spAutoFit/>
-          </a:bodyPr>
-          <a:lstStyle/>
-          <a:p>
-            <a:pPr algn="ctr"/>
-            <a:r>
-              <a:rPr lang="it-IT" b="1" dirty="0">
-                <a:latin typeface="Book Antiqua" panose="02040602050305030304" pitchFamily="18" charset="0"/>
-              </a:rPr>
-              <a:t>Input</a:t>
-            </a:r>
-          </a:p>
-          <a:p>
-            <a:pPr algn="ctr"/>
-            <a:r>
-              <a:rPr lang="it-IT" dirty="0">
-                <a:latin typeface="Book Antiqua" panose="02040602050305030304" pitchFamily="18" charset="0"/>
-              </a:rPr>
-              <a:t>(or </a:t>
-            </a:r>
-            <a:r>
-              <a:rPr lang="it-IT" dirty="0" err="1">
-                <a:latin typeface="Book Antiqua" panose="02040602050305030304" pitchFamily="18" charset="0"/>
-              </a:rPr>
-              <a:t>previous</a:t>
-            </a:r>
-            <a:r>
-              <a:rPr lang="it-IT" dirty="0">
-                <a:latin typeface="Book Antiqua" panose="02040602050305030304" pitchFamily="18" charset="0"/>
-              </a:rPr>
-              <a:t> </a:t>
-            </a:r>
-            <a:r>
-              <a:rPr lang="it-IT" dirty="0" err="1">
-                <a:latin typeface="Book Antiqua" panose="02040602050305030304" pitchFamily="18" charset="0"/>
-              </a:rPr>
-              <a:t>layer</a:t>
-            </a:r>
-            <a:r>
-              <a:rPr lang="it-IT" dirty="0">
-                <a:latin typeface="Book Antiqua" panose="02040602050305030304" pitchFamily="18" charset="0"/>
-              </a:rPr>
-              <a:t>)</a:t>
-            </a:r>
-          </a:p>
-        </p:txBody>
-      </p:sp>
-      <p:sp>
-        <p:nvSpPr>
-          <p:cNvPr id="9" name="CasellaDiTesto 8">
-            <a:extLst>
-              <a:ext uri="{FF2B5EF4-FFF2-40B4-BE49-F238E27FC236}">
-                <a16:creationId xmlns:a16="http://schemas.microsoft.com/office/drawing/2014/main" id="{7F89B00F-771D-D0D6-66F0-B9FE362C3CAF}"/>
-              </a:ext>
-            </a:extLst>
-          </p:cNvPr>
-          <p:cNvSpPr txBox="1"/>
-          <p:nvPr/>
-        </p:nvSpPr>
-        <p:spPr>
-          <a:xfrm>
-            <a:off x="5023497" y="3738640"/>
-            <a:ext cx="1172116" cy="646331"/>
-          </a:xfrm>
-          <a:prstGeom prst="rect">
-            <a:avLst/>
-          </a:prstGeom>
-          <a:noFill/>
-        </p:spPr>
-        <p:txBody>
-          <a:bodyPr wrap="none" rtlCol="0">
-            <a:spAutoFit/>
-          </a:bodyPr>
-          <a:lstStyle/>
-          <a:p>
-            <a:pPr algn="ctr"/>
-            <a:r>
-              <a:rPr lang="it-IT" b="1" dirty="0">
-                <a:latin typeface="Book Antiqua" panose="02040602050305030304" pitchFamily="18" charset="0"/>
-              </a:rPr>
-              <a:t>Kernel</a:t>
-            </a:r>
-          </a:p>
-          <a:p>
-            <a:pPr algn="ctr"/>
-            <a:r>
-              <a:rPr lang="it-IT" dirty="0">
-                <a:latin typeface="Book Antiqua" panose="02040602050305030304" pitchFamily="18" charset="0"/>
-              </a:rPr>
-              <a:t>(weights)</a:t>
-            </a:r>
-          </a:p>
-        </p:txBody>
-      </p:sp>
-      <p:sp>
-        <p:nvSpPr>
-          <p:cNvPr id="10" name="CasellaDiTesto 9">
-            <a:extLst>
-              <a:ext uri="{FF2B5EF4-FFF2-40B4-BE49-F238E27FC236}">
-                <a16:creationId xmlns:a16="http://schemas.microsoft.com/office/drawing/2014/main" id="{AF831536-F254-CF43-8F6C-52B922C8B1F2}"/>
-              </a:ext>
-            </a:extLst>
-          </p:cNvPr>
-          <p:cNvSpPr txBox="1"/>
-          <p:nvPr/>
-        </p:nvSpPr>
-        <p:spPr>
-          <a:xfrm>
-            <a:off x="8237563" y="4537585"/>
-            <a:ext cx="1569660" cy="646331"/>
-          </a:xfrm>
-          <a:prstGeom prst="rect">
-            <a:avLst/>
-          </a:prstGeom>
-          <a:noFill/>
-        </p:spPr>
-        <p:txBody>
-          <a:bodyPr wrap="none" rtlCol="0">
-            <a:spAutoFit/>
-          </a:bodyPr>
-          <a:lstStyle/>
-          <a:p>
-            <a:pPr algn="ctr"/>
-            <a:r>
-              <a:rPr lang="it-IT" b="1" dirty="0">
-                <a:latin typeface="Book Antiqua" panose="02040602050305030304" pitchFamily="18" charset="0"/>
-              </a:rPr>
-              <a:t>Output</a:t>
-            </a:r>
-          </a:p>
-          <a:p>
-            <a:pPr algn="ctr"/>
-            <a:r>
-              <a:rPr lang="it-IT" dirty="0">
-                <a:latin typeface="Book Antiqua" panose="02040602050305030304" pitchFamily="18" charset="0"/>
-              </a:rPr>
-              <a:t>(</a:t>
-            </a:r>
-            <a:r>
-              <a:rPr lang="it-IT" dirty="0" err="1">
-                <a:latin typeface="Book Antiqua" panose="02040602050305030304" pitchFamily="18" charset="0"/>
-              </a:rPr>
-              <a:t>convolution</a:t>
-            </a:r>
-            <a:r>
-              <a:rPr lang="it-IT" dirty="0">
-                <a:latin typeface="Book Antiqua" panose="02040602050305030304" pitchFamily="18" charset="0"/>
-              </a:rPr>
-              <a:t>)</a:t>
-            </a:r>
-          </a:p>
-        </p:txBody>
-      </p:sp>
-    </p:spTree>
-    <p:extLst>
-      <p:ext uri="{BB962C8B-B14F-4D97-AF65-F5344CB8AC3E}">
-        <p14:creationId xmlns:p14="http://schemas.microsoft.com/office/powerpoint/2010/main" val="2747483415"/>
-      </p:ext>
-    </p:extLst>
-  </p:cSld>
-  <p:clrMapOvr>
-    <a:masterClrMapping/>
-  </p:clrMapOvr>
-</p:sld>
-</file>
-
 <file path=ppt/slides/slide6.xml><?xml version="1.0" encoding="utf-8"?>
 <p:sld xmlns:a="http://schemas.openxmlformats.org/drawingml/2006/main" xmlns:r="http://schemas.openxmlformats.org/officeDocument/2006/relationships" xmlns:p="http://schemas.openxmlformats.org/presentationml/2006/main">
   <p:cSld>
@@ -13281,8 +16888,8 @@
           </a:prstGeom>
         </p:spPr>
       </p:pic>
-      <mc:AlternateContent xmlns:mc="http://schemas.openxmlformats.org/markup-compatibility/2006">
-        <mc:Choice xmlns:a14="http://schemas.microsoft.com/office/drawing/2010/main" Requires="a14">
+      <mc:AlternateContent xmlns:mc="http://schemas.openxmlformats.org/markup-compatibility/2006" xmlns:a14="http://schemas.microsoft.com/office/drawing/2010/main">
+        <mc:Choice Requires="a14">
           <p:sp>
             <p:nvSpPr>
               <p:cNvPr id="5" name="CasellaDiTesto 4">
@@ -13429,7 +17036,7 @@
             </p:txBody>
           </p:sp>
         </mc:Choice>
-        <mc:Fallback>
+        <mc:Fallback xmlns="">
           <p:sp>
             <p:nvSpPr>
               <p:cNvPr id="5" name="CasellaDiTesto 4">
@@ -13490,8 +17097,8 @@
             </p:nvSpPr>
             <p:spPr>
               <a:xfrm>
-                <a:off x="3602620" y="2787589"/>
-                <a:ext cx="429926" cy="369332"/>
+                <a:off x="3537966" y="2816160"/>
+                <a:ext cx="567783" cy="523220"/>
               </a:xfrm>
               <a:prstGeom prst="rect">
                 <a:avLst/>
@@ -13512,7 +17119,7 @@
                     </m:oMathParaPr>
                     <m:oMath xmlns:m="http://schemas.openxmlformats.org/officeDocument/2006/math">
                       <m:r>
-                        <a:rPr lang="it-IT" b="1" i="1" smtClean="0">
+                        <a:rPr lang="it-IT" sz="2800" b="1" i="1" smtClean="0">
                           <a:solidFill>
                             <a:srgbClr val="1F4291"/>
                           </a:solidFill>
@@ -13549,8 +17156,8 @@
             </p:nvSpPr>
             <p:spPr>
               <a:xfrm>
-                <a:off x="3602620" y="2787589"/>
-                <a:ext cx="429926" cy="369332"/>
+                <a:off x="3537966" y="2816160"/>
+                <a:ext cx="567783" cy="523220"/>
               </a:xfrm>
               <a:prstGeom prst="rect">
                 <a:avLst/>
@@ -13977,7 +17584,7 @@
         </p:nvSpPr>
         <p:spPr>
           <a:xfrm>
-            <a:off x="0" y="1166842"/>
+            <a:off x="64652" y="1166842"/>
             <a:ext cx="7962900" cy="1754326"/>
           </a:xfrm>
           <a:prstGeom prst="rect">
@@ -14072,7 +17679,7 @@
         </p:nvSpPr>
         <p:spPr>
           <a:xfrm>
-            <a:off x="-1" y="3224102"/>
+            <a:off x="64651" y="3224102"/>
             <a:ext cx="7558481" cy="1754326"/>
           </a:xfrm>
           <a:prstGeom prst="rect">
@@ -14199,7 +17806,7 @@
         </p:nvSpPr>
         <p:spPr>
           <a:xfrm>
-            <a:off x="-1" y="5184136"/>
+            <a:off x="64651" y="5184136"/>
             <a:ext cx="7962900" cy="646331"/>
           </a:xfrm>
           <a:prstGeom prst="rect">

--- a/_SNS_DeepNeuralNework with TensorFlow_lezione.pptx
+++ b/_SNS_DeepNeuralNework with TensorFlow_lezione.pptx
@@ -14844,7 +14844,7 @@
         </p:blipFill>
         <p:spPr>
           <a:xfrm>
-            <a:off x="2321344" y="0"/>
+            <a:off x="2570724" y="0"/>
             <a:ext cx="8134618" cy="3002280"/>
           </a:xfrm>
           <a:prstGeom prst="rect">
@@ -14866,7 +14866,7 @@
         </p:nvSpPr>
         <p:spPr>
           <a:xfrm>
-            <a:off x="2442945" y="2542229"/>
+            <a:off x="2692325" y="2542229"/>
             <a:ext cx="2121093" cy="646331"/>
           </a:xfrm>
           <a:prstGeom prst="rect">
@@ -14937,7 +14937,7 @@
         </p:nvSpPr>
         <p:spPr>
           <a:xfrm>
-            <a:off x="5338457" y="2125924"/>
+            <a:off x="5587837" y="2125924"/>
             <a:ext cx="1172116" cy="646331"/>
           </a:xfrm>
           <a:prstGeom prst="rect">
@@ -14984,7 +14984,7 @@
         </p:nvSpPr>
         <p:spPr>
           <a:xfrm>
-            <a:off x="8221474" y="3002280"/>
+            <a:off x="8470854" y="3002280"/>
             <a:ext cx="1569660" cy="646331"/>
           </a:xfrm>
           <a:prstGeom prst="rect">
@@ -15121,6 +15121,51 @@
             </a:r>
           </a:p>
           <a:p>
+            <a:endParaRPr lang="it-IT" dirty="0"/>
+          </a:p>
+        </p:txBody>
+      </p:sp>
+      <p:sp>
+        <p:nvSpPr>
+          <p:cNvPr id="18" name="CasellaDiTesto 17">
+            <a:extLst>
+              <a:ext uri="{FF2B5EF4-FFF2-40B4-BE49-F238E27FC236}">
+                <a16:creationId xmlns:a16="http://schemas.microsoft.com/office/drawing/2014/main" id="{0F9B9B20-0261-0109-9115-EF9FEB53C781}"/>
+              </a:ext>
+            </a:extLst>
+          </p:cNvPr>
+          <p:cNvSpPr txBox="1"/>
+          <p:nvPr/>
+        </p:nvSpPr>
+        <p:spPr>
+          <a:xfrm>
+            <a:off x="84287" y="759911"/>
+            <a:ext cx="3047767" cy="923330"/>
+          </a:xfrm>
+          <a:prstGeom prst="rect">
+            <a:avLst/>
+          </a:prstGeom>
+          <a:noFill/>
+        </p:spPr>
+        <p:txBody>
+          <a:bodyPr wrap="square" rtlCol="0">
+            <a:spAutoFit/>
+          </a:bodyPr>
+          <a:lstStyle/>
+          <a:p>
+            <a:pPr algn="ctr"/>
+            <a:r>
+              <a:rPr lang="it-IT" dirty="0"/>
+              <a:t>Book</a:t>
+            </a:r>
+          </a:p>
+          <a:p>
+            <a:r>
+              <a:rPr lang="it-IT" dirty="0">
+                <a:hlinkClick r:id="rId7"/>
+              </a:rPr>
+              <a:t>Deep Learning, Bishop 2024</a:t>
+            </a:r>
             <a:endParaRPr lang="it-IT" dirty="0"/>
           </a:p>
         </p:txBody>

--- a/_SNS_DeepNeuralNework with TensorFlow_lezione.pptx
+++ b/_SNS_DeepNeuralNework with TensorFlow_lezione.pptx
@@ -305,7 +305,7 @@
           <a:p>
             <a:fld id="{320B36A5-C0C2-41F1-A466-125A3C9CFDA8}" type="datetimeFigureOut">
               <a:rPr lang="it-IT" smtClean="0"/>
-              <a:t>03/05/2026</a:t>
+              <a:t>05/05/2026</a:t>
             </a:fld>
             <a:endParaRPr lang="it-IT"/>
           </a:p>
@@ -483,7 +483,7 @@
           <a:p>
             <a:fld id="{F5E2351F-C622-46DB-BDDE-413EE749618D}" type="datetimeFigureOut">
               <a:rPr lang="it-IT" noProof="0" smtClean="0"/>
-              <a:t>03/05/2026</a:t>
+              <a:t>05/05/2026</a:t>
             </a:fld>
             <a:endParaRPr lang="it-IT" noProof="0"/>
           </a:p>
@@ -1604,7 +1604,7 @@
           <a:p>
             <a:fld id="{C737C588-2F4A-40D9-9491-0BA83DB7170F}" type="datetimeFigureOut">
               <a:rPr lang="it-IT" smtClean="0"/>
-              <a:t>03/05/2026</a:t>
+              <a:t>05/05/2026</a:t>
             </a:fld>
             <a:endParaRPr lang="it-IT"/>
           </a:p>
@@ -1711,7 +1711,7 @@
           <a:p>
             <a:fld id="{C278504F-A551-4DE0-9316-4DCD1D8CC752}" type="datetimeFigureOut">
               <a:rPr lang="en-US" dirty="0"/>
-              <a:t>5/3/2026</a:t>
+              <a:t>5/5/2026</a:t>
             </a:fld>
             <a:endParaRPr lang="en-US" dirty="0"/>
           </a:p>
@@ -4059,7 +4059,7 @@
         <p:spPr>
           <a:xfrm>
             <a:off x="5653438" y="369110"/>
-            <a:ext cx="7082122" cy="3147657"/>
+            <a:ext cx="7082122" cy="4647426"/>
           </a:xfrm>
           <a:prstGeom prst="rect">
             <a:avLst/>
@@ -4082,15 +4082,18 @@
           </a:p>
           <a:p>
             <a:pPr algn="ctr"/>
+            <a:endParaRPr lang="en-IN" sz="3200" b="1" noProof="0" dirty="0">
+              <a:latin typeface="Book Antiqua" panose="02040602050305030304" pitchFamily="18" charset="0"/>
+            </a:endParaRPr>
+          </a:p>
+          <a:p>
+            <a:pPr algn="ctr"/>
             <a:endParaRPr lang="it-IT" sz="1200" b="1" dirty="0">
               <a:latin typeface="Book Antiqua" panose="02040602050305030304" pitchFamily="18" charset="0"/>
             </a:endParaRPr>
           </a:p>
           <a:p>
             <a:pPr marL="285750" indent="-285750">
-              <a:lnSpc>
-                <a:spcPct val="200000"/>
-              </a:lnSpc>
               <a:buFont typeface="Arial" panose="020B0604020202020204" pitchFamily="34" charset="0"/>
               <a:buChar char="•"/>
             </a:pPr>
@@ -4113,12 +4116,29 @@
               </a:rPr>
               <a:t>)</a:t>
             </a:r>
+            <a:br>
+              <a:rPr lang="en-US" sz="2000" dirty="0">
+                <a:latin typeface="Book Antiqua" panose="02040602050305030304" pitchFamily="18" charset="0"/>
+              </a:rPr>
+            </a:br>
+            <a:r>
+              <a:rPr lang="en-US" sz="2000" dirty="0">
+                <a:latin typeface="Book Antiqua" panose="02040602050305030304" pitchFamily="18" charset="0"/>
+              </a:rPr>
+              <a:t>(Deep learning Framework)</a:t>
+            </a:r>
           </a:p>
           <a:p>
             <a:pPr marL="285750" indent="-285750">
-              <a:lnSpc>
-                <a:spcPct val="200000"/>
-              </a:lnSpc>
+              <a:buFont typeface="Arial" panose="020B0604020202020204" pitchFamily="34" charset="0"/>
+              <a:buChar char="•"/>
+            </a:pPr>
+            <a:endParaRPr lang="en-US" sz="2000" dirty="0">
+              <a:latin typeface="Book Antiqua" panose="02040602050305030304" pitchFamily="18" charset="0"/>
+            </a:endParaRPr>
+          </a:p>
+          <a:p>
+            <a:pPr marL="285750" indent="-285750">
               <a:buFont typeface="Arial" panose="020B0604020202020204" pitchFamily="34" charset="0"/>
               <a:buChar char="•"/>
             </a:pPr>
@@ -4168,12 +4188,29 @@
               </a:rPr>
               <a:t>)</a:t>
             </a:r>
+            <a:br>
+              <a:rPr lang="en-US" sz="2000" dirty="0">
+                <a:latin typeface="Book Antiqua" panose="02040602050305030304" pitchFamily="18" charset="0"/>
+              </a:rPr>
+            </a:br>
+            <a:r>
+              <a:rPr lang="en-US" sz="2000" dirty="0">
+                <a:latin typeface="Book Antiqua" panose="02040602050305030304" pitchFamily="18" charset="0"/>
+              </a:rPr>
+              <a:t>(Computational resources offered by Google)</a:t>
+            </a:r>
           </a:p>
           <a:p>
             <a:pPr marL="285750" indent="-285750">
-              <a:lnSpc>
-                <a:spcPct val="200000"/>
-              </a:lnSpc>
+              <a:buFont typeface="Arial" panose="020B0604020202020204" pitchFamily="34" charset="0"/>
+              <a:buChar char="•"/>
+            </a:pPr>
+            <a:endParaRPr lang="en-US" sz="2000" dirty="0">
+              <a:latin typeface="Book Antiqua" panose="02040602050305030304" pitchFamily="18" charset="0"/>
+            </a:endParaRPr>
+          </a:p>
+          <a:p>
+            <a:pPr marL="285750" indent="-285750">
               <a:buFont typeface="Arial" panose="020B0604020202020204" pitchFamily="34" charset="0"/>
               <a:buChar char="•"/>
             </a:pPr>
@@ -4190,15 +4227,25 @@
               </a:rPr>
               <a:t>notebooks</a:t>
             </a:r>
+            <a:br>
+              <a:rPr lang="en-US" sz="2000" dirty="0">
+                <a:latin typeface="Book Antiqua" panose="02040602050305030304" pitchFamily="18" charset="0"/>
+              </a:rPr>
+            </a:br>
+            <a:r>
+              <a:rPr lang="en-US" sz="2000" dirty="0">
+                <a:latin typeface="Book Antiqua" panose="02040602050305030304" pitchFamily="18" charset="0"/>
+              </a:rPr>
+              <a:t>(Way to run python interactively)</a:t>
+            </a:r>
+          </a:p>
+          <a:p>
             <a:endParaRPr lang="en-US" sz="2000" dirty="0">
               <a:latin typeface="Book Antiqua" panose="02040602050305030304" pitchFamily="18" charset="0"/>
             </a:endParaRPr>
           </a:p>
           <a:p>
             <a:pPr marL="285750" indent="-285750">
-              <a:lnSpc>
-                <a:spcPct val="200000"/>
-              </a:lnSpc>
               <a:buFont typeface="Arial" panose="020B0604020202020204" pitchFamily="34" charset="0"/>
               <a:buChar char="•"/>
             </a:pPr>
@@ -4214,6 +4261,23 @@
                 <a:hlinkClick r:id="rId8"/>
               </a:rPr>
               <a:t>GitHub</a:t>
+            </a:r>
+            <a:r>
+              <a:rPr lang="en-US" sz="2000" dirty="0">
+                <a:latin typeface="Book Antiqua" panose="02040602050305030304" pitchFamily="18" charset="0"/>
+              </a:rPr>
+              <a:t> </a:t>
+            </a:r>
+            <a:br>
+              <a:rPr lang="en-US" sz="2000" dirty="0">
+                <a:latin typeface="Book Antiqua" panose="02040602050305030304" pitchFamily="18" charset="0"/>
+              </a:rPr>
+            </a:br>
+            <a:r>
+              <a:rPr lang="en-US" sz="2000" dirty="0">
+                <a:latin typeface="Book Antiqua" panose="02040602050305030304" pitchFamily="18" charset="0"/>
+              </a:rPr>
+              <a:t>(repositories “folders” to store and share code</a:t>
             </a:r>
             <a:endParaRPr lang="it-IT" sz="2000" dirty="0">
               <a:latin typeface="Book Antiqua" panose="02040602050305030304" pitchFamily="18" charset="0"/>
@@ -4235,8 +4299,8 @@
         </p:nvSpPr>
         <p:spPr>
           <a:xfrm>
-            <a:off x="7097650" y="4789053"/>
-            <a:ext cx="2912144" cy="369332"/>
+            <a:off x="5994400" y="5945797"/>
+            <a:ext cx="4923271" cy="461665"/>
           </a:xfrm>
           <a:prstGeom prst="rect">
             <a:avLst/>
@@ -4250,20 +4314,21 @@
           <a:lstStyle/>
           <a:p>
             <a:r>
-              <a:rPr lang="en-ZW" noProof="0" dirty="0">
+              <a:rPr lang="en-ZW" sz="2400" dirty="0">
                 <a:latin typeface="Calibri" panose="020F0502020204030204" pitchFamily="34" charset="0"/>
                 <a:cs typeface="Calibri" panose="020F0502020204030204" pitchFamily="34" charset="0"/>
               </a:rPr>
-              <a:t>Insert details </a:t>
-            </a:r>
-            <a:r>
-              <a:rPr lang="en-ZW" noProof="0">
+              <a:t>All the material is loaded in </a:t>
+            </a:r>
+            <a:r>
+              <a:rPr lang="en-ZW" sz="2400" dirty="0">
                 <a:latin typeface="Calibri" panose="020F0502020204030204" pitchFamily="34" charset="0"/>
                 <a:cs typeface="Calibri" panose="020F0502020204030204" pitchFamily="34" charset="0"/>
+                <a:hlinkClick r:id="rId9"/>
               </a:rPr>
-              <a:t>about each one</a:t>
-            </a:r>
-            <a:endParaRPr lang="en-ZW" noProof="0" dirty="0">
+              <a:t>this folder</a:t>
+            </a:r>
+            <a:endParaRPr lang="en-ZW" sz="2400" noProof="0" dirty="0">
               <a:latin typeface="Calibri" panose="020F0502020204030204" pitchFamily="34" charset="0"/>
               <a:cs typeface="Calibri" panose="020F0502020204030204" pitchFamily="34" charset="0"/>
             </a:endParaRPr>
@@ -8108,13 +8173,13 @@
   <p:clrMapOvr>
     <a:masterClrMapping/>
   </p:clrMapOvr>
-  <mc:AlternateContent xmlns:mc="http://schemas.openxmlformats.org/markup-compatibility/2006">
-    <mc:Choice xmlns:p159="http://schemas.microsoft.com/office/powerpoint/2015/09/main" Requires="p159">
+  <mc:AlternateContent xmlns:mc="http://schemas.openxmlformats.org/markup-compatibility/2006" xmlns:p159="http://schemas.microsoft.com/office/powerpoint/2015/09/main">
+    <mc:Choice Requires="p159">
       <p:transition xmlns:p14="http://schemas.microsoft.com/office/powerpoint/2010/main" spd="slow" p14:dur="2000">
         <p159:morph option="byObject"/>
       </p:transition>
     </mc:Choice>
-    <mc:Fallback>
+    <mc:Fallback xmlns="">
       <p:transition spd="slow">
         <p:fade/>
       </p:transition>
@@ -9924,8 +9989,8 @@
           </p:sp>
         </mc:Fallback>
       </mc:AlternateContent>
-      <mc:AlternateContent xmlns:mc="http://schemas.openxmlformats.org/markup-compatibility/2006">
-        <mc:Choice xmlns:a14="http://schemas.microsoft.com/office/drawing/2010/main" Requires="a14">
+      <mc:AlternateContent xmlns:mc="http://schemas.openxmlformats.org/markup-compatibility/2006" xmlns:a14="http://schemas.microsoft.com/office/drawing/2010/main">
+        <mc:Choice Requires="a14">
           <p:sp>
             <p:nvSpPr>
               <p:cNvPr id="5" name="CasellaDiTesto 4">
@@ -10027,7 +10092,7 @@
             </p:txBody>
           </p:sp>
         </mc:Choice>
-        <mc:Fallback>
+        <mc:Fallback xmlns="">
           <p:sp>
             <p:nvSpPr>
               <p:cNvPr id="5" name="CasellaDiTesto 4">
@@ -15067,66 +15132,6 @@
       </p:pic>
       <p:sp>
         <p:nvSpPr>
-          <p:cNvPr id="13" name="CasellaDiTesto 12">
-            <a:extLst>
-              <a:ext uri="{FF2B5EF4-FFF2-40B4-BE49-F238E27FC236}">
-                <a16:creationId xmlns:a16="http://schemas.microsoft.com/office/drawing/2014/main" id="{D1ECBFF2-951E-607D-20F9-9B75CFD074E0}"/>
-              </a:ext>
-            </a:extLst>
-          </p:cNvPr>
-          <p:cNvSpPr txBox="1"/>
-          <p:nvPr/>
-        </p:nvSpPr>
-        <p:spPr>
-          <a:xfrm>
-            <a:off x="4661737" y="3861268"/>
-            <a:ext cx="3140603" cy="923330"/>
-          </a:xfrm>
-          <a:prstGeom prst="rect">
-            <a:avLst/>
-          </a:prstGeom>
-          <a:noFill/>
-        </p:spPr>
-        <p:txBody>
-          <a:bodyPr wrap="none" rtlCol="0">
-            <a:spAutoFit/>
-          </a:bodyPr>
-          <a:lstStyle/>
-          <a:p>
-            <a:pPr marL="285750" indent="-285750">
-              <a:buFont typeface="Arial" panose="020B0604020202020204" pitchFamily="34" charset="0"/>
-              <a:buChar char="•"/>
-            </a:pPr>
-            <a:r>
-              <a:rPr lang="it-IT" dirty="0"/>
-              <a:t>Kernel size</a:t>
-            </a:r>
-          </a:p>
-          <a:p>
-            <a:pPr marL="285750" indent="-285750">
-              <a:buFont typeface="Arial" panose="020B0604020202020204" pitchFamily="34" charset="0"/>
-              <a:buChar char="•"/>
-            </a:pPr>
-            <a:r>
-              <a:rPr lang="it-IT" dirty="0"/>
-              <a:t>Number of kernels (</a:t>
-            </a:r>
-            <a:r>
-              <a:rPr lang="it-IT" dirty="0" err="1"/>
-              <a:t>maps</a:t>
-            </a:r>
-            <a:r>
-              <a:rPr lang="it-IT" dirty="0"/>
-              <a:t>)</a:t>
-            </a:r>
-          </a:p>
-          <a:p>
-            <a:endParaRPr lang="it-IT" dirty="0"/>
-          </a:p>
-        </p:txBody>
-      </p:sp>
-      <p:sp>
-        <p:nvSpPr>
           <p:cNvPr id="18" name="CasellaDiTesto 17">
             <a:extLst>
               <a:ext uri="{FF2B5EF4-FFF2-40B4-BE49-F238E27FC236}">
@@ -15166,6 +15171,119 @@
               </a:rPr>
               <a:t>Deep Learning, Bishop 2024</a:t>
             </a:r>
+            <a:endParaRPr lang="it-IT" dirty="0"/>
+          </a:p>
+        </p:txBody>
+      </p:sp>
+      <p:sp>
+        <p:nvSpPr>
+          <p:cNvPr id="2" name="CasellaDiTesto 1">
+            <a:extLst>
+              <a:ext uri="{FF2B5EF4-FFF2-40B4-BE49-F238E27FC236}">
+                <a16:creationId xmlns:a16="http://schemas.microsoft.com/office/drawing/2014/main" id="{0BDB8328-3DB9-C307-8BC0-BF6FC11EBA96}"/>
+              </a:ext>
+            </a:extLst>
+          </p:cNvPr>
+          <p:cNvSpPr txBox="1"/>
+          <p:nvPr/>
+        </p:nvSpPr>
+        <p:spPr>
+          <a:xfrm>
+            <a:off x="4291231" y="3546517"/>
+            <a:ext cx="4027706" cy="1754326"/>
+          </a:xfrm>
+          <a:prstGeom prst="rect">
+            <a:avLst/>
+          </a:prstGeom>
+          <a:noFill/>
+        </p:spPr>
+        <p:txBody>
+          <a:bodyPr wrap="none" rtlCol="0">
+            <a:spAutoFit/>
+          </a:bodyPr>
+          <a:lstStyle/>
+          <a:p>
+            <a:r>
+              <a:rPr lang="it-IT" dirty="0" err="1"/>
+              <a:t>We</a:t>
+            </a:r>
+            <a:r>
+              <a:rPr lang="it-IT" dirty="0"/>
+              <a:t> can </a:t>
+            </a:r>
+            <a:r>
+              <a:rPr lang="it-IT" dirty="0" err="1"/>
+              <a:t>adjust</a:t>
+            </a:r>
+            <a:r>
+              <a:rPr lang="it-IT" dirty="0"/>
+              <a:t> (set) </a:t>
+            </a:r>
+            <a:r>
+              <a:rPr lang="it-IT" dirty="0" err="1"/>
+              <a:t>these</a:t>
+            </a:r>
+            <a:r>
+              <a:rPr lang="it-IT" dirty="0"/>
+              <a:t> </a:t>
+            </a:r>
+            <a:r>
+              <a:rPr lang="it-IT" dirty="0" err="1"/>
+              <a:t>parameters</a:t>
+            </a:r>
+            <a:endParaRPr lang="it-IT" dirty="0"/>
+          </a:p>
+          <a:p>
+            <a:endParaRPr lang="it-IT" dirty="0"/>
+          </a:p>
+          <a:p>
+            <a:pPr marL="285750" indent="-285750">
+              <a:buFont typeface="Arial" panose="020B0604020202020204" pitchFamily="34" charset="0"/>
+              <a:buChar char="•"/>
+            </a:pPr>
+            <a:r>
+              <a:rPr lang="it-IT" dirty="0"/>
+              <a:t>Kernel size</a:t>
+            </a:r>
+          </a:p>
+          <a:p>
+            <a:pPr marL="285750" indent="-285750">
+              <a:buFont typeface="Arial" panose="020B0604020202020204" pitchFamily="34" charset="0"/>
+              <a:buChar char="•"/>
+            </a:pPr>
+            <a:r>
+              <a:rPr lang="it-IT" dirty="0"/>
+              <a:t>Number of kernels (</a:t>
+            </a:r>
+            <a:r>
+              <a:rPr lang="it-IT" dirty="0" err="1"/>
+              <a:t>maps</a:t>
+            </a:r>
+            <a:r>
+              <a:rPr lang="it-IT" dirty="0"/>
+              <a:t>)</a:t>
+            </a:r>
+          </a:p>
+          <a:p>
+            <a:pPr marL="285750" indent="-285750">
+              <a:buFont typeface="Arial" panose="020B0604020202020204" pitchFamily="34" charset="0"/>
+              <a:buChar char="•"/>
+            </a:pPr>
+            <a:r>
+              <a:rPr lang="it-IT" dirty="0" err="1"/>
+              <a:t>Activaction</a:t>
+            </a:r>
+            <a:r>
+              <a:rPr lang="it-IT" dirty="0"/>
+              <a:t> </a:t>
+            </a:r>
+            <a:r>
+              <a:rPr lang="it-IT" dirty="0" err="1"/>
+              <a:t>function</a:t>
+            </a:r>
+            <a:endParaRPr lang="it-IT" dirty="0"/>
+          </a:p>
+          <a:p>
             <a:endParaRPr lang="it-IT" dirty="0"/>
           </a:p>
         </p:txBody>
@@ -15294,6 +15412,59 @@
                       </p:childTnLst>
                     </p:cTn>
                   </p:par>
+                  <p:par>
+                    <p:cTn id="13" fill="hold">
+                      <p:stCondLst>
+                        <p:cond delay="indefinite"/>
+                      </p:stCondLst>
+                      <p:childTnLst>
+                        <p:par>
+                          <p:cTn id="14" fill="hold">
+                            <p:stCondLst>
+                              <p:cond delay="0"/>
+                            </p:stCondLst>
+                            <p:childTnLst>
+                              <p:par>
+                                <p:cTn id="15" presetID="10" presetClass="entr" presetSubtype="0" fill="hold" grpId="0" nodeType="clickEffect">
+                                  <p:stCondLst>
+                                    <p:cond delay="0"/>
+                                  </p:stCondLst>
+                                  <p:childTnLst>
+                                    <p:set>
+                                      <p:cBhvr>
+                                        <p:cTn id="16" dur="1" fill="hold">
+                                          <p:stCondLst>
+                                            <p:cond delay="0"/>
+                                          </p:stCondLst>
+                                        </p:cTn>
+                                        <p:tgtEl>
+                                          <p:spTgt spid="2"/>
+                                        </p:tgtEl>
+                                        <p:attrNameLst>
+                                          <p:attrName>style.visibility</p:attrName>
+                                        </p:attrNameLst>
+                                      </p:cBhvr>
+                                      <p:to>
+                                        <p:strVal val="visible"/>
+                                      </p:to>
+                                    </p:set>
+                                    <p:animEffect transition="in" filter="fade">
+                                      <p:cBhvr>
+                                        <p:cTn id="17" dur="500"/>
+                                        <p:tgtEl>
+                                          <p:spTgt spid="2"/>
+                                        </p:tgtEl>
+                                      </p:cBhvr>
+                                    </p:animEffect>
+                                  </p:childTnLst>
+                                </p:cTn>
+                              </p:par>
+                            </p:childTnLst>
+                          </p:cTn>
+                        </p:par>
+                      </p:childTnLst>
+                    </p:cTn>
+                  </p:par>
                 </p:childTnLst>
               </p:cTn>
               <p:prevCondLst>
@@ -15315,6 +15486,9 @@
         </p:cTn>
       </p:par>
     </p:tnLst>
+    <p:bldLst>
+      <p:bldP spid="2" grpId="0"/>
+    </p:bldLst>
   </p:timing>
 </p:sld>
 </file>
@@ -16881,7 +17055,7 @@
 </file>
 
 <file path=ppt/slides/slide6.xml><?xml version="1.0" encoding="utf-8"?>
-<p:sld xmlns:a="http://schemas.openxmlformats.org/drawingml/2006/main" xmlns:r="http://schemas.openxmlformats.org/officeDocument/2006/relationships" xmlns:p="http://schemas.openxmlformats.org/presentationml/2006/main">
+<p:sld xmlns:a="http://schemas.openxmlformats.org/drawingml/2006/main" xmlns:r="http://schemas.openxmlformats.org/officeDocument/2006/relationships" xmlns:p="http://schemas.openxmlformats.org/presentationml/2006/main" show="0">
   <p:cSld>
     <p:spTree>
       <p:nvGrpSpPr>
@@ -16925,7 +17099,7 @@
         </p:blipFill>
         <p:spPr>
           <a:xfrm>
-            <a:off x="2476656" y="1154326"/>
+            <a:off x="1202038" y="1039929"/>
             <a:ext cx="5433531" cy="3101609"/>
           </a:xfrm>
           <a:prstGeom prst="rect">
@@ -16933,8 +17107,8 @@
           </a:prstGeom>
         </p:spPr>
       </p:pic>
-      <mc:AlternateContent xmlns:mc="http://schemas.openxmlformats.org/markup-compatibility/2006" xmlns:a14="http://schemas.microsoft.com/office/drawing/2010/main">
-        <mc:Choice Requires="a14">
+      <mc:AlternateContent xmlns:mc="http://schemas.openxmlformats.org/markup-compatibility/2006">
+        <mc:Choice xmlns:a14="http://schemas.microsoft.com/office/drawing/2010/main" Requires="a14">
           <p:sp>
             <p:nvSpPr>
               <p:cNvPr id="5" name="CasellaDiTesto 4">
@@ -16949,7 +17123,7 @@
             </p:nvSpPr>
             <p:spPr>
               <a:xfrm>
-                <a:off x="2867413" y="4318924"/>
+                <a:off x="1592795" y="4204527"/>
                 <a:ext cx="7121934" cy="1815882"/>
               </a:xfrm>
               <a:prstGeom prst="rect">
@@ -17081,7 +17255,7 @@
             </p:txBody>
           </p:sp>
         </mc:Choice>
-        <mc:Fallback xmlns="">
+        <mc:Fallback>
           <p:sp>
             <p:nvSpPr>
               <p:cNvPr id="5" name="CasellaDiTesto 4">
@@ -17098,7 +17272,7 @@
             </p:nvSpPr>
             <p:spPr>
               <a:xfrm>
-                <a:off x="2867413" y="4318924"/>
+                <a:off x="1592795" y="4204527"/>
                 <a:ext cx="7121934" cy="1815882"/>
               </a:xfrm>
               <a:prstGeom prst="rect">
@@ -17142,7 +17316,7 @@
             </p:nvSpPr>
             <p:spPr>
               <a:xfrm>
-                <a:off x="3537966" y="2816160"/>
+                <a:off x="2254112" y="2668378"/>
                 <a:ext cx="567783" cy="523220"/>
               </a:xfrm>
               <a:prstGeom prst="rect">
@@ -17201,7 +17375,7 @@
             </p:nvSpPr>
             <p:spPr>
               <a:xfrm>
-                <a:off x="3537966" y="2816160"/>
+                <a:off x="2254112" y="2668378"/>
                 <a:ext cx="567783" cy="523220"/>
               </a:xfrm>
               <a:prstGeom prst="rect">
@@ -17319,6 +17493,119 @@
               </a:rPr>
               <a:t>Deep Learning, Bishop, 2024</a:t>
             </a:r>
+            <a:endParaRPr lang="it-IT" dirty="0"/>
+          </a:p>
+        </p:txBody>
+      </p:sp>
+      <p:sp>
+        <p:nvSpPr>
+          <p:cNvPr id="2" name="CasellaDiTesto 1">
+            <a:extLst>
+              <a:ext uri="{FF2B5EF4-FFF2-40B4-BE49-F238E27FC236}">
+                <a16:creationId xmlns:a16="http://schemas.microsoft.com/office/drawing/2014/main" id="{6C4A8E99-ABCB-9630-77A7-0B809F92A0D4}"/>
+              </a:ext>
+            </a:extLst>
+          </p:cNvPr>
+          <p:cNvSpPr txBox="1"/>
+          <p:nvPr/>
+        </p:nvSpPr>
+        <p:spPr>
+          <a:xfrm>
+            <a:off x="7752371" y="1437272"/>
+            <a:ext cx="4027706" cy="1754326"/>
+          </a:xfrm>
+          <a:prstGeom prst="rect">
+            <a:avLst/>
+          </a:prstGeom>
+          <a:noFill/>
+        </p:spPr>
+        <p:txBody>
+          <a:bodyPr wrap="none" rtlCol="0">
+            <a:spAutoFit/>
+          </a:bodyPr>
+          <a:lstStyle/>
+          <a:p>
+            <a:r>
+              <a:rPr lang="it-IT" dirty="0" err="1"/>
+              <a:t>We</a:t>
+            </a:r>
+            <a:r>
+              <a:rPr lang="it-IT" dirty="0"/>
+              <a:t> can </a:t>
+            </a:r>
+            <a:r>
+              <a:rPr lang="it-IT" dirty="0" err="1"/>
+              <a:t>adjust</a:t>
+            </a:r>
+            <a:r>
+              <a:rPr lang="it-IT" dirty="0"/>
+              <a:t> (set) </a:t>
+            </a:r>
+            <a:r>
+              <a:rPr lang="it-IT" dirty="0" err="1"/>
+              <a:t>these</a:t>
+            </a:r>
+            <a:r>
+              <a:rPr lang="it-IT" dirty="0"/>
+              <a:t> </a:t>
+            </a:r>
+            <a:r>
+              <a:rPr lang="it-IT" dirty="0" err="1"/>
+              <a:t>parameters</a:t>
+            </a:r>
+            <a:endParaRPr lang="it-IT" dirty="0"/>
+          </a:p>
+          <a:p>
+            <a:endParaRPr lang="it-IT" dirty="0"/>
+          </a:p>
+          <a:p>
+            <a:pPr marL="285750" indent="-285750">
+              <a:buFont typeface="Arial" panose="020B0604020202020204" pitchFamily="34" charset="0"/>
+              <a:buChar char="•"/>
+            </a:pPr>
+            <a:r>
+              <a:rPr lang="it-IT" dirty="0"/>
+              <a:t>Kernel size</a:t>
+            </a:r>
+          </a:p>
+          <a:p>
+            <a:pPr marL="285750" indent="-285750">
+              <a:buFont typeface="Arial" panose="020B0604020202020204" pitchFamily="34" charset="0"/>
+              <a:buChar char="•"/>
+            </a:pPr>
+            <a:r>
+              <a:rPr lang="it-IT" dirty="0"/>
+              <a:t>Number of kernels (</a:t>
+            </a:r>
+            <a:r>
+              <a:rPr lang="it-IT" dirty="0" err="1"/>
+              <a:t>maps</a:t>
+            </a:r>
+            <a:r>
+              <a:rPr lang="it-IT" dirty="0"/>
+              <a:t>)</a:t>
+            </a:r>
+          </a:p>
+          <a:p>
+            <a:pPr marL="285750" indent="-285750">
+              <a:buFont typeface="Arial" panose="020B0604020202020204" pitchFamily="34" charset="0"/>
+              <a:buChar char="•"/>
+            </a:pPr>
+            <a:r>
+              <a:rPr lang="it-IT" dirty="0" err="1"/>
+              <a:t>Activaction</a:t>
+            </a:r>
+            <a:r>
+              <a:rPr lang="it-IT" dirty="0"/>
+              <a:t> </a:t>
+            </a:r>
+            <a:r>
+              <a:rPr lang="it-IT" dirty="0" err="1"/>
+              <a:t>function</a:t>
+            </a:r>
+            <a:endParaRPr lang="it-IT" dirty="0"/>
+          </a:p>
+          <a:p>
             <a:endParaRPr lang="it-IT" dirty="0"/>
           </a:p>
         </p:txBody>

--- a/_SNS_DeepNeuralNework with TensorFlow_lezione.pptx
+++ b/_SNS_DeepNeuralNework with TensorFlow_lezione.pptx
@@ -5,10 +5,10 @@
     <p:sldMasterId id="2147483648" r:id="rId1"/>
   </p:sldMasterIdLst>
   <p:notesMasterIdLst>
-    <p:notesMasterId r:id="rId12"/>
+    <p:notesMasterId r:id="rId13"/>
   </p:notesMasterIdLst>
   <p:handoutMasterIdLst>
-    <p:handoutMasterId r:id="rId13"/>
+    <p:handoutMasterId r:id="rId14"/>
   </p:handoutMasterIdLst>
   <p:sldIdLst>
     <p:sldId id="286" r:id="rId2"/>
@@ -21,6 +21,7 @@
     <p:sldId id="257" r:id="rId9"/>
     <p:sldId id="264" r:id="rId10"/>
     <p:sldId id="266" r:id="rId11"/>
+    <p:sldId id="289" r:id="rId12"/>
   </p:sldIdLst>
   <p:sldSz cx="12192000" cy="6858000"/>
   <p:notesSz cx="6858000" cy="9144000"/>
@@ -4000,7 +4001,7 @@
         </p:blipFill>
         <p:spPr>
           <a:xfrm>
-            <a:off x="224572" y="3028973"/>
+            <a:off x="0" y="3065919"/>
             <a:ext cx="4732289" cy="3147657"/>
           </a:xfrm>
           <a:prstGeom prst="rect">
@@ -4058,8 +4059,8 @@
         </p:nvSpPr>
         <p:spPr>
           <a:xfrm>
-            <a:off x="5653438" y="369110"/>
-            <a:ext cx="7082122" cy="4647426"/>
+            <a:off x="5274748" y="18131"/>
+            <a:ext cx="7082122" cy="4154984"/>
           </a:xfrm>
           <a:prstGeom prst="rect">
             <a:avLst/>
@@ -4082,12 +4083,6 @@
           </a:p>
           <a:p>
             <a:pPr algn="ctr"/>
-            <a:endParaRPr lang="en-IN" sz="3200" b="1" noProof="0" dirty="0">
-              <a:latin typeface="Book Antiqua" panose="02040602050305030304" pitchFamily="18" charset="0"/>
-            </a:endParaRPr>
-          </a:p>
-          <a:p>
-            <a:pPr algn="ctr"/>
             <a:endParaRPr lang="it-IT" sz="1200" b="1" dirty="0">
               <a:latin typeface="Book Antiqua" panose="02040602050305030304" pitchFamily="18" charset="0"/>
             </a:endParaRPr>
@@ -4277,7 +4272,7 @@
               <a:rPr lang="en-US" sz="2000" dirty="0">
                 <a:latin typeface="Book Antiqua" panose="02040602050305030304" pitchFamily="18" charset="0"/>
               </a:rPr>
-              <a:t>(repositories “folders” to store and share code</a:t>
+              <a:t>(repositories “folders” to store and share code)</a:t>
             </a:r>
             <a:endParaRPr lang="it-IT" sz="2000" dirty="0">
               <a:latin typeface="Book Antiqua" panose="02040602050305030304" pitchFamily="18" charset="0"/>
@@ -4299,8 +4294,8 @@
         </p:nvSpPr>
         <p:spPr>
           <a:xfrm>
-            <a:off x="5994400" y="5945797"/>
-            <a:ext cx="4923271" cy="461665"/>
+            <a:off x="4974517" y="4495690"/>
+            <a:ext cx="7235955" cy="1938992"/>
           </a:xfrm>
           <a:prstGeom prst="rect">
             <a:avLst/>
@@ -4328,6 +4323,67 @@
               </a:rPr>
               <a:t>this folder</a:t>
             </a:r>
+            <a:r>
+              <a:rPr lang="en-ZW" sz="2400" dirty="0">
+                <a:latin typeface="Calibri" panose="020F0502020204030204" pitchFamily="34" charset="0"/>
+                <a:cs typeface="Calibri" panose="020F0502020204030204" pitchFamily="34" charset="0"/>
+              </a:rPr>
+              <a:t>. </a:t>
+            </a:r>
+          </a:p>
+          <a:p>
+            <a:r>
+              <a:rPr lang="en-ZW" sz="2400" dirty="0">
+                <a:latin typeface="Calibri" panose="020F0502020204030204" pitchFamily="34" charset="0"/>
+                <a:cs typeface="Calibri" panose="020F0502020204030204" pitchFamily="34" charset="0"/>
+              </a:rPr>
+              <a:t>The useful files are:</a:t>
+            </a:r>
+          </a:p>
+          <a:p>
+            <a:r>
+              <a:rPr lang="en-US" sz="2400" dirty="0">
+                <a:latin typeface="Calibri" panose="020F0502020204030204" pitchFamily="34" charset="0"/>
+                <a:cs typeface="Calibri" panose="020F0502020204030204" pitchFamily="34" charset="0"/>
+              </a:rPr>
+              <a:t>_</a:t>
+            </a:r>
+            <a:r>
+              <a:rPr lang="en-US" sz="2400" dirty="0" err="1">
+                <a:latin typeface="Calibri" panose="020F0502020204030204" pitchFamily="34" charset="0"/>
+                <a:cs typeface="Calibri" panose="020F0502020204030204" pitchFamily="34" charset="0"/>
+              </a:rPr>
+              <a:t>SNS_DeepNeuralNework</a:t>
+            </a:r>
+            <a:r>
+              <a:rPr lang="en-US" sz="2400" dirty="0">
+                <a:latin typeface="Calibri" panose="020F0502020204030204" pitchFamily="34" charset="0"/>
+                <a:cs typeface="Calibri" panose="020F0502020204030204" pitchFamily="34" charset="0"/>
+              </a:rPr>
+              <a:t> with TensorFlow_lezione.pptx</a:t>
+            </a:r>
+          </a:p>
+          <a:p>
+            <a:r>
+              <a:rPr lang="en-ZW" sz="2400" dirty="0" err="1">
+                <a:latin typeface="Calibri" panose="020F0502020204030204" pitchFamily="34" charset="0"/>
+                <a:cs typeface="Calibri" panose="020F0502020204030204" pitchFamily="34" charset="0"/>
+              </a:rPr>
+              <a:t>Deep_Dense_MNIST.ipynb</a:t>
+            </a:r>
+            <a:endParaRPr lang="en-ZW" sz="2400" dirty="0">
+              <a:latin typeface="Calibri" panose="020F0502020204030204" pitchFamily="34" charset="0"/>
+              <a:cs typeface="Calibri" panose="020F0502020204030204" pitchFamily="34" charset="0"/>
+            </a:endParaRPr>
+          </a:p>
+          <a:p>
+            <a:r>
+              <a:rPr lang="en-ZW" sz="2400" dirty="0" err="1">
+                <a:latin typeface="Calibri" panose="020F0502020204030204" pitchFamily="34" charset="0"/>
+                <a:cs typeface="Calibri" panose="020F0502020204030204" pitchFamily="34" charset="0"/>
+              </a:rPr>
+              <a:t>Deep_Convolutional_MNIST.ipynb</a:t>
+            </a:r>
             <a:endParaRPr lang="en-ZW" sz="2400" noProof="0" dirty="0">
               <a:latin typeface="Calibri" panose="020F0502020204030204" pitchFamily="34" charset="0"/>
               <a:cs typeface="Calibri" panose="020F0502020204030204" pitchFamily="34" charset="0"/>
@@ -4339,6 +4395,590 @@
     <p:extLst>
       <p:ext uri="{BB962C8B-B14F-4D97-AF65-F5344CB8AC3E}">
         <p14:creationId xmlns:p14="http://schemas.microsoft.com/office/powerpoint/2010/main" val="3235996029"/>
+      </p:ext>
+    </p:extLst>
+  </p:cSld>
+  <p:clrMapOvr>
+    <a:masterClrMapping/>
+  </p:clrMapOvr>
+</p:sld>
+</file>
+
+<file path=ppt/slides/slide11.xml><?xml version="1.0" encoding="utf-8"?>
+<p:sld xmlns:a="http://schemas.openxmlformats.org/drawingml/2006/main" xmlns:r="http://schemas.openxmlformats.org/officeDocument/2006/relationships" xmlns:p="http://schemas.openxmlformats.org/presentationml/2006/main">
+  <p:cSld>
+    <p:spTree>
+      <p:nvGrpSpPr>
+        <p:cNvPr id="1" name=""/>
+        <p:cNvGrpSpPr/>
+        <p:nvPr/>
+      </p:nvGrpSpPr>
+      <p:grpSpPr>
+        <a:xfrm>
+          <a:off x="0" y="0"/>
+          <a:ext cx="0" cy="0"/>
+          <a:chOff x="0" y="0"/>
+          <a:chExt cx="0" cy="0"/>
+        </a:xfrm>
+      </p:grpSpPr>
+      <p:sp>
+        <p:nvSpPr>
+          <p:cNvPr id="4" name="CasellaDiTesto 3">
+            <a:extLst>
+              <a:ext uri="{FF2B5EF4-FFF2-40B4-BE49-F238E27FC236}">
+                <a16:creationId xmlns:a16="http://schemas.microsoft.com/office/drawing/2014/main" id="{5D289AC5-8204-641E-E1FD-EC7F3DE2B882}"/>
+              </a:ext>
+            </a:extLst>
+          </p:cNvPr>
+          <p:cNvSpPr txBox="1"/>
+          <p:nvPr/>
+        </p:nvSpPr>
+        <p:spPr>
+          <a:xfrm>
+            <a:off x="0" y="0"/>
+            <a:ext cx="11240655" cy="1477328"/>
+          </a:xfrm>
+          <a:prstGeom prst="rect">
+            <a:avLst/>
+          </a:prstGeom>
+          <a:noFill/>
+        </p:spPr>
+        <p:txBody>
+          <a:bodyPr wrap="square" rtlCol="0">
+            <a:spAutoFit/>
+          </a:bodyPr>
+          <a:lstStyle/>
+          <a:p>
+            <a:r>
+              <a:rPr lang="it-IT" dirty="0"/>
+              <a:t>Here the link to the </a:t>
+            </a:r>
+            <a:r>
+              <a:rPr lang="it-IT" dirty="0" err="1"/>
+              <a:t>codes</a:t>
+            </a:r>
+            <a:r>
+              <a:rPr lang="it-IT" dirty="0"/>
+              <a:t> </a:t>
+            </a:r>
+            <a:r>
+              <a:rPr lang="it-IT" dirty="0" err="1"/>
+              <a:t>we</a:t>
+            </a:r>
+            <a:r>
+              <a:rPr lang="it-IT" dirty="0"/>
+              <a:t> </a:t>
+            </a:r>
+            <a:r>
+              <a:rPr lang="it-IT" dirty="0" err="1"/>
+              <a:t>saw</a:t>
+            </a:r>
+            <a:r>
+              <a:rPr lang="it-IT" dirty="0"/>
+              <a:t> in </a:t>
+            </a:r>
+            <a:r>
+              <a:rPr lang="it-IT" dirty="0" err="1"/>
+              <a:t>our</a:t>
+            </a:r>
+            <a:r>
+              <a:rPr lang="it-IT" dirty="0"/>
+              <a:t> class:</a:t>
+            </a:r>
+          </a:p>
+          <a:p>
+            <a:pPr marL="342900" indent="-342900">
+              <a:buAutoNum type="arabicPeriod"/>
+            </a:pPr>
+            <a:r>
+              <a:rPr lang="it-IT" dirty="0" err="1">
+                <a:hlinkClick r:id="rId2"/>
+              </a:rPr>
+              <a:t>Fully</a:t>
+            </a:r>
+            <a:r>
+              <a:rPr lang="it-IT" dirty="0">
+                <a:hlinkClick r:id="rId2"/>
+              </a:rPr>
+              <a:t> </a:t>
+            </a:r>
+            <a:r>
+              <a:rPr lang="it-IT" dirty="0" err="1">
+                <a:hlinkClick r:id="rId2"/>
+              </a:rPr>
+              <a:t>Connected</a:t>
+            </a:r>
+            <a:r>
+              <a:rPr lang="it-IT" dirty="0">
+                <a:hlinkClick r:id="rId2"/>
+              </a:rPr>
+              <a:t> network with </a:t>
+            </a:r>
+            <a:r>
+              <a:rPr lang="it-IT" dirty="0" err="1">
+                <a:hlinkClick r:id="rId2"/>
+              </a:rPr>
+              <a:t>Tensorflow</a:t>
+            </a:r>
+            <a:r>
+              <a:rPr lang="it-IT" dirty="0">
+                <a:hlinkClick r:id="rId2"/>
+              </a:rPr>
+              <a:t> – </a:t>
+            </a:r>
+            <a:r>
+              <a:rPr lang="it-IT" dirty="0" err="1">
+                <a:hlinkClick r:id="rId2"/>
+              </a:rPr>
+              <a:t>Keras</a:t>
+            </a:r>
+            <a:r>
+              <a:rPr lang="it-IT" dirty="0"/>
+              <a:t> (Google </a:t>
+            </a:r>
+            <a:r>
+              <a:rPr lang="it-IT" dirty="0" err="1"/>
+              <a:t>Colab</a:t>
+            </a:r>
+            <a:r>
+              <a:rPr lang="it-IT" dirty="0"/>
+              <a:t> of the </a:t>
+            </a:r>
+            <a:r>
+              <a:rPr lang="it-IT" dirty="0" err="1"/>
+              <a:t>python</a:t>
+            </a:r>
+            <a:r>
+              <a:rPr lang="it-IT" dirty="0"/>
+              <a:t> notebook)</a:t>
+            </a:r>
+          </a:p>
+          <a:p>
+            <a:pPr marL="342900" indent="-342900">
+              <a:buAutoNum type="arabicPeriod"/>
+            </a:pPr>
+            <a:r>
+              <a:rPr lang="it-IT" dirty="0" err="1">
+                <a:hlinkClick r:id="rId3"/>
+              </a:rPr>
+              <a:t>Convolutional</a:t>
+            </a:r>
+            <a:r>
+              <a:rPr lang="it-IT" dirty="0">
+                <a:hlinkClick r:id="rId3"/>
+              </a:rPr>
+              <a:t> </a:t>
+            </a:r>
+            <a:r>
+              <a:rPr lang="it-IT" dirty="0" err="1">
+                <a:hlinkClick r:id="rId3"/>
+              </a:rPr>
+              <a:t>Neural</a:t>
+            </a:r>
+            <a:r>
+              <a:rPr lang="it-IT" dirty="0">
+                <a:hlinkClick r:id="rId3"/>
+              </a:rPr>
+              <a:t> Network with </a:t>
+            </a:r>
+            <a:r>
+              <a:rPr lang="it-IT" dirty="0" err="1">
+                <a:hlinkClick r:id="rId3"/>
+              </a:rPr>
+              <a:t>Tensorflow</a:t>
+            </a:r>
+            <a:r>
+              <a:rPr lang="it-IT" dirty="0">
+                <a:hlinkClick r:id="rId3"/>
+              </a:rPr>
+              <a:t> – </a:t>
+            </a:r>
+            <a:r>
+              <a:rPr lang="it-IT" dirty="0" err="1">
+                <a:hlinkClick r:id="rId3"/>
+              </a:rPr>
+              <a:t>Keras</a:t>
+            </a:r>
+            <a:r>
+              <a:rPr lang="it-IT" dirty="0"/>
+              <a:t> (Google </a:t>
+            </a:r>
+            <a:r>
+              <a:rPr lang="it-IT" dirty="0" err="1"/>
+              <a:t>Colab</a:t>
+            </a:r>
+            <a:r>
+              <a:rPr lang="it-IT" dirty="0"/>
+              <a:t> of the </a:t>
+            </a:r>
+            <a:r>
+              <a:rPr lang="it-IT" dirty="0" err="1"/>
+              <a:t>python</a:t>
+            </a:r>
+            <a:r>
+              <a:rPr lang="it-IT" dirty="0"/>
+              <a:t> notebook)</a:t>
+            </a:r>
+          </a:p>
+          <a:p>
+            <a:pPr marL="342900" indent="-342900">
+              <a:buAutoNum type="arabicPeriod"/>
+            </a:pPr>
+            <a:endParaRPr lang="it-IT" dirty="0"/>
+          </a:p>
+          <a:p>
+            <a:pPr marL="342900" indent="-342900">
+              <a:buAutoNum type="arabicPeriod"/>
+            </a:pPr>
+            <a:endParaRPr lang="it-IT" dirty="0"/>
+          </a:p>
+        </p:txBody>
+      </p:sp>
+      <p:sp>
+        <p:nvSpPr>
+          <p:cNvPr id="6" name="CasellaDiTesto 5">
+            <a:extLst>
+              <a:ext uri="{FF2B5EF4-FFF2-40B4-BE49-F238E27FC236}">
+                <a16:creationId xmlns:a16="http://schemas.microsoft.com/office/drawing/2014/main" id="{83DCD616-51A0-12B9-61E1-7EA042E818CD}"/>
+              </a:ext>
+            </a:extLst>
+          </p:cNvPr>
+          <p:cNvSpPr txBox="1"/>
+          <p:nvPr/>
+        </p:nvSpPr>
+        <p:spPr>
+          <a:xfrm>
+            <a:off x="199735" y="1020445"/>
+            <a:ext cx="6282708" cy="5786199"/>
+          </a:xfrm>
+          <a:prstGeom prst="rect">
+            <a:avLst/>
+          </a:prstGeom>
+          <a:noFill/>
+        </p:spPr>
+        <p:txBody>
+          <a:bodyPr wrap="square" rtlCol="0">
+            <a:spAutoFit/>
+          </a:bodyPr>
+          <a:lstStyle/>
+          <a:p>
+            <a:r>
+              <a:rPr lang="en-US" sz="2800" b="1" dirty="0">
+                <a:solidFill>
+                  <a:srgbClr val="FF0000"/>
+                </a:solidFill>
+              </a:rPr>
+              <a:t>Assignment</a:t>
+            </a:r>
+          </a:p>
+          <a:p>
+            <a:r>
+              <a:rPr lang="en-US" dirty="0"/>
+              <a:t>Build a short report (e.g., a Word or PDF document) based on experiments with both notebooks.</a:t>
+            </a:r>
+          </a:p>
+          <a:p>
+            <a:endParaRPr lang="it-IT" dirty="0"/>
+          </a:p>
+          <a:p>
+            <a:r>
+              <a:rPr lang="en-US" b="1" dirty="0"/>
+              <a:t>Experiments</a:t>
+            </a:r>
+          </a:p>
+          <a:p>
+            <a:r>
+              <a:rPr lang="en-US" dirty="0"/>
+              <a:t>Modify and test different configurations of the models. In particular, you can change:</a:t>
+            </a:r>
+          </a:p>
+          <a:p>
+            <a:pPr marL="285750" indent="-285750">
+              <a:buFont typeface="Arial" panose="020B0604020202020204" pitchFamily="34" charset="0"/>
+              <a:buChar char="•"/>
+            </a:pPr>
+            <a:r>
+              <a:rPr lang="en-US" dirty="0"/>
+              <a:t>Number and type of layers</a:t>
+            </a:r>
+          </a:p>
+          <a:p>
+            <a:pPr marL="285750" indent="-285750">
+              <a:buFont typeface="Arial" panose="020B0604020202020204" pitchFamily="34" charset="0"/>
+              <a:buChar char="•"/>
+            </a:pPr>
+            <a:r>
+              <a:rPr lang="en-US" dirty="0"/>
+              <a:t>Optimizer (e.g., Adam, SGD, etc.)</a:t>
+            </a:r>
+          </a:p>
+          <a:p>
+            <a:pPr marL="285750" indent="-285750">
+              <a:buFont typeface="Arial" panose="020B0604020202020204" pitchFamily="34" charset="0"/>
+              <a:buChar char="•"/>
+            </a:pPr>
+            <a:r>
+              <a:rPr lang="en-US" dirty="0"/>
+              <a:t>Number of epochs</a:t>
+            </a:r>
+          </a:p>
+          <a:p>
+            <a:pPr marL="285750" indent="-285750">
+              <a:buFont typeface="Arial" panose="020B0604020202020204" pitchFamily="34" charset="0"/>
+              <a:buChar char="•"/>
+            </a:pPr>
+            <a:r>
+              <a:rPr lang="en-US" dirty="0"/>
+              <a:t>Batch size</a:t>
+            </a:r>
+          </a:p>
+          <a:p>
+            <a:pPr marL="285750" indent="-285750">
+              <a:buFont typeface="Arial" panose="020B0604020202020204" pitchFamily="34" charset="0"/>
+              <a:buChar char="•"/>
+            </a:pPr>
+            <a:r>
+              <a:rPr lang="en-US" dirty="0"/>
+              <a:t>Activation functions</a:t>
+            </a:r>
+          </a:p>
+          <a:p>
+            <a:r>
+              <a:rPr lang="en-US" dirty="0"/>
+              <a:t>Perform </a:t>
+            </a:r>
+            <a:r>
+              <a:rPr lang="en-US" b="1" dirty="0"/>
+              <a:t>at least 5–8 different experiments</a:t>
+            </a:r>
+            <a:r>
+              <a:rPr lang="en-US" dirty="0"/>
+              <a:t> (more is encouraged but not necessary).</a:t>
+            </a:r>
+          </a:p>
+          <a:p>
+            <a:br>
+              <a:rPr lang="it-IT" dirty="0"/>
+            </a:br>
+            <a:r>
+              <a:rPr lang="en-US" dirty="0"/>
+              <a:t>For each experiment, report:</a:t>
+            </a:r>
+          </a:p>
+          <a:p>
+            <a:pPr marL="285750" indent="-285750">
+              <a:buFont typeface="Arial" panose="020B0604020202020204" pitchFamily="34" charset="0"/>
+              <a:buChar char="•"/>
+            </a:pPr>
+            <a:r>
+              <a:rPr lang="en-US" dirty="0"/>
+              <a:t>Training accuracy</a:t>
+            </a:r>
+          </a:p>
+          <a:p>
+            <a:pPr marL="285750" indent="-285750">
+              <a:buFont typeface="Arial" panose="020B0604020202020204" pitchFamily="34" charset="0"/>
+              <a:buChar char="•"/>
+            </a:pPr>
+            <a:r>
+              <a:rPr lang="en-US" dirty="0"/>
+              <a:t>Validation accuracy</a:t>
+            </a:r>
+          </a:p>
+          <a:p>
+            <a:pPr marL="285750" indent="-285750">
+              <a:buFont typeface="Arial" panose="020B0604020202020204" pitchFamily="34" charset="0"/>
+              <a:buChar char="•"/>
+            </a:pPr>
+            <a:r>
+              <a:rPr lang="en-US" dirty="0"/>
+              <a:t>(Optional but recommended) Training and validation loss</a:t>
+            </a:r>
+          </a:p>
+          <a:p>
+            <a:r>
+              <a:rPr lang="en-US" dirty="0"/>
+              <a:t>Summarize your results in a </a:t>
+            </a:r>
+            <a:r>
+              <a:rPr lang="en-US" b="1" dirty="0"/>
+              <a:t>table</a:t>
+            </a:r>
+            <a:r>
+              <a:rPr lang="en-US" dirty="0"/>
+              <a:t> for easier comparison.</a:t>
+            </a:r>
+            <a:endParaRPr lang="it-IT" dirty="0"/>
+          </a:p>
+        </p:txBody>
+      </p:sp>
+      <p:sp>
+        <p:nvSpPr>
+          <p:cNvPr id="7" name="CasellaDiTesto 6">
+            <a:extLst>
+              <a:ext uri="{FF2B5EF4-FFF2-40B4-BE49-F238E27FC236}">
+                <a16:creationId xmlns:a16="http://schemas.microsoft.com/office/drawing/2014/main" id="{17383197-A4BF-ADB8-5CF8-2296941EFF10}"/>
+              </a:ext>
+            </a:extLst>
+          </p:cNvPr>
+          <p:cNvSpPr txBox="1"/>
+          <p:nvPr/>
+        </p:nvSpPr>
+        <p:spPr>
+          <a:xfrm>
+            <a:off x="6482443" y="1298760"/>
+            <a:ext cx="5709557" cy="5355312"/>
+          </a:xfrm>
+          <a:prstGeom prst="rect">
+            <a:avLst/>
+          </a:prstGeom>
+          <a:noFill/>
+        </p:spPr>
+        <p:txBody>
+          <a:bodyPr wrap="square" rtlCol="0">
+            <a:spAutoFit/>
+          </a:bodyPr>
+          <a:lstStyle/>
+          <a:p>
+            <a:r>
+              <a:rPr lang="en-US" b="1" dirty="0"/>
+              <a:t>Questions to answer</a:t>
+            </a:r>
+          </a:p>
+          <a:p>
+            <a:pPr marL="342900" indent="-342900">
+              <a:buFont typeface="+mj-lt"/>
+              <a:buAutoNum type="arabicPeriod"/>
+            </a:pPr>
+            <a:r>
+              <a:rPr lang="en-US" dirty="0"/>
+              <a:t>Which configuration (architecture, number of layers, optimizer, epochs, etc.) achieved the best performance?</a:t>
+            </a:r>
+            <a:br>
+              <a:rPr lang="en-US" dirty="0"/>
+            </a:br>
+            <a:r>
+              <a:rPr lang="en-US" dirty="0"/>
+              <a:t>Which model performed better on the dataset: </a:t>
+            </a:r>
+            <a:r>
+              <a:rPr lang="en-US" b="1" dirty="0"/>
+              <a:t>Convolutional Neural Network or Fully Connected Network</a:t>
+            </a:r>
+            <a:r>
+              <a:rPr lang="en-US" dirty="0"/>
+              <a:t>?</a:t>
+            </a:r>
+          </a:p>
+          <a:p>
+            <a:pPr marL="342900" indent="-342900">
+              <a:buFont typeface="+mj-lt"/>
+              <a:buAutoNum type="arabicPeriod"/>
+            </a:pPr>
+            <a:endParaRPr lang="en-US" dirty="0"/>
+          </a:p>
+          <a:p>
+            <a:pPr marL="342900" indent="-342900">
+              <a:buFont typeface="+mj-lt"/>
+              <a:buAutoNum type="arabicPeriod"/>
+            </a:pPr>
+            <a:r>
+              <a:rPr lang="en-US" dirty="0"/>
+              <a:t>In your opinion, which parameters had the greatest impact on performance (e.g., number of layers, architecture type, epochs, optimizer, etc.)? Explain briefly.</a:t>
+            </a:r>
+          </a:p>
+          <a:p>
+            <a:pPr marL="342900" indent="-342900">
+              <a:buFont typeface="+mj-lt"/>
+              <a:buAutoNum type="arabicPeriod"/>
+            </a:pPr>
+            <a:endParaRPr lang="en-US" dirty="0"/>
+          </a:p>
+          <a:p>
+            <a:pPr marL="342900" indent="-342900">
+              <a:buFont typeface="+mj-lt"/>
+              <a:buAutoNum type="arabicPeriod"/>
+            </a:pPr>
+            <a:r>
+              <a:rPr lang="en-US" dirty="0"/>
+              <a:t>(Advanced) Did you observe signs of </a:t>
+            </a:r>
+            <a:r>
+              <a:rPr lang="en-US" b="1" dirty="0"/>
+              <a:t>overfitting or underfitting</a:t>
+            </a:r>
+            <a:r>
+              <a:rPr lang="en-US" dirty="0"/>
+              <a:t>? If yes, in which cases?</a:t>
+            </a:r>
+          </a:p>
+          <a:p>
+            <a:pPr marL="342900" indent="-342900">
+              <a:buFont typeface="+mj-lt"/>
+              <a:buAutoNum type="arabicPeriod"/>
+            </a:pPr>
+            <a:endParaRPr lang="en-US" dirty="0"/>
+          </a:p>
+          <a:p>
+            <a:pPr marL="342900" indent="-342900">
+              <a:buFont typeface="+mj-lt"/>
+              <a:buAutoNum type="arabicPeriod"/>
+            </a:pPr>
+            <a:r>
+              <a:rPr lang="en-US" dirty="0"/>
+              <a:t>Any additional observations or insights you would like to highlight.</a:t>
+            </a:r>
+          </a:p>
+          <a:p>
+            <a:endParaRPr lang="it-IT" dirty="0"/>
+          </a:p>
+        </p:txBody>
+      </p:sp>
+      <p:cxnSp>
+        <p:nvCxnSpPr>
+          <p:cNvPr id="9" name="Connettore diritto 8">
+            <a:extLst>
+              <a:ext uri="{FF2B5EF4-FFF2-40B4-BE49-F238E27FC236}">
+                <a16:creationId xmlns:a16="http://schemas.microsoft.com/office/drawing/2014/main" id="{CEF0E44C-B8C6-E800-42AF-058A2358CD4F}"/>
+              </a:ext>
+            </a:extLst>
+          </p:cNvPr>
+          <p:cNvCxnSpPr/>
+          <p:nvPr/>
+        </p:nvCxnSpPr>
+        <p:spPr>
+          <a:xfrm>
+            <a:off x="6417788" y="1173018"/>
+            <a:ext cx="0" cy="5481054"/>
+          </a:xfrm>
+          <a:prstGeom prst="line">
+            <a:avLst/>
+          </a:prstGeom>
+          <a:ln w="38100">
+            <a:solidFill>
+              <a:srgbClr val="1F4291"/>
+            </a:solidFill>
+          </a:ln>
+        </p:spPr>
+        <p:style>
+          <a:lnRef idx="1">
+            <a:schemeClr val="accent1"/>
+          </a:lnRef>
+          <a:fillRef idx="0">
+            <a:schemeClr val="accent1"/>
+          </a:fillRef>
+          <a:effectRef idx="0">
+            <a:schemeClr val="accent1"/>
+          </a:effectRef>
+          <a:fontRef idx="minor">
+            <a:schemeClr val="tx1"/>
+          </a:fontRef>
+        </p:style>
+      </p:cxnSp>
+    </p:spTree>
+    <p:extLst>
+      <p:ext uri="{BB962C8B-B14F-4D97-AF65-F5344CB8AC3E}">
+        <p14:creationId xmlns:p14="http://schemas.microsoft.com/office/powerpoint/2010/main" val="2867223529"/>
       </p:ext>
     </p:extLst>
   </p:cSld>
@@ -17107,8 +17747,8 @@
           </a:prstGeom>
         </p:spPr>
       </p:pic>
-      <mc:AlternateContent xmlns:mc="http://schemas.openxmlformats.org/markup-compatibility/2006">
-        <mc:Choice xmlns:a14="http://schemas.microsoft.com/office/drawing/2010/main" Requires="a14">
+      <mc:AlternateContent xmlns:mc="http://schemas.openxmlformats.org/markup-compatibility/2006" xmlns:a14="http://schemas.microsoft.com/office/drawing/2010/main">
+        <mc:Choice Requires="a14">
           <p:sp>
             <p:nvSpPr>
               <p:cNvPr id="5" name="CasellaDiTesto 4">
@@ -17255,7 +17895,7 @@
             </p:txBody>
           </p:sp>
         </mc:Choice>
-        <mc:Fallback>
+        <mc:Fallback xmlns="">
           <p:sp>
             <p:nvSpPr>
               <p:cNvPr id="5" name="CasellaDiTesto 4">
@@ -17300,8 +17940,8 @@
           </p:sp>
         </mc:Fallback>
       </mc:AlternateContent>
-      <mc:AlternateContent xmlns:mc="http://schemas.openxmlformats.org/markup-compatibility/2006">
-        <mc:Choice xmlns:a14="http://schemas.microsoft.com/office/drawing/2010/main" Requires="a14">
+      <mc:AlternateContent xmlns:mc="http://schemas.openxmlformats.org/markup-compatibility/2006" xmlns:a14="http://schemas.microsoft.com/office/drawing/2010/main">
+        <mc:Choice Requires="a14">
           <p:sp>
             <p:nvSpPr>
               <p:cNvPr id="19" name="CasellaDiTesto 18">
@@ -17358,7 +17998,7 @@
             </p:txBody>
           </p:sp>
         </mc:Choice>
-        <mc:Fallback>
+        <mc:Fallback xmlns="">
           <p:sp>
             <p:nvSpPr>
               <p:cNvPr id="19" name="CasellaDiTesto 18">
